--- a/slides/review2.pptx
+++ b/slides/review2.pptx
@@ -1447,7 +1447,7 @@
           </a:p>
           <a:p>
             <a:r>
-              <a:t>Pipeline left to right. Be upfront that LDA scores better on UMass; the choice of NMF is about interpretability. Say that the manual 200-review check is being redone with blind labels.</a:t>
+              <a:t>Pipeline left to right. Be upfront that LDA scores better on UMass; the choice of NMF is about interpretability. The blind 200-review check was labelled by an AI assistant with the model topic hidden: 35.5% agreement, kappa 0.30, 73 reviews with no clear theme; well recovered are Early Access (88%), repetition (64%) and multiplayer and crashes (60%). An earlier 96% figure was withdrawn because those labels were not independent.</a:t>
             </a:r>
           </a:p>
         </p:txBody>
@@ -6507,7 +6507,7 @@
                 </a:solidFill>
                 <a:latin typeface="Bitstream Charter"/>
               </a:rPr>
-              <a:t>A blind manual check of 200 labelled reviews is being redone, so we do not quote an agreement figure.</a:t>
+              <a:t>Blind check of 200 reviews (labelled by an AI assistant): 35.5% agreement, kappa 0.30. Early Access, repetition and crash topics hold up; boss and balance topics do not.</a:t>
             </a:r>
           </a:p>
         </p:txBody>
@@ -6894,6 +6894,38 @@
                 <a:latin typeface="Bitstream Charter"/>
               </a:rPr>
               <a:t>“boring” is in 9.1% of negative reviews against 0.8% of positive ones, “waste” 2.9% against 0.3%.</a:t>
+            </a:r>
+          </a:p>
+          <a:p>
+            <a:pPr>
+              <a:spcAft>
+                <a:spcPts val="600"/>
+              </a:spcAft>
+            </a:pPr>
+            <a:r>
+              <a:rPr sz="1150" b="1" i="0">
+                <a:solidFill>
+                  <a:srgbClr val="132C43"/>
+                </a:solidFill>
+                <a:latin typeface="Bitstream Charter"/>
+              </a:rPr>
+              <a:t>Caution</a:t>
+            </a:r>
+          </a:p>
+          <a:p>
+            <a:pPr>
+              <a:spcAft>
+                <a:spcPts val="600"/>
+              </a:spcAft>
+            </a:pPr>
+            <a:r>
+              <a:rPr sz="1150" b="0" i="0">
+                <a:solidFill>
+                  <a:srgbClr val="263C50"/>
+                </a:solidFill>
+                <a:latin typeface="Bitstream Charter"/>
+              </a:rPr>
+              <a:t>In the blind check the boss and balance topics agree only 8% to 16%, so read them as exploratory.</a:t>
             </a:r>
           </a:p>
         </p:txBody>
@@ -12659,7 +12691,7 @@
                 </a:solidFill>
                 <a:latin typeface="Bitstream Charter"/>
               </a:rPr>
-              <a:t>Tuning gave small gains; the blind manual topic check is being redone; discount impact was not analysed.</a:t>
+              <a:t>Tuning gave small gains; the blind topic check agrees on only 35.5% of reviews (one AI annotator); discount impact was not analysed.</a:t>
             </a:r>
           </a:p>
         </p:txBody>
@@ -13398,7 +13430,7 @@
                 </a:solidFill>
                 <a:latin typeface="Bitstream Charter"/>
               </a:rPr>
-              <a:t>Redo the blind manual topic check.</a:t>
+              <a:t>Re-label a subset by hand to confirm the topic check.</a:t>
             </a:r>
           </a:p>
           <a:p>

--- a/slides/review2.pptx
+++ b/slides/review2.pptx
@@ -1962,7 +1962,7 @@
           </a:p>
           <a:p xmlns:a="http://schemas.openxmlformats.org/drawingml/2006/main">
             <a:r>
-              <a:t>Same test records for every model. Guessing baselines: PR-AUC 0.106, macro-F1 0.22. Tuning by grid search changed cross-validation scores by 0.002 to 0.02 and did not change which models tie.</a:t>
+              <a:t>Same test records for every model. Guessing baselines: PR-AUC 0.106, macro-F1 0.22. Every model was tuned by grid search on the shared folds. Review-level gains were within one standard deviation; at game level the cross-validation gains for Random Forest and LightGBM did not carry to test, so quote the test intervals.</a:t>
             </a:r>
           </a:p>
         </p:txBody>
@@ -10254,7 +10254,7 @@
                           <a:ea typeface="Arial"/>
                           <a:cs typeface="Arial"/>
                         </a:rPr>
-                        <a:t>Exploratory analysis: 29 figures, association tests, tag combinations; dashboard pages</a:t>
+                        <a:t>Exploratory analysis: 29 figures, association tests, tag combinations; dashboard wireframe and CSV downloads</a:t>
                       </a:r>
                     </a:p>
                   </a:txBody>
@@ -10290,7 +10290,7 @@
                           <a:ea typeface="Arial"/>
                           <a:cs typeface="Arial"/>
                         </a:rPr>
-                        <a:t>PR #1, notebooks/02_EDA_Visualizations.ipynb; cards #20, #21</a:t>
+                        <a:t>PRs #1, #101, notebooks/02_EDA_Visualizations.ipynb; cards #20, #21, #37, #40, #41</a:t>
                       </a:r>
                     </a:p>
                   </a:txBody>
@@ -10522,7 +10522,7 @@
                           <a:ea typeface="Arial"/>
                           <a:cs typeface="Arial"/>
                         </a:rPr>
-                        <a:t>src/collect, src/clean, src/models; PRs #56, #57, #95, #96, #97; cards #5-#17, #23-#27, #43, #45</a:t>
+                        <a:t>src/collect, src/clean, src/models; PRs #56, #57, #95-#97; cards #5-#17, #23-#27, #43, #45, #83-#94</a:t>
                       </a:r>
                     </a:p>
                   </a:txBody>
@@ -17143,7 +17143,7 @@
                           <a:ea typeface="Arial"/>
                           <a:cs typeface="Arial"/>
                         </a:rPr>
-                        <a:t>0.404</a:t>
+                        <a:t>0.371</a:t>
                       </a:r>
                     </a:p>
                   </a:txBody>
@@ -17295,7 +17295,7 @@
                           <a:ea typeface="Arial"/>
                           <a:cs typeface="Arial"/>
                         </a:rPr>
-                        <a:t>0.421</a:t>
+                        <a:t>0.372</a:t>
                       </a:r>
                     </a:p>
                   </a:txBody>
@@ -17447,7 +17447,7 @@
                           <a:ea typeface="Arial"/>
                           <a:cs typeface="Arial"/>
                         </a:rPr>
-                        <a:t>0.388</a:t>
+                        <a:t>0.437</a:t>
                       </a:r>
                     </a:p>
                   </a:txBody>
@@ -17625,7 +17625,7 @@
                 <a:ea typeface="Arial"/>
                 <a:cs typeface="Arial"/>
               </a:rPr>
-              <a:t>the three tree models tie at review level (PR-AUC about 0.28 against 0.11 for guessing) and simple models match boosting at game level (about 0.42 against 0.22); store metadata says little about how good a game is. Game-level tuning is in progress.</a:t>
+              <a:t>the three tree models tie at review level (PR-AUC about 0.28 against 0.11 for guessing) and at game level tuned XGBoost (0.44) and Logistic Regression (0.42) lead, while Random Forest and LightGBM fall to 0.37 on test after tuning (intervals overlap, no winner); store metadata says little about how good a game is.</a:t>
             </a:r>
           </a:p>
         </p:txBody>

--- a/slides/review2.pptx
+++ b/slides/review2.pptx
@@ -4708,7 +4708,8 @@
                 <a:ea typeface="Arial"/>
                 <a:cs typeface="Arial"/>
               </a:rPr>
-              <a:t>Review 2: Unit 3 advanced analytics (text mining and association rules) and the interactive dashboard</a:t>
+              <a:t>Review 2: Unit 3 advanced analytics (text mining and association rules) and the interactive dashboard
+Guide: Rohini S</a:t>
             </a:r>
           </a:p>
         </p:txBody>

--- a/slides/review2.pptx
+++ b/slides/review2.pptx
@@ -9624,7 +9624,7 @@
                 <a:ea typeface="Arial"/>
                 <a:cs typeface="Arial"/>
               </a:rPr>
-              <a:t>IndieGuard dashboard (Streamlit). Local launch: streamlit run src/dashboard/app.py; steps in docs/dashboard.md.</a:t>
+              <a:t>IndieGuard dashboard (Streamlit), live at https://indieguard.streamlit.app. Local launch: streamlit run src/dashboard/app.py; steps in docs/dashboard.md.</a:t>
             </a:r>
           </a:p>
         </p:txBody>
@@ -12676,7 +12676,7 @@
                 <a:ea typeface="Arial"/>
                 <a:cs typeface="Arial"/>
               </a:rPr>
-              <a:t>Units 1 to 3, evaluation, report and dashboard are implemented and integrated; the dashboard runs locally.</a:t>
+              <a:t>Units 1 to 3, evaluation, report and dashboard are implemented and integrated; the dashboard is deployed at indieguard.streamlit.app.</a:t>
             </a:r>
           </a:p>
         </p:txBody>

--- a/slides/review2.pptx
+++ b/slides/review2.pptx
@@ -4709,7 +4709,8 @@
                 <a:cs typeface="Arial"/>
               </a:rPr>
               <a:t>Review 2: Unit 3 advanced analytics (text mining and association rules) and the interactive dashboard
-Guide: Rohini S</a:t>
+Guide: Rohini S
+Date: 18 October 2026</a:t>
             </a:r>
           </a:p>
         </p:txBody>

--- a/slides/review2.pptx
+++ b/slides/review2.pptx
@@ -5252,7 +5252,7 @@
                 <a:ea typeface="Arial"/>
                 <a:cs typeface="Arial"/>
               </a:rPr>
-              <a:t>a negative-review detector (PR-AUC 0.84) and 8 complaint themes: crashes and multiplayer bugs lead early (29%), boss and balance later (34%); “boring” is in 9.1% of negative reviews against 0.8% of positive ones.</a:t>
+              <a:t>a negative-review detector (PR-AUC 0.84, ROC-AUC 0.97, accuracy 94.6%) and 8 complaint themes: crashes and multiplayer bugs lead early (29%), boss and balance later (34%); “boring” is in 9.1% of negative reviews against 0.8% of positive ones.</a:t>
             </a:r>
           </a:p>
         </p:txBody>
@@ -5508,9 +5508,9 @@
             <a:tbl>
               <a:tblPr/>
               <a:tblGrid>
-                <a:gridCol w="5120640"/>
-                <a:gridCol w="1828800"/>
-                <a:gridCol w="2194560"/>
+                <a:gridCol w="4389120"/>
+                <a:gridCol w="2651760"/>
+                <a:gridCol w="2103120"/>
                 <a:gridCol w="1828800"/>
               </a:tblGrid>
               <a:tr h="457200">
@@ -5576,7 +5576,7 @@
                           <a:ea typeface="Arial"/>
                           <a:cs typeface="Arial"/>
                         </a:rPr>
-                        <a:t>PR-AUC (test)</a:t>
+                        <a:t>PR-AUC / ROC-AUC (test)</a:t>
                       </a:r>
                     </a:p>
                   </a:txBody>
@@ -5746,7 +5746,7 @@
                           <a:ea typeface="Arial"/>
                           <a:cs typeface="Arial"/>
                         </a:rPr>
-                        <a:t>0.115</a:t>
+                        <a:t>0.115  /  0.500</a:t>
                       </a:r>
                     </a:p>
                   </a:txBody>
@@ -5898,7 +5898,7 @@
                           <a:ea typeface="Arial"/>
                           <a:cs typeface="Arial"/>
                         </a:rPr>
-                        <a:t>0.360</a:t>
+                        <a:t>0.360  /  0.758</a:t>
                       </a:r>
                     </a:p>
                   </a:txBody>
@@ -6050,7 +6050,7 @@
                           <a:ea typeface="Arial"/>
                           <a:cs typeface="Arial"/>
                         </a:rPr>
-                        <a:t>0.593</a:t>
+                        <a:t>0.593  /  0.895</a:t>
                       </a:r>
                     </a:p>
                   </a:txBody>
@@ -6202,7 +6202,7 @@
                           <a:ea typeface="Arial"/>
                           <a:cs typeface="Arial"/>
                         </a:rPr>
-                        <a:t>0.838</a:t>
+                        <a:t>0.838  /  0.971</a:t>
                       </a:r>
                     </a:p>
                   </a:txBody>
@@ -6452,7 +6452,7 @@
                 <a:ea typeface="Arial"/>
                 <a:cs typeface="Arial"/>
               </a:rPr>
-              <a:t>the full text model is selected: it detects a negative review far better than metadata. It detects, it does not forecast. A blind check of 200 reviews (labelled by an AI assistant) agrees with the topics on 35.5%: only the Early Access, repetition and crash topics are reliable.</a:t>
+              <a:t>the full text model is selected: ROC-AUC 0.971 (per-game 0.976) against 0.758 for metadata alone, and PR-AUC 0.838 against 0.360. It detects, it does not forecast. A blind check of 200 reviews (labelled by an AI assistant) agrees with the topics on 35.5%: only the Early Access, repetition and crash topics are reliable.</a:t>
             </a:r>
           </a:p>
         </p:txBody>

--- a/slides/review2.pptx
+++ b/slides/review2.pptx
@@ -393,6 +393,201 @@
     <a:p>
       <a:pPr>
         <a:defRPr sz="1100">
+          <a:latin typeface="Arial"/>
+        </a:defRPr>
+      </a:pPr>
+      <a:endParaRPr lang="en-US"/>
+    </a:p>
+  </c:txPr>
+  <c:externalData r:id="rId1">
+    <c:autoUpdate val="0"/>
+  </c:externalData>
+</c:chartSpace>
+</file>
+
+<file path=ppt/charts/chart3.xml><?xml version="1.0" encoding="utf-8"?>
+<c:chartSpace xmlns:c="http://schemas.openxmlformats.org/drawingml/2006/chart" xmlns:a="http://schemas.openxmlformats.org/drawingml/2006/main" xmlns:r="http://schemas.openxmlformats.org/officeDocument/2006/relationships">
+  <c:date1904 val="0"/>
+  <c:chart>
+    <c:title>
+      <c:tx>
+        <c:rich>
+          <a:bodyPr/>
+          <a:lstStyle/>
+          <a:p>
+            <a:r>
+              <a:rPr sz="1000" b="1">
+                <a:solidFill>
+                  <a:srgbClr val="142D4E"/>
+                </a:solidFill>
+                <a:latin typeface="Arial"/>
+              </a:rPr>
+              <a:t>Strong rules by configuration</a:t>
+            </a:r>
+          </a:p>
+        </c:rich>
+      </c:tx>
+      <c:layout/>
+      <c:overlay val="0"/>
+    </c:title>
+    <c:autoTitleDeleted val="0"/>
+    <c:plotArea>
+      <c:barChart>
+        <c:barDir val="col"/>
+        <c:grouping val="clustered"/>
+        <c:ser>
+          <c:idx val="0"/>
+          <c:order val="0"/>
+          <c:tx>
+            <c:strRef>
+              <c:f>Sheet1!$B$1</c:f>
+              <c:strCache>
+                <c:ptCount val="1"/>
+                <c:pt idx="0">
+                  <c:v>Strong rules</c:v>
+                </c:pt>
+              </c:strCache>
+            </c:strRef>
+          </c:tx>
+          <c:spPr>
+            <a:solidFill>
+              <a:srgbClr val="142D4E"/>
+            </a:solidFill>
+          </c:spPr>
+          <c:invertIfNegative val="0"/>
+          <c:cat>
+            <c:strRef>
+              <c:f>Sheet1!$A$2:$A$7</c:f>
+              <c:strCache>
+                <c:ptCount val="6"/>
+                <c:pt idx="0">
+                  <c:v>FP-Growth (chosen)</c:v>
+                </c:pt>
+                <c:pt idx="1">
+                  <c:v>Apriori</c:v>
+                </c:pt>
+                <c:pt idx="2">
+                  <c:v>Support 15</c:v>
+                </c:pt>
+                <c:pt idx="3">
+                  <c:v>Support 40</c:v>
+                </c:pt>
+                <c:pt idx="4">
+                  <c:v>Pairs only</c:v>
+                </c:pt>
+                <c:pt idx="5">
+                  <c:v>+ after-play tags</c:v>
+                </c:pt>
+              </c:strCache>
+            </c:strRef>
+          </c:cat>
+          <c:val>
+            <c:numRef>
+              <c:f>Sheet1!$B$2:$B$7</c:f>
+              <c:numCache>
+                <c:formatCode>General</c:formatCode>
+                <c:ptCount val="6"/>
+                <c:pt idx="0">
+                  <c:v>95</c:v>
+                </c:pt>
+                <c:pt idx="1">
+                  <c:v>95</c:v>
+                </c:pt>
+                <c:pt idx="2">
+                  <c:v>107</c:v>
+                </c:pt>
+                <c:pt idx="3">
+                  <c:v>69</c:v>
+                </c:pt>
+                <c:pt idx="4">
+                  <c:v>41</c:v>
+                </c:pt>
+                <c:pt idx="5">
+                  <c:v>131</c:v>
+                </c:pt>
+              </c:numCache>
+            </c:numRef>
+          </c:val>
+        </c:ser>
+        <c:dLbls>
+          <c:numFmt formatCode="0" sourceLinked="0"/>
+          <c:txPr>
+            <a:bodyPr/>
+            <a:lstStyle/>
+            <a:p>
+              <a:pPr>
+                <a:defRPr sz="900"/>
+              </a:pPr>
+            </a:p>
+          </c:txPr>
+          <c:dLblPos val="outEnd"/>
+          <c:showLegendKey val="0"/>
+          <c:showVal val="1"/>
+          <c:showCatName val="0"/>
+          <c:showSerName val="0"/>
+          <c:showPercent val="0"/>
+          <c:showBubbleSize val="0"/>
+          <c:showLeaderLines val="1"/>
+        </c:dLbls>
+        <c:gapWidth val="55"/>
+        <c:axId val="-2068027336"/>
+        <c:axId val="-2113994440"/>
+      </c:barChart>
+      <c:catAx>
+        <c:axId val="-2068027336"/>
+        <c:scaling>
+          <c:orientation val="minMax"/>
+        </c:scaling>
+        <c:delete val="0"/>
+        <c:axPos val="b"/>
+        <c:majorTickMark val="out"/>
+        <c:minorTickMark val="none"/>
+        <c:tickLblPos val="nextTo"/>
+        <c:spPr>
+          <a:ln>
+            <a:solidFill>
+              <a:srgbClr val="C9D6E2"/>
+            </a:solidFill>
+          </a:ln>
+        </c:spPr>
+        <c:txPr>
+          <a:bodyPr/>
+          <a:lstStyle/>
+          <a:p>
+            <a:pPr>
+              <a:defRPr sz="900"/>
+            </a:pPr>
+          </a:p>
+        </c:txPr>
+        <c:crossAx val="-2113994440"/>
+        <c:crosses val="autoZero"/>
+        <c:auto val="1"/>
+        <c:lblAlgn val="ctr"/>
+        <c:lblOffset val="100"/>
+        <c:noMultiLvlLbl val="0"/>
+      </c:catAx>
+      <c:valAx>
+        <c:axId val="-2113994440"/>
+        <c:scaling>
+          <c:min val="0.0"/>
+        </c:scaling>
+        <c:delete/>
+        <c:axPos val="l"/>
+        <c:majorTickMark val="out"/>
+        <c:minorTickMark val="none"/>
+        <c:tickLblPos val="nextTo"/>
+        <c:crossAx val="-2068027336"/>
+        <c:crosses val="autoZero"/>
+      </c:valAx>
+    </c:plotArea>
+    <c:dispBlanksAs val="gap"/>
+  </c:chart>
+  <c:txPr>
+    <a:bodyPr/>
+    <a:lstStyle/>
+    <a:p>
+      <a:pPr>
+        <a:defRPr sz="900">
           <a:latin typeface="Arial"/>
         </a:defRPr>
       </a:pPr>
@@ -4962,7 +5157,7 @@
         <p:spPr>
           <a:xfrm xmlns:a="http://schemas.openxmlformats.org/drawingml/2006/main">
             <a:off x="685800" y="1783080"/>
-            <a:ext cx="10668000" cy="640080"/>
+            <a:ext cx="10668000" cy="502920"/>
           </a:xfrm>
           <a:prstGeom xmlns:a="http://schemas.openxmlformats.org/drawingml/2006/main" prst="rect">
             <a:avLst/>
@@ -5019,162 +5214,6 @@
                 <a:cs typeface="Arial"/>
               </a:rPr>
               <a:t>Text mining, to find complaint themes and to flag negative reviews from their own words.</a:t>
-            </a:r>
-          </a:p>
-        </p:txBody>
-      </p:sp>
-      <p:sp>
-        <p:nvSpPr>
-          <p:cNvPr id="5" name="">
-            <a:extLst xmlns:a="http://schemas.openxmlformats.org/drawingml/2006/main">
-              <a:ext uri="{FF2B5EF4-FFF2-40B4-BE49-F238E27FC236}">
-                <a16:creationId xmlns:a16="http://schemas.microsoft.com/office/drawing/2014/main" id="{54E5F75A-D3D1-435A-BCBD-8F48202A6F65}"/>
-              </a:ext>
-            </a:extLst>
-          </p:cNvPr>
-          <p:cNvSpPr>
-            <a:spLocks xmlns:a="http://schemas.openxmlformats.org/drawingml/2006/main" noGrp="1"/>
-          </p:cNvSpPr>
-          <p:nvPr/>
-        </p:nvSpPr>
-        <p:spPr>
-          <a:xfrm xmlns:a="http://schemas.openxmlformats.org/drawingml/2006/main">
-            <a:off x="685800" y="2514600"/>
-            <a:ext cx="10668000" cy="1005840"/>
-          </a:xfrm>
-          <a:prstGeom xmlns:a="http://schemas.openxmlformats.org/drawingml/2006/main" prst="rect">
-            <a:avLst/>
-          </a:prstGeom>
-          <a:noFill xmlns:a="http://schemas.openxmlformats.org/drawingml/2006/main"/>
-          <a:ln xmlns:a="http://schemas.openxmlformats.org/drawingml/2006/main" w="0">
-            <a:noFill/>
-            <a:prstDash val="solid"/>
-          </a:ln>
-        </p:spPr>
-        <p:txBody>
-          <a:bodyPr xmlns:a="http://schemas.openxmlformats.org/drawingml/2006/main" wrap="square"/>
-          <a:lstStyle xmlns:a="http://schemas.openxmlformats.org/drawingml/2006/main">
-            <a:defPPr>
-              <a:defRPr sz="2025" b="0">
-                <a:solidFill>
-                  <a:srgbClr val="233247"/>
-                </a:solidFill>
-                <a:latin typeface="Arial"/>
-                <a:ea typeface="Arial"/>
-                <a:cs typeface="Arial"/>
-              </a:defRPr>
-            </a:defPPr>
-          </a:lstStyle>
-          <a:p xmlns:a="http://schemas.openxmlformats.org/drawingml/2006/main">
-            <a:pPr>
-              <a:defRPr sz="2025" b="0">
-                <a:solidFill>
-                  <a:srgbClr val="233247"/>
-                </a:solidFill>
-                <a:latin typeface="Arial"/>
-                <a:ea typeface="Arial"/>
-                <a:cs typeface="Arial"/>
-              </a:defRPr>
-            </a:pPr>
-            <a:r>
-              <a:rPr sz="1400" b="1">
-                <a:solidFill>
-                  <a:srgbClr val="233247"/>
-                </a:solidFill>
-                <a:latin typeface="Arial"/>
-                <a:ea typeface="Arial"/>
-                <a:cs typeface="Arial"/>
-              </a:rPr>
-              <a:t>Input and preparation: </a:t>
-            </a:r>
-            <a:r>
-              <a:rPr sz="1400" b="0">
-                <a:solidFill>
-                  <a:srgbClr val="233247"/>
-                </a:solidFill>
-                <a:latin typeface="Arial"/>
-                <a:ea typeface="Arial"/>
-                <a:cs typeface="Arial"/>
-              </a:rPr>
-              <a:t>English reviews only (557,202 after script and language filters); negation binding (not_fun, too_hard); stopwords; TF-IDF with 1 to 2 word groups and 100,000 terms; 78 SVD components for the compact model.</a:t>
-            </a:r>
-          </a:p>
-        </p:txBody>
-      </p:sp>
-      <p:sp>
-        <p:nvSpPr>
-          <p:cNvPr id="6" name="">
-            <a:extLst xmlns:a="http://schemas.openxmlformats.org/drawingml/2006/main">
-              <a:ext uri="{FF2B5EF4-FFF2-40B4-BE49-F238E27FC236}">
-                <a16:creationId xmlns:a16="http://schemas.microsoft.com/office/drawing/2014/main" id="{4695D477-8E18-4ECE-A35E-8096C2E64517}"/>
-              </a:ext>
-            </a:extLst>
-          </p:cNvPr>
-          <p:cNvSpPr>
-            <a:spLocks xmlns:a="http://schemas.openxmlformats.org/drawingml/2006/main" noGrp="1"/>
-          </p:cNvSpPr>
-          <p:nvPr/>
-        </p:nvSpPr>
-        <p:spPr>
-          <a:xfrm xmlns:a="http://schemas.openxmlformats.org/drawingml/2006/main">
-            <a:off x="685800" y="3611880"/>
-            <a:ext cx="10668000" cy="1005840"/>
-          </a:xfrm>
-          <a:prstGeom xmlns:a="http://schemas.openxmlformats.org/drawingml/2006/main" prst="rect">
-            <a:avLst/>
-          </a:prstGeom>
-          <a:noFill xmlns:a="http://schemas.openxmlformats.org/drawingml/2006/main"/>
-          <a:ln xmlns:a="http://schemas.openxmlformats.org/drawingml/2006/main" w="0">
-            <a:noFill/>
-            <a:prstDash val="solid"/>
-          </a:ln>
-        </p:spPr>
-        <p:txBody>
-          <a:bodyPr xmlns:a="http://schemas.openxmlformats.org/drawingml/2006/main" wrap="square"/>
-          <a:lstStyle xmlns:a="http://schemas.openxmlformats.org/drawingml/2006/main">
-            <a:defPPr>
-              <a:defRPr sz="2025" b="0">
-                <a:solidFill>
-                  <a:srgbClr val="233247"/>
-                </a:solidFill>
-                <a:latin typeface="Arial"/>
-                <a:ea typeface="Arial"/>
-                <a:cs typeface="Arial"/>
-              </a:defRPr>
-            </a:defPPr>
-          </a:lstStyle>
-          <a:p xmlns:a="http://schemas.openxmlformats.org/drawingml/2006/main">
-            <a:pPr>
-              <a:defRPr sz="2025" b="0">
-                <a:solidFill>
-                  <a:srgbClr val="233247"/>
-                </a:solidFill>
-                <a:latin typeface="Arial"/>
-                <a:ea typeface="Arial"/>
-                <a:cs typeface="Arial"/>
-              </a:defRPr>
-            </a:pPr>
-            <a:r>
-              <a:rPr sz="1400" b="1">
-                <a:solidFill>
-                  <a:srgbClr val="233247"/>
-                </a:solidFill>
-                <a:latin typeface="Arial"/>
-                <a:ea typeface="Arial"/>
-                <a:cs typeface="Arial"/>
-              </a:rPr>
-              <a:t>Implementation: </a:t>
-            </a:r>
-            <a:r>
-              <a:rPr sz="1400" b="0">
-                <a:solidFill>
-                  <a:srgbClr val="233247"/>
-                </a:solidFill>
-                <a:latin typeface="Arial"/>
-                <a:ea typeface="Arial"/>
-                <a:cs typeface="Arial"/>
-              </a:rPr>
-              <a:t>(a) Logistic Regression on TF-IDF, grid search over 30 settings, threshold from out-of-fold predictions; (b) NMF topic model, 8 topics, on 40,000 negative training reviews, with LDA as the baseline (scikit-learn).</a:t>
             </a:r>
           </a:p>
         </p:txBody>
@@ -5195,8 +5234,8 @@
         </p:nvSpPr>
         <p:spPr>
           <a:xfrm xmlns:a="http://schemas.openxmlformats.org/drawingml/2006/main">
-            <a:off x="685800" y="4709160"/>
-            <a:ext cx="10668000" cy="1097280"/>
+            <a:off x="685800" y="4754880"/>
+            <a:ext cx="10668000" cy="1051560"/>
           </a:xfrm>
           <a:prstGeom xmlns:a="http://schemas.openxmlformats.org/drawingml/2006/main" prst="rect">
             <a:avLst/>
@@ -5252,7 +5291,1121 @@
                 <a:ea typeface="Arial"/>
                 <a:cs typeface="Arial"/>
               </a:rPr>
-              <a:t>a negative-review detector (PR-AUC 0.84) and 8 complaint themes: crashes and multiplayer bugs lead early (29%), boss and balance later (34%); “boring” is in 9.1% of negative reviews against 0.8% of positive ones.</a:t>
+              <a:t>a negative-review detector (PR-AUC 0.84, ROC-AUC 0.97, accuracy 94.6%) and 8 complaint themes: crashes and multiplayer bugs lead early (29%), boss and balance later (34%); “boring” is in 9.1% of negative reviews against 0.8% of positive ones.</a:t>
+            </a:r>
+          </a:p>
+        </p:txBody>
+      </p:sp>
+      <p:sp xmlns:a="http://schemas.openxmlformats.org/drawingml/2006/main">
+        <p:nvSpPr>
+          <p:cNvPr id="9" name="Rectangle 8"/>
+          <p:cNvSpPr/>
+          <p:nvPr/>
+        </p:nvSpPr>
+        <p:spPr>
+          <a:xfrm>
+            <a:off x="612648" y="2377440"/>
+            <a:ext cx="2537460" cy="384048"/>
+          </a:xfrm>
+          <a:prstGeom prst="rect">
+            <a:avLst/>
+          </a:prstGeom>
+          <a:solidFill>
+            <a:srgbClr val="142D4E"/>
+          </a:solidFill>
+          <a:ln>
+            <a:noFill/>
+          </a:ln>
+          <a:effectLst/>
+        </p:spPr>
+        <p:style>
+          <a:lnRef idx="1">
+            <a:schemeClr val="accent1"/>
+          </a:lnRef>
+          <a:fillRef idx="3">
+            <a:schemeClr val="accent1"/>
+          </a:fillRef>
+          <a:effectRef idx="2">
+            <a:schemeClr val="accent1"/>
+          </a:effectRef>
+          <a:fontRef idx="minor">
+            <a:schemeClr val="lt1"/>
+          </a:fontRef>
+        </p:style>
+        <p:txBody>
+          <a:bodyPr rtlCol="0" anchor="ctr" wrap="square" tIns="36576" bIns="36576"/>
+          <a:lstStyle/>
+          <a:p>
+            <a:pPr algn="l"/>
+            <a:r>
+              <a:rPr sz="1200" b="1">
+                <a:solidFill>
+                  <a:srgbClr val="FFFFFF"/>
+                </a:solidFill>
+                <a:latin typeface="Arial"/>
+              </a:rPr>
+              <a:t>1  Select reviews</a:t>
+            </a:r>
+          </a:p>
+        </p:txBody>
+      </p:sp>
+      <p:sp xmlns:a="http://schemas.openxmlformats.org/drawingml/2006/main">
+        <p:nvSpPr>
+          <p:cNvPr id="10" name="Rectangle 9"/>
+          <p:cNvSpPr/>
+          <p:nvPr/>
+        </p:nvSpPr>
+        <p:spPr>
+          <a:xfrm>
+            <a:off x="612648" y="2761488"/>
+            <a:ext cx="2537460" cy="1325880"/>
+          </a:xfrm>
+          <a:prstGeom prst="rect">
+            <a:avLst/>
+          </a:prstGeom>
+          <a:solidFill>
+            <a:srgbClr val="FFFFFF"/>
+          </a:solidFill>
+          <a:ln w="9525">
+            <a:solidFill>
+              <a:srgbClr val="C9D6E2"/>
+            </a:solidFill>
+          </a:ln>
+          <a:effectLst/>
+        </p:spPr>
+        <p:style>
+          <a:lnRef idx="1">
+            <a:schemeClr val="accent1"/>
+          </a:lnRef>
+          <a:fillRef idx="3">
+            <a:schemeClr val="accent1"/>
+          </a:fillRef>
+          <a:effectRef idx="2">
+            <a:schemeClr val="accent1"/>
+          </a:effectRef>
+          <a:fontRef idx="minor">
+            <a:schemeClr val="lt1"/>
+          </a:fontRef>
+        </p:style>
+        <p:txBody>
+          <a:bodyPr rtlCol="0" anchor="t" wrap="square" tIns="73152" bIns="73152"/>
+          <a:lstStyle/>
+          <a:p>
+            <a:pPr algn="l">
+              <a:spcAft>
+                <a:spcPts val="300"/>
+              </a:spcAft>
+            </a:pPr>
+            <a:r>
+              <a:rPr sz="1100" b="0">
+                <a:solidFill>
+                  <a:srgbClr val="233247"/>
+                </a:solidFill>
+                <a:latin typeface="Arial"/>
+              </a:rPr>
+              <a:t>• English reviews only</a:t>
+            </a:r>
+          </a:p>
+          <a:p>
+            <a:pPr algn="l">
+              <a:spcAft>
+                <a:spcPts val="300"/>
+              </a:spcAft>
+            </a:pPr>
+            <a:r>
+              <a:rPr sz="1100" b="0">
+                <a:solidFill>
+                  <a:srgbClr val="233247"/>
+                </a:solidFill>
+                <a:latin typeface="Arial"/>
+              </a:rPr>
+              <a:t>• Script and language filters</a:t>
+            </a:r>
+          </a:p>
+          <a:p>
+            <a:pPr algn="l">
+              <a:spcAft>
+                <a:spcPts val="300"/>
+              </a:spcAft>
+            </a:pPr>
+            <a:r>
+              <a:rPr sz="1100" b="0">
+                <a:solidFill>
+                  <a:srgbClr val="233247"/>
+                </a:solidFill>
+                <a:latin typeface="Arial"/>
+              </a:rPr>
+              <a:t>• Split by game: 436,715 train, 120,487 test</a:t>
+            </a:r>
+          </a:p>
+        </p:txBody>
+      </p:sp>
+      <p:sp xmlns:a="http://schemas.openxmlformats.org/drawingml/2006/main">
+        <p:nvSpPr>
+          <p:cNvPr id="11" name="Rectangle 10"/>
+          <p:cNvSpPr/>
+          <p:nvPr/>
+        </p:nvSpPr>
+        <p:spPr>
+          <a:xfrm>
+            <a:off x="612648" y="4087368"/>
+            <a:ext cx="2537460" cy="502920"/>
+          </a:xfrm>
+          <a:prstGeom prst="rect">
+            <a:avLst/>
+          </a:prstGeom>
+          <a:solidFill>
+            <a:srgbClr val="EEF2F7"/>
+          </a:solidFill>
+          <a:ln w="9525">
+            <a:solidFill>
+              <a:srgbClr val="C9D6E2"/>
+            </a:solidFill>
+          </a:ln>
+          <a:effectLst/>
+        </p:spPr>
+        <p:style>
+          <a:lnRef idx="1">
+            <a:schemeClr val="accent1"/>
+          </a:lnRef>
+          <a:fillRef idx="3">
+            <a:schemeClr val="accent1"/>
+          </a:fillRef>
+          <a:effectRef idx="2">
+            <a:schemeClr val="accent1"/>
+          </a:effectRef>
+          <a:fontRef idx="minor">
+            <a:schemeClr val="lt1"/>
+          </a:fontRef>
+        </p:style>
+        <p:txBody>
+          <a:bodyPr rtlCol="0" anchor="ctr" wrap="square" tIns="36576" bIns="36576"/>
+          <a:lstStyle/>
+          <a:p>
+            <a:pPr algn="l"/>
+            <a:r>
+              <a:rPr sz="1000" b="1">
+                <a:solidFill>
+                  <a:srgbClr val="66758A"/>
+                </a:solidFill>
+                <a:latin typeface="Arial"/>
+              </a:rPr>
+              <a:t>OUTPUT  </a:t>
+            </a:r>
+            <a:r>
+              <a:rPr sz="1000" b="1">
+                <a:solidFill>
+                  <a:srgbClr val="142D4E"/>
+                </a:solidFill>
+                <a:latin typeface="Arial"/>
+              </a:rPr>
+              <a:t>557,202 reviews</a:t>
+            </a:r>
+          </a:p>
+        </p:txBody>
+      </p:sp>
+      <p:sp xmlns:a="http://schemas.openxmlformats.org/drawingml/2006/main">
+        <p:nvSpPr>
+          <p:cNvPr id="12" name="Right Arrow 11"/>
+          <p:cNvSpPr/>
+          <p:nvPr/>
+        </p:nvSpPr>
+        <p:spPr>
+          <a:xfrm>
+            <a:off x="3186684" y="2441448"/>
+            <a:ext cx="201167" cy="256032"/>
+          </a:xfrm>
+          <a:prstGeom prst="rightArrow">
+            <a:avLst/>
+          </a:prstGeom>
+          <a:solidFill>
+            <a:srgbClr val="C44E52"/>
+          </a:solidFill>
+          <a:ln>
+            <a:noFill/>
+          </a:ln>
+          <a:effectLst/>
+        </p:spPr>
+        <p:style>
+          <a:lnRef idx="1">
+            <a:schemeClr val="accent1"/>
+          </a:lnRef>
+          <a:fillRef idx="3">
+            <a:schemeClr val="accent1"/>
+          </a:fillRef>
+          <a:effectRef idx="2">
+            <a:schemeClr val="accent1"/>
+          </a:effectRef>
+          <a:fontRef idx="minor">
+            <a:schemeClr val="lt1"/>
+          </a:fontRef>
+        </p:style>
+        <p:txBody>
+          <a:bodyPr rtlCol="0" anchor="ctr"/>
+          <a:lstStyle/>
+          <a:p>
+            <a:pPr algn="ctr"/>
+          </a:p>
+        </p:txBody>
+      </p:sp>
+      <p:sp xmlns:a="http://schemas.openxmlformats.org/drawingml/2006/main">
+        <p:nvSpPr>
+          <p:cNvPr id="13" name="Rectangle 12"/>
+          <p:cNvSpPr/>
+          <p:nvPr/>
+        </p:nvSpPr>
+        <p:spPr>
+          <a:xfrm>
+            <a:off x="3424427" y="2377440"/>
+            <a:ext cx="2537460" cy="384048"/>
+          </a:xfrm>
+          <a:prstGeom prst="rect">
+            <a:avLst/>
+          </a:prstGeom>
+          <a:solidFill>
+            <a:srgbClr val="142D4E"/>
+          </a:solidFill>
+          <a:ln>
+            <a:noFill/>
+          </a:ln>
+          <a:effectLst/>
+        </p:spPr>
+        <p:style>
+          <a:lnRef idx="1">
+            <a:schemeClr val="accent1"/>
+          </a:lnRef>
+          <a:fillRef idx="3">
+            <a:schemeClr val="accent1"/>
+          </a:fillRef>
+          <a:effectRef idx="2">
+            <a:schemeClr val="accent1"/>
+          </a:effectRef>
+          <a:fontRef idx="minor">
+            <a:schemeClr val="lt1"/>
+          </a:fontRef>
+        </p:style>
+        <p:txBody>
+          <a:bodyPr rtlCol="0" anchor="ctr" wrap="square" tIns="36576" bIns="36576"/>
+          <a:lstStyle/>
+          <a:p>
+            <a:pPr algn="l"/>
+            <a:r>
+              <a:rPr sz="1200" b="1">
+                <a:solidFill>
+                  <a:srgbClr val="FFFFFF"/>
+                </a:solidFill>
+                <a:latin typeface="Arial"/>
+              </a:rPr>
+              <a:t>2  Prepare text</a:t>
+            </a:r>
+          </a:p>
+        </p:txBody>
+      </p:sp>
+      <p:sp xmlns:a="http://schemas.openxmlformats.org/drawingml/2006/main">
+        <p:nvSpPr>
+          <p:cNvPr id="14" name="Rectangle 13"/>
+          <p:cNvSpPr/>
+          <p:nvPr/>
+        </p:nvSpPr>
+        <p:spPr>
+          <a:xfrm>
+            <a:off x="3424427" y="2761488"/>
+            <a:ext cx="2537460" cy="1325880"/>
+          </a:xfrm>
+          <a:prstGeom prst="rect">
+            <a:avLst/>
+          </a:prstGeom>
+          <a:solidFill>
+            <a:srgbClr val="FFFFFF"/>
+          </a:solidFill>
+          <a:ln w="9525">
+            <a:solidFill>
+              <a:srgbClr val="C9D6E2"/>
+            </a:solidFill>
+          </a:ln>
+          <a:effectLst/>
+        </p:spPr>
+        <p:style>
+          <a:lnRef idx="1">
+            <a:schemeClr val="accent1"/>
+          </a:lnRef>
+          <a:fillRef idx="3">
+            <a:schemeClr val="accent1"/>
+          </a:fillRef>
+          <a:effectRef idx="2">
+            <a:schemeClr val="accent1"/>
+          </a:effectRef>
+          <a:fontRef idx="minor">
+            <a:schemeClr val="lt1"/>
+          </a:fontRef>
+        </p:style>
+        <p:txBody>
+          <a:bodyPr rtlCol="0" anchor="t" wrap="square" tIns="73152" bIns="73152"/>
+          <a:lstStyle/>
+          <a:p>
+            <a:pPr algn="l">
+              <a:spcAft>
+                <a:spcPts val="300"/>
+              </a:spcAft>
+            </a:pPr>
+            <a:r>
+              <a:rPr sz="1100" b="0">
+                <a:solidFill>
+                  <a:srgbClr val="233247"/>
+                </a:solidFill>
+                <a:latin typeface="Arial"/>
+              </a:rPr>
+              <a:t>• Negation binding (not_fun, too_hard)</a:t>
+            </a:r>
+          </a:p>
+          <a:p>
+            <a:pPr algn="l">
+              <a:spcAft>
+                <a:spcPts val="300"/>
+              </a:spcAft>
+            </a:pPr>
+            <a:r>
+              <a:rPr sz="1100" b="0">
+                <a:solidFill>
+                  <a:srgbClr val="233247"/>
+                </a:solidFill>
+                <a:latin typeface="Arial"/>
+              </a:rPr>
+              <a:t>• Stopwords removed</a:t>
+            </a:r>
+          </a:p>
+          <a:p>
+            <a:pPr algn="l">
+              <a:spcAft>
+                <a:spcPts val="300"/>
+              </a:spcAft>
+            </a:pPr>
+            <a:r>
+              <a:rPr sz="1100" b="0">
+                <a:solidFill>
+                  <a:srgbClr val="233247"/>
+                </a:solidFill>
+                <a:latin typeface="Arial"/>
+              </a:rPr>
+              <a:t>• TF-IDF, 1 to 2 words, 100,000 terms</a:t>
+            </a:r>
+          </a:p>
+        </p:txBody>
+      </p:sp>
+      <p:sp xmlns:a="http://schemas.openxmlformats.org/drawingml/2006/main">
+        <p:nvSpPr>
+          <p:cNvPr id="15" name="Rectangle 14"/>
+          <p:cNvSpPr/>
+          <p:nvPr/>
+        </p:nvSpPr>
+        <p:spPr>
+          <a:xfrm>
+            <a:off x="3424427" y="4087368"/>
+            <a:ext cx="2537460" cy="502920"/>
+          </a:xfrm>
+          <a:prstGeom prst="rect">
+            <a:avLst/>
+          </a:prstGeom>
+          <a:solidFill>
+            <a:srgbClr val="EEF2F7"/>
+          </a:solidFill>
+          <a:ln w="9525">
+            <a:solidFill>
+              <a:srgbClr val="C9D6E2"/>
+            </a:solidFill>
+          </a:ln>
+          <a:effectLst/>
+        </p:spPr>
+        <p:style>
+          <a:lnRef idx="1">
+            <a:schemeClr val="accent1"/>
+          </a:lnRef>
+          <a:fillRef idx="3">
+            <a:schemeClr val="accent1"/>
+          </a:fillRef>
+          <a:effectRef idx="2">
+            <a:schemeClr val="accent1"/>
+          </a:effectRef>
+          <a:fontRef idx="minor">
+            <a:schemeClr val="lt1"/>
+          </a:fontRef>
+        </p:style>
+        <p:txBody>
+          <a:bodyPr rtlCol="0" anchor="ctr" wrap="square" tIns="36576" bIns="36576"/>
+          <a:lstStyle/>
+          <a:p>
+            <a:pPr algn="l"/>
+            <a:r>
+              <a:rPr sz="1000" b="1">
+                <a:solidFill>
+                  <a:srgbClr val="66758A"/>
+                </a:solidFill>
+                <a:latin typeface="Arial"/>
+              </a:rPr>
+              <a:t>OUTPUT  </a:t>
+            </a:r>
+            <a:r>
+              <a:rPr sz="1000" b="1">
+                <a:solidFill>
+                  <a:srgbClr val="142D4E"/>
+                </a:solidFill>
+                <a:latin typeface="Arial"/>
+              </a:rPr>
+              <a:t>sparse text matrix</a:t>
+            </a:r>
+          </a:p>
+        </p:txBody>
+      </p:sp>
+      <p:sp xmlns:a="http://schemas.openxmlformats.org/drawingml/2006/main">
+        <p:nvSpPr>
+          <p:cNvPr id="16" name="Right Arrow 15"/>
+          <p:cNvSpPr/>
+          <p:nvPr/>
+        </p:nvSpPr>
+        <p:spPr>
+          <a:xfrm>
+            <a:off x="5998464" y="2441448"/>
+            <a:ext cx="201167" cy="256032"/>
+          </a:xfrm>
+          <a:prstGeom prst="rightArrow">
+            <a:avLst/>
+          </a:prstGeom>
+          <a:solidFill>
+            <a:srgbClr val="C44E52"/>
+          </a:solidFill>
+          <a:ln>
+            <a:noFill/>
+          </a:ln>
+          <a:effectLst/>
+        </p:spPr>
+        <p:style>
+          <a:lnRef idx="1">
+            <a:schemeClr val="accent1"/>
+          </a:lnRef>
+          <a:fillRef idx="3">
+            <a:schemeClr val="accent1"/>
+          </a:fillRef>
+          <a:effectRef idx="2">
+            <a:schemeClr val="accent1"/>
+          </a:effectRef>
+          <a:fontRef idx="minor">
+            <a:schemeClr val="lt1"/>
+          </a:fontRef>
+        </p:style>
+        <p:txBody>
+          <a:bodyPr rtlCol="0" anchor="ctr"/>
+          <a:lstStyle/>
+          <a:p>
+            <a:pPr algn="ctr"/>
+          </a:p>
+        </p:txBody>
+      </p:sp>
+      <p:sp xmlns:a="http://schemas.openxmlformats.org/drawingml/2006/main">
+        <p:nvSpPr>
+          <p:cNvPr id="17" name="Rectangle 16"/>
+          <p:cNvSpPr/>
+          <p:nvPr/>
+        </p:nvSpPr>
+        <p:spPr>
+          <a:xfrm>
+            <a:off x="6236207" y="2377440"/>
+            <a:ext cx="2537460" cy="384048"/>
+          </a:xfrm>
+          <a:prstGeom prst="rect">
+            <a:avLst/>
+          </a:prstGeom>
+          <a:solidFill>
+            <a:srgbClr val="C44E52"/>
+          </a:solidFill>
+          <a:ln>
+            <a:noFill/>
+          </a:ln>
+          <a:effectLst/>
+        </p:spPr>
+        <p:style>
+          <a:lnRef idx="1">
+            <a:schemeClr val="accent1"/>
+          </a:lnRef>
+          <a:fillRef idx="3">
+            <a:schemeClr val="accent1"/>
+          </a:fillRef>
+          <a:effectRef idx="2">
+            <a:schemeClr val="accent1"/>
+          </a:effectRef>
+          <a:fontRef idx="minor">
+            <a:schemeClr val="lt1"/>
+          </a:fontRef>
+        </p:style>
+        <p:txBody>
+          <a:bodyPr rtlCol="0" anchor="ctr" wrap="square" tIns="36576" bIns="36576"/>
+          <a:lstStyle/>
+          <a:p>
+            <a:pPr algn="l"/>
+            <a:r>
+              <a:rPr sz="1200" b="1">
+                <a:solidFill>
+                  <a:srgbClr val="FFFFFF"/>
+                </a:solidFill>
+                <a:latin typeface="Arial"/>
+              </a:rPr>
+              <a:t>3  Detect</a:t>
+            </a:r>
+          </a:p>
+        </p:txBody>
+      </p:sp>
+      <p:sp xmlns:a="http://schemas.openxmlformats.org/drawingml/2006/main">
+        <p:nvSpPr>
+          <p:cNvPr id="18" name="Rectangle 17"/>
+          <p:cNvSpPr/>
+          <p:nvPr/>
+        </p:nvSpPr>
+        <p:spPr>
+          <a:xfrm>
+            <a:off x="6236207" y="2761488"/>
+            <a:ext cx="2537460" cy="1325880"/>
+          </a:xfrm>
+          <a:prstGeom prst="rect">
+            <a:avLst/>
+          </a:prstGeom>
+          <a:solidFill>
+            <a:srgbClr val="FFFFFF"/>
+          </a:solidFill>
+          <a:ln w="9525">
+            <a:solidFill>
+              <a:srgbClr val="C9D6E2"/>
+            </a:solidFill>
+          </a:ln>
+          <a:effectLst/>
+        </p:spPr>
+        <p:style>
+          <a:lnRef idx="1">
+            <a:schemeClr val="accent1"/>
+          </a:lnRef>
+          <a:fillRef idx="3">
+            <a:schemeClr val="accent1"/>
+          </a:fillRef>
+          <a:effectRef idx="2">
+            <a:schemeClr val="accent1"/>
+          </a:effectRef>
+          <a:fontRef idx="minor">
+            <a:schemeClr val="lt1"/>
+          </a:fontRef>
+        </p:style>
+        <p:txBody>
+          <a:bodyPr rtlCol="0" anchor="t" wrap="square" tIns="73152" bIns="73152"/>
+          <a:lstStyle/>
+          <a:p>
+            <a:pPr algn="l">
+              <a:spcAft>
+                <a:spcPts val="300"/>
+              </a:spcAft>
+            </a:pPr>
+            <a:r>
+              <a:rPr sz="1100" b="0">
+                <a:solidFill>
+                  <a:srgbClr val="233247"/>
+                </a:solidFill>
+                <a:latin typeface="Arial"/>
+              </a:rPr>
+              <a:t>• Logistic Regression on text and metadata</a:t>
+            </a:r>
+          </a:p>
+          <a:p>
+            <a:pPr algn="l">
+              <a:spcAft>
+                <a:spcPts val="300"/>
+              </a:spcAft>
+            </a:pPr>
+            <a:r>
+              <a:rPr sz="1100" b="0">
+                <a:solidFill>
+                  <a:srgbClr val="233247"/>
+                </a:solidFill>
+                <a:latin typeface="Arial"/>
+              </a:rPr>
+              <a:t>• 30-setting grid on 5 shared folds</a:t>
+            </a:r>
+          </a:p>
+          <a:p>
+            <a:pPr algn="l">
+              <a:spcAft>
+                <a:spcPts val="300"/>
+              </a:spcAft>
+            </a:pPr>
+            <a:r>
+              <a:rPr sz="1100" b="0">
+                <a:solidFill>
+                  <a:srgbClr val="233247"/>
+                </a:solidFill>
+                <a:latin typeface="Arial"/>
+              </a:rPr>
+              <a:t>• Threshold from out-of-fold predictions</a:t>
+            </a:r>
+          </a:p>
+        </p:txBody>
+      </p:sp>
+      <p:sp xmlns:a="http://schemas.openxmlformats.org/drawingml/2006/main">
+        <p:nvSpPr>
+          <p:cNvPr id="19" name="Rectangle 18"/>
+          <p:cNvSpPr/>
+          <p:nvPr/>
+        </p:nvSpPr>
+        <p:spPr>
+          <a:xfrm>
+            <a:off x="6236207" y="4087368"/>
+            <a:ext cx="2537460" cy="502920"/>
+          </a:xfrm>
+          <a:prstGeom prst="rect">
+            <a:avLst/>
+          </a:prstGeom>
+          <a:solidFill>
+            <a:srgbClr val="EEF2F7"/>
+          </a:solidFill>
+          <a:ln w="9525">
+            <a:solidFill>
+              <a:srgbClr val="C9D6E2"/>
+            </a:solidFill>
+          </a:ln>
+          <a:effectLst/>
+        </p:spPr>
+        <p:style>
+          <a:lnRef idx="1">
+            <a:schemeClr val="accent1"/>
+          </a:lnRef>
+          <a:fillRef idx="3">
+            <a:schemeClr val="accent1"/>
+          </a:fillRef>
+          <a:effectRef idx="2">
+            <a:schemeClr val="accent1"/>
+          </a:effectRef>
+          <a:fontRef idx="minor">
+            <a:schemeClr val="lt1"/>
+          </a:fontRef>
+        </p:style>
+        <p:txBody>
+          <a:bodyPr rtlCol="0" anchor="ctr" wrap="square" tIns="36576" bIns="36576"/>
+          <a:lstStyle/>
+          <a:p>
+            <a:pPr algn="l"/>
+            <a:r>
+              <a:rPr sz="1000" b="1">
+                <a:solidFill>
+                  <a:srgbClr val="66758A"/>
+                </a:solidFill>
+                <a:latin typeface="Arial"/>
+              </a:rPr>
+              <a:t>OUTPUT  </a:t>
+            </a:r>
+            <a:r>
+              <a:rPr sz="1000" b="1">
+                <a:solidFill>
+                  <a:srgbClr val="142D4E"/>
+                </a:solidFill>
+                <a:latin typeface="Arial"/>
+              </a:rPr>
+              <a:t>negative-review detector</a:t>
+            </a:r>
+          </a:p>
+        </p:txBody>
+      </p:sp>
+      <p:sp xmlns:a="http://schemas.openxmlformats.org/drawingml/2006/main">
+        <p:nvSpPr>
+          <p:cNvPr id="20" name="Right Arrow 19"/>
+          <p:cNvSpPr/>
+          <p:nvPr/>
+        </p:nvSpPr>
+        <p:spPr>
+          <a:xfrm>
+            <a:off x="8810243" y="2441448"/>
+            <a:ext cx="201167" cy="256032"/>
+          </a:xfrm>
+          <a:prstGeom prst="rightArrow">
+            <a:avLst/>
+          </a:prstGeom>
+          <a:solidFill>
+            <a:srgbClr val="C44E52"/>
+          </a:solidFill>
+          <a:ln>
+            <a:noFill/>
+          </a:ln>
+          <a:effectLst/>
+        </p:spPr>
+        <p:style>
+          <a:lnRef idx="1">
+            <a:schemeClr val="accent1"/>
+          </a:lnRef>
+          <a:fillRef idx="3">
+            <a:schemeClr val="accent1"/>
+          </a:fillRef>
+          <a:effectRef idx="2">
+            <a:schemeClr val="accent1"/>
+          </a:effectRef>
+          <a:fontRef idx="minor">
+            <a:schemeClr val="lt1"/>
+          </a:fontRef>
+        </p:style>
+        <p:txBody>
+          <a:bodyPr rtlCol="0" anchor="ctr"/>
+          <a:lstStyle/>
+          <a:p>
+            <a:pPr algn="ctr"/>
+          </a:p>
+        </p:txBody>
+      </p:sp>
+      <p:sp xmlns:a="http://schemas.openxmlformats.org/drawingml/2006/main">
+        <p:nvSpPr>
+          <p:cNvPr id="21" name="Rectangle 20"/>
+          <p:cNvSpPr/>
+          <p:nvPr/>
+        </p:nvSpPr>
+        <p:spPr>
+          <a:xfrm>
+            <a:off x="9047988" y="2377440"/>
+            <a:ext cx="2537460" cy="384048"/>
+          </a:xfrm>
+          <a:prstGeom prst="rect">
+            <a:avLst/>
+          </a:prstGeom>
+          <a:solidFill>
+            <a:srgbClr val="142D4E"/>
+          </a:solidFill>
+          <a:ln>
+            <a:noFill/>
+          </a:ln>
+          <a:effectLst/>
+        </p:spPr>
+        <p:style>
+          <a:lnRef idx="1">
+            <a:schemeClr val="accent1"/>
+          </a:lnRef>
+          <a:fillRef idx="3">
+            <a:schemeClr val="accent1"/>
+          </a:fillRef>
+          <a:effectRef idx="2">
+            <a:schemeClr val="accent1"/>
+          </a:effectRef>
+          <a:fontRef idx="minor">
+            <a:schemeClr val="lt1"/>
+          </a:fontRef>
+        </p:style>
+        <p:txBody>
+          <a:bodyPr rtlCol="0" anchor="ctr" wrap="square" tIns="36576" bIns="36576"/>
+          <a:lstStyle/>
+          <a:p>
+            <a:pPr algn="l"/>
+            <a:r>
+              <a:rPr sz="1200" b="1">
+                <a:solidFill>
+                  <a:srgbClr val="FFFFFF"/>
+                </a:solidFill>
+                <a:latin typeface="Arial"/>
+              </a:rPr>
+              <a:t>4  Find themes</a:t>
+            </a:r>
+          </a:p>
+        </p:txBody>
+      </p:sp>
+      <p:sp xmlns:a="http://schemas.openxmlformats.org/drawingml/2006/main">
+        <p:nvSpPr>
+          <p:cNvPr id="22" name="Rectangle 21"/>
+          <p:cNvSpPr/>
+          <p:nvPr/>
+        </p:nvSpPr>
+        <p:spPr>
+          <a:xfrm>
+            <a:off x="9047988" y="2761488"/>
+            <a:ext cx="2537460" cy="1325880"/>
+          </a:xfrm>
+          <a:prstGeom prst="rect">
+            <a:avLst/>
+          </a:prstGeom>
+          <a:solidFill>
+            <a:srgbClr val="FFFFFF"/>
+          </a:solidFill>
+          <a:ln w="9525">
+            <a:solidFill>
+              <a:srgbClr val="C9D6E2"/>
+            </a:solidFill>
+          </a:ln>
+          <a:effectLst/>
+        </p:spPr>
+        <p:style>
+          <a:lnRef idx="1">
+            <a:schemeClr val="accent1"/>
+          </a:lnRef>
+          <a:fillRef idx="3">
+            <a:schemeClr val="accent1"/>
+          </a:fillRef>
+          <a:effectRef idx="2">
+            <a:schemeClr val="accent1"/>
+          </a:effectRef>
+          <a:fontRef idx="minor">
+            <a:schemeClr val="lt1"/>
+          </a:fontRef>
+        </p:style>
+        <p:txBody>
+          <a:bodyPr rtlCol="0" anchor="t" wrap="square" tIns="73152" bIns="73152"/>
+          <a:lstStyle/>
+          <a:p>
+            <a:pPr algn="l">
+              <a:spcAft>
+                <a:spcPts val="300"/>
+              </a:spcAft>
+            </a:pPr>
+            <a:r>
+              <a:rPr sz="1100" b="0">
+                <a:solidFill>
+                  <a:srgbClr val="233247"/>
+                </a:solidFill>
+                <a:latin typeface="Arial"/>
+              </a:rPr>
+              <a:t>• NMF, 8 topics, on 40,000 negative training reviews</a:t>
+            </a:r>
+          </a:p>
+          <a:p>
+            <a:pPr algn="l">
+              <a:spcAft>
+                <a:spcPts val="300"/>
+              </a:spcAft>
+            </a:pPr>
+            <a:r>
+              <a:rPr sz="1100" b="0">
+                <a:solidFill>
+                  <a:srgbClr val="233247"/>
+                </a:solidFill>
+                <a:latin typeface="Arial"/>
+              </a:rPr>
+              <a:t>• LDA as the baseline</a:t>
+            </a:r>
+          </a:p>
+          <a:p>
+            <a:pPr algn="l">
+              <a:spcAft>
+                <a:spcPts val="300"/>
+              </a:spcAft>
+            </a:pPr>
+            <a:r>
+              <a:rPr sz="1100" b="0">
+                <a:solidFill>
+                  <a:srgbClr val="233247"/>
+                </a:solidFill>
+                <a:latin typeface="Arial"/>
+              </a:rPr>
+              <a:t>• Compare early and later complaints</a:t>
+            </a:r>
+          </a:p>
+        </p:txBody>
+      </p:sp>
+      <p:sp xmlns:a="http://schemas.openxmlformats.org/drawingml/2006/main">
+        <p:nvSpPr>
+          <p:cNvPr id="23" name="Rectangle 22"/>
+          <p:cNvSpPr/>
+          <p:nvPr/>
+        </p:nvSpPr>
+        <p:spPr>
+          <a:xfrm>
+            <a:off x="9047988" y="4087368"/>
+            <a:ext cx="2537460" cy="502920"/>
+          </a:xfrm>
+          <a:prstGeom prst="rect">
+            <a:avLst/>
+          </a:prstGeom>
+          <a:solidFill>
+            <a:srgbClr val="EEF2F7"/>
+          </a:solidFill>
+          <a:ln w="9525">
+            <a:solidFill>
+              <a:srgbClr val="C9D6E2"/>
+            </a:solidFill>
+          </a:ln>
+          <a:effectLst/>
+        </p:spPr>
+        <p:style>
+          <a:lnRef idx="1">
+            <a:schemeClr val="accent1"/>
+          </a:lnRef>
+          <a:fillRef idx="3">
+            <a:schemeClr val="accent1"/>
+          </a:fillRef>
+          <a:effectRef idx="2">
+            <a:schemeClr val="accent1"/>
+          </a:effectRef>
+          <a:fontRef idx="minor">
+            <a:schemeClr val="lt1"/>
+          </a:fontRef>
+        </p:style>
+        <p:txBody>
+          <a:bodyPr rtlCol="0" anchor="ctr" wrap="square" tIns="36576" bIns="36576"/>
+          <a:lstStyle/>
+          <a:p>
+            <a:pPr algn="l"/>
+            <a:r>
+              <a:rPr sz="1000" b="1">
+                <a:solidFill>
+                  <a:srgbClr val="66758A"/>
+                </a:solidFill>
+                <a:latin typeface="Arial"/>
+              </a:rPr>
+              <a:t>OUTPUT  </a:t>
+            </a:r>
+            <a:r>
+              <a:rPr sz="1000" b="1">
+                <a:solidFill>
+                  <a:srgbClr val="142D4E"/>
+                </a:solidFill>
+                <a:latin typeface="Arial"/>
+              </a:rPr>
+              <a:t>8 complaint themes</a:t>
+            </a:r>
+          </a:p>
+        </p:txBody>
+      </p:sp>
+      <p:sp xmlns:a="http://schemas.openxmlformats.org/drawingml/2006/main">
+        <p:nvSpPr>
+          <p:cNvPr id="24" name="Rectangle 23"/>
+          <p:cNvSpPr/>
+          <p:nvPr/>
+        </p:nvSpPr>
+        <p:spPr>
+          <a:xfrm>
+            <a:off x="612648" y="5916168"/>
+            <a:ext cx="10972800" cy="420624"/>
+          </a:xfrm>
+          <a:prstGeom prst="rect">
+            <a:avLst/>
+          </a:prstGeom>
+          <a:solidFill>
+            <a:srgbClr val="EEF2F7"/>
+          </a:solidFill>
+          <a:ln>
+            <a:noFill/>
+          </a:ln>
+          <a:effectLst/>
+        </p:spPr>
+        <p:style>
+          <a:lnRef idx="1">
+            <a:schemeClr val="accent1"/>
+          </a:lnRef>
+          <a:fillRef idx="3">
+            <a:schemeClr val="accent1"/>
+          </a:fillRef>
+          <a:effectRef idx="2">
+            <a:schemeClr val="accent1"/>
+          </a:effectRef>
+          <a:fontRef idx="minor">
+            <a:schemeClr val="lt1"/>
+          </a:fontRef>
+        </p:style>
+        <p:txBody>
+          <a:bodyPr rtlCol="0" anchor="ctr"/>
+          <a:lstStyle/>
+          <a:p>
+            <a:pPr algn="ctr"/>
+          </a:p>
+        </p:txBody>
+      </p:sp>
+      <p:sp xmlns:a="http://schemas.openxmlformats.org/drawingml/2006/main">
+        <p:nvSpPr>
+          <p:cNvPr id="25" name="Rectangle 24"/>
+          <p:cNvSpPr/>
+          <p:nvPr/>
+        </p:nvSpPr>
+        <p:spPr>
+          <a:xfrm>
+            <a:off x="612648" y="5916168"/>
+            <a:ext cx="64008" cy="420624"/>
+          </a:xfrm>
+          <a:prstGeom prst="rect">
+            <a:avLst/>
+          </a:prstGeom>
+          <a:solidFill>
+            <a:srgbClr val="C44E52"/>
+          </a:solidFill>
+          <a:ln>
+            <a:noFill/>
+          </a:ln>
+          <a:effectLst/>
+        </p:spPr>
+        <p:style>
+          <a:lnRef idx="1">
+            <a:schemeClr val="accent1"/>
+          </a:lnRef>
+          <a:fillRef idx="3">
+            <a:schemeClr val="accent1"/>
+          </a:fillRef>
+          <a:effectRef idx="2">
+            <a:schemeClr val="accent1"/>
+          </a:effectRef>
+          <a:fontRef idx="minor">
+            <a:schemeClr val="lt1"/>
+          </a:fontRef>
+        </p:style>
+        <p:txBody>
+          <a:bodyPr rtlCol="0" anchor="ctr"/>
+          <a:lstStyle/>
+          <a:p>
+            <a:pPr algn="ctr"/>
+          </a:p>
+        </p:txBody>
+      </p:sp>
+      <p:sp xmlns:a="http://schemas.openxmlformats.org/drawingml/2006/main">
+        <p:nvSpPr>
+          <p:cNvPr id="26" name="Rectangle 25"/>
+          <p:cNvSpPr/>
+          <p:nvPr/>
+        </p:nvSpPr>
+        <p:spPr>
+          <a:xfrm>
+            <a:off x="676656" y="5916168"/>
+            <a:ext cx="10908792" cy="420624"/>
+          </a:xfrm>
+          <a:prstGeom prst="rect">
+            <a:avLst/>
+          </a:prstGeom>
+          <a:solidFill>
+            <a:srgbClr val="EEF2F7"/>
+          </a:solidFill>
+          <a:ln>
+            <a:noFill/>
+          </a:ln>
+          <a:effectLst/>
+        </p:spPr>
+        <p:style>
+          <a:lnRef idx="1">
+            <a:schemeClr val="accent1"/>
+          </a:lnRef>
+          <a:fillRef idx="3">
+            <a:schemeClr val="accent1"/>
+          </a:fillRef>
+          <a:effectRef idx="2">
+            <a:schemeClr val="accent1"/>
+          </a:effectRef>
+          <a:fontRef idx="minor">
+            <a:schemeClr val="lt1"/>
+          </a:fontRef>
+        </p:style>
+        <p:txBody>
+          <a:bodyPr rtlCol="0" anchor="ctr" wrap="square" tIns="36576" bIns="36576"/>
+          <a:lstStyle/>
+          <a:p>
+            <a:pPr algn="l"/>
+            <a:r>
+              <a:rPr sz="1200" b="1">
+                <a:solidFill>
+                  <a:srgbClr val="C44E52"/>
+                </a:solidFill>
+                <a:latin typeface="Arial"/>
+              </a:rPr>
+              <a:t>Takeaway   </a:t>
+            </a:r>
+            <a:r>
+              <a:rPr sz="1200" b="0">
+                <a:solidFill>
+                  <a:srgbClr val="233247"/>
+                </a:solidFill>
+                <a:latin typeface="Arial"/>
+              </a:rPr>
+              <a:t>Text mining gives a detector and complaint themes from the same cleaned reviews.</a:t>
             </a:r>
           </a:p>
         </p:txBody>
@@ -5500,17 +6653,17 @@
           <p:nvPr/>
         </p:nvGraphicFramePr>
         <p:xfrm>
-          <a:off xmlns:a="http://schemas.openxmlformats.org/drawingml/2006/main" x="609600" y="1737360"/>
-          <a:ext xmlns:a="http://schemas.openxmlformats.org/drawingml/2006/main" cx="10972800" cy="2103120"/>
+          <a:off xmlns:a="http://schemas.openxmlformats.org/drawingml/2006/main" x="609600" y="1691640"/>
+          <a:ext xmlns:a="http://schemas.openxmlformats.org/drawingml/2006/main" cx="10972800" cy="1847088"/>
         </p:xfrm>
         <a:graphic xmlns:a="http://schemas.openxmlformats.org/drawingml/2006/main">
           <a:graphicData uri="http://schemas.openxmlformats.org/drawingml/2006/table">
             <a:tbl>
               <a:tblPr/>
               <a:tblGrid>
-                <a:gridCol w="5120640"/>
-                <a:gridCol w="1828800"/>
-                <a:gridCol w="2194560"/>
+                <a:gridCol w="4389120"/>
+                <a:gridCol w="2651760"/>
+                <a:gridCol w="2103120"/>
                 <a:gridCol w="1828800"/>
               </a:tblGrid>
               <a:tr h="457200">
@@ -5520,7 +6673,7 @@
                     <a:lstStyle/>
                     <a:p>
                       <a:r>
-                        <a:rPr sz="1300" b="1">
+                        <a:rPr sz="1200" b="1">
                           <a:solidFill>
                             <a:srgbClr val="FFFFFF"/>
                           </a:solidFill>
@@ -5568,7 +6721,7 @@
                     <a:lstStyle/>
                     <a:p>
                       <a:r>
-                        <a:rPr sz="1300" b="1">
+                        <a:rPr sz="1200" b="1">
                           <a:solidFill>
                             <a:srgbClr val="FFFFFF"/>
                           </a:solidFill>
@@ -5576,7 +6729,7 @@
                           <a:ea typeface="Arial"/>
                           <a:cs typeface="Arial"/>
                         </a:rPr>
-                        <a:t>PR-AUC (test)</a:t>
+                        <a:t>PR-AUC / ROC-AUC (test)</a:t>
                       </a:r>
                     </a:p>
                   </a:txBody>
@@ -5610,7 +6763,7 @@
                     <a:lstStyle/>
                     <a:p>
                       <a:r>
-                        <a:rPr sz="1300" b="1">
+                        <a:rPr sz="1200" b="1">
                           <a:solidFill>
                             <a:srgbClr val="FFFFFF"/>
                           </a:solidFill>
@@ -5652,7 +6805,7 @@
                     <a:lstStyle/>
                     <a:p>
                       <a:r>
-                        <a:rPr sz="1300" b="1">
+                        <a:rPr sz="1200" b="1">
                           <a:solidFill>
                             <a:srgbClr val="FFFFFF"/>
                           </a:solidFill>
@@ -5689,14 +6842,14 @@
                   </a:tcPr>
                 </a:tc>
               </a:tr>
-              <a:tr h="411480">
+              <a:tr h="347472">
                 <a:tc>
                   <a:txBody>
                     <a:bodyPr wrap="square"/>
                     <a:lstStyle/>
                     <a:p>
                       <a:r>
-                        <a:rPr sz="1300" b="0">
+                        <a:rPr sz="1200" b="0">
                           <a:solidFill>
                             <a:srgbClr val="233247"/>
                           </a:solidFill>
@@ -5738,7 +6891,7 @@
                     <a:lstStyle/>
                     <a:p>
                       <a:r>
-                        <a:rPr sz="1300" b="0">
+                        <a:rPr sz="1200" b="0">
                           <a:solidFill>
                             <a:srgbClr val="233247"/>
                           </a:solidFill>
@@ -5746,7 +6899,7 @@
                           <a:ea typeface="Arial"/>
                           <a:cs typeface="Arial"/>
                         </a:rPr>
-                        <a:t>0.115</a:t>
+                        <a:t>0.115  /  0.500</a:t>
                       </a:r>
                     </a:p>
                   </a:txBody>
@@ -5774,7 +6927,7 @@
                     <a:lstStyle/>
                     <a:p>
                       <a:r>
-                        <a:rPr sz="1300" b="0">
+                        <a:rPr sz="1200" b="0">
                           <a:solidFill>
                             <a:srgbClr val="233247"/>
                           </a:solidFill>
@@ -5810,7 +6963,7 @@
                     <a:lstStyle/>
                     <a:p>
                       <a:r>
-                        <a:rPr sz="1300" b="0">
+                        <a:rPr sz="1200" b="0">
                           <a:solidFill>
                             <a:srgbClr val="233247"/>
                           </a:solidFill>
@@ -5841,14 +6994,14 @@
                   </a:tcPr>
                 </a:tc>
               </a:tr>
-              <a:tr h="411480">
+              <a:tr h="347472">
                 <a:tc>
                   <a:txBody>
                     <a:bodyPr wrap="square"/>
                     <a:lstStyle/>
                     <a:p>
                       <a:r>
-                        <a:rPr sz="1300" b="0">
+                        <a:rPr sz="1200" b="0">
                           <a:solidFill>
                             <a:srgbClr val="233247"/>
                           </a:solidFill>
@@ -5890,7 +7043,7 @@
                     <a:lstStyle/>
                     <a:p>
                       <a:r>
-                        <a:rPr sz="1300" b="0">
+                        <a:rPr sz="1200" b="0">
                           <a:solidFill>
                             <a:srgbClr val="233247"/>
                           </a:solidFill>
@@ -5898,7 +7051,7 @@
                           <a:ea typeface="Arial"/>
                           <a:cs typeface="Arial"/>
                         </a:rPr>
-                        <a:t>0.360</a:t>
+                        <a:t>0.360  /  0.758</a:t>
                       </a:r>
                     </a:p>
                   </a:txBody>
@@ -5926,7 +7079,7 @@
                     <a:lstStyle/>
                     <a:p>
                       <a:r>
-                        <a:rPr sz="1300" b="0">
+                        <a:rPr sz="1200" b="0">
                           <a:solidFill>
                             <a:srgbClr val="233247"/>
                           </a:solidFill>
@@ -5962,7 +7115,7 @@
                     <a:lstStyle/>
                     <a:p>
                       <a:r>
-                        <a:rPr sz="1300" b="0">
+                        <a:rPr sz="1200" b="0">
                           <a:solidFill>
                             <a:srgbClr val="233247"/>
                           </a:solidFill>
@@ -5993,14 +7146,14 @@
                   </a:tcPr>
                 </a:tc>
               </a:tr>
-              <a:tr h="411480">
+              <a:tr h="347472">
                 <a:tc>
                   <a:txBody>
                     <a:bodyPr wrap="square"/>
                     <a:lstStyle/>
                     <a:p>
                       <a:r>
-                        <a:rPr sz="1300" b="0">
+                        <a:rPr sz="1200" b="0">
                           <a:solidFill>
                             <a:srgbClr val="233247"/>
                           </a:solidFill>
@@ -6042,7 +7195,7 @@
                     <a:lstStyle/>
                     <a:p>
                       <a:r>
-                        <a:rPr sz="1300" b="0">
+                        <a:rPr sz="1200" b="0">
                           <a:solidFill>
                             <a:srgbClr val="233247"/>
                           </a:solidFill>
@@ -6050,7 +7203,7 @@
                           <a:ea typeface="Arial"/>
                           <a:cs typeface="Arial"/>
                         </a:rPr>
-                        <a:t>0.593</a:t>
+                        <a:t>0.593  /  0.895</a:t>
                       </a:r>
                     </a:p>
                   </a:txBody>
@@ -6078,7 +7231,7 @@
                     <a:lstStyle/>
                     <a:p>
                       <a:r>
-                        <a:rPr sz="1300" b="0">
+                        <a:rPr sz="1200" b="0">
                           <a:solidFill>
                             <a:srgbClr val="233247"/>
                           </a:solidFill>
@@ -6114,7 +7267,7 @@
                     <a:lstStyle/>
                     <a:p>
                       <a:r>
-                        <a:rPr sz="1300" b="0">
+                        <a:rPr sz="1200" b="0">
                           <a:solidFill>
                             <a:srgbClr val="233247"/>
                           </a:solidFill>
@@ -6145,14 +7298,14 @@
                   </a:tcPr>
                 </a:tc>
               </a:tr>
-              <a:tr h="411480">
+              <a:tr h="347472">
                 <a:tc>
                   <a:txBody>
                     <a:bodyPr wrap="square"/>
                     <a:lstStyle/>
                     <a:p>
                       <a:r>
-                        <a:rPr sz="1300" b="0">
+                        <a:rPr sz="1200" b="0">
                           <a:solidFill>
                             <a:srgbClr val="233247"/>
                           </a:solidFill>
@@ -6194,7 +7347,7 @@
                     <a:lstStyle/>
                     <a:p>
                       <a:r>
-                        <a:rPr sz="1300" b="0">
+                        <a:rPr sz="1200" b="0">
                           <a:solidFill>
                             <a:srgbClr val="233247"/>
                           </a:solidFill>
@@ -6202,7 +7355,7 @@
                           <a:ea typeface="Arial"/>
                           <a:cs typeface="Arial"/>
                         </a:rPr>
-                        <a:t>0.838</a:t>
+                        <a:t>0.838  /  0.971</a:t>
                       </a:r>
                     </a:p>
                   </a:txBody>
@@ -6230,7 +7383,7 @@
                     <a:lstStyle/>
                     <a:p>
                       <a:r>
-                        <a:rPr sz="1300" b="0">
+                        <a:rPr sz="1200" b="0">
                           <a:solidFill>
                             <a:srgbClr val="233247"/>
                           </a:solidFill>
@@ -6266,7 +7419,7 @@
                     <a:lstStyle/>
                     <a:p>
                       <a:r>
-                        <a:rPr sz="1300" b="0">
+                        <a:rPr sz="1200" b="0">
                           <a:solidFill>
                             <a:srgbClr val="233247"/>
                           </a:solidFill>
@@ -6301,69 +7454,158 @@
           </a:graphicData>
         </a:graphic>
       </p:graphicFrame>
-      <p:sp>
+      <p:pic xmlns:a="http://schemas.openxmlformats.org/drawingml/2006/main" xmlns:r="http://schemas.openxmlformats.org/officeDocument/2006/relationships">
+        <p:nvPicPr>
+          <p:cNvPr id="8" name="Picture 7" descr="review_text_confusion.png"/>
+          <p:cNvPicPr>
+            <a:picLocks noChangeAspect="1"/>
+          </p:cNvPicPr>
+          <p:nvPr/>
+        </p:nvPicPr>
+        <p:blipFill>
+          <a:blip r:embed="rId3"/>
+          <a:stretch>
+            <a:fillRect/>
+          </a:stretch>
+        </p:blipFill>
+        <p:spPr>
+          <a:xfrm>
+            <a:off x="612648" y="3639312"/>
+            <a:ext cx="2613660" cy="2240280"/>
+          </a:xfrm>
+          <a:prstGeom prst="rect">
+            <a:avLst/>
+          </a:prstGeom>
+        </p:spPr>
+      </p:pic>
+      <p:sp xmlns:a="http://schemas.openxmlformats.org/drawingml/2006/main">
         <p:nvSpPr>
-          <p:cNvPr id="5" name="">
-            <a:extLst xmlns:a="http://schemas.openxmlformats.org/drawingml/2006/main">
-              <a:ext uri="{FF2B5EF4-FFF2-40B4-BE49-F238E27FC236}">
-                <a16:creationId xmlns:a16="http://schemas.microsoft.com/office/drawing/2014/main" id="{37D322C2-0A52-4759-AAEB-4AE4EA38E33E}"/>
-              </a:ext>
-            </a:extLst>
-          </p:cNvPr>
-          <p:cNvSpPr>
-            <a:spLocks xmlns:a="http://schemas.openxmlformats.org/drawingml/2006/main" noGrp="1"/>
-          </p:cNvSpPr>
+          <p:cNvPr id="9" name="Rectangle 8"/>
+          <p:cNvSpPr/>
           <p:nvPr/>
         </p:nvSpPr>
         <p:spPr>
-          <a:xfrm xmlns:a="http://schemas.openxmlformats.org/drawingml/2006/main">
-            <a:off x="685800" y="3977639"/>
-            <a:ext cx="10572750" cy="1280160"/>
+          <a:xfrm>
+            <a:off x="3429000" y="3639312"/>
+            <a:ext cx="8156448" cy="2240280"/>
           </a:xfrm>
-          <a:prstGeom xmlns:a="http://schemas.openxmlformats.org/drawingml/2006/main" prst="rect">
+          <a:prstGeom prst="rect">
             <a:avLst/>
           </a:prstGeom>
-          <a:noFill xmlns:a="http://schemas.openxmlformats.org/drawingml/2006/main"/>
-          <a:ln xmlns:a="http://schemas.openxmlformats.org/drawingml/2006/main" w="0">
+          <a:solidFill>
+            <a:srgbClr val="FFFFFF"/>
+          </a:solidFill>
+          <a:ln>
             <a:noFill/>
-            <a:prstDash val="solid"/>
           </a:ln>
+          <a:effectLst/>
         </p:spPr>
+        <p:style>
+          <a:lnRef idx="1">
+            <a:schemeClr val="accent1"/>
+          </a:lnRef>
+          <a:fillRef idx="3">
+            <a:schemeClr val="accent1"/>
+          </a:fillRef>
+          <a:effectRef idx="2">
+            <a:schemeClr val="accent1"/>
+          </a:effectRef>
+          <a:fontRef idx="minor">
+            <a:schemeClr val="lt1"/>
+          </a:fontRef>
+        </p:style>
         <p:txBody>
-          <a:bodyPr xmlns:a="http://schemas.openxmlformats.org/drawingml/2006/main" wrap="square"/>
-          <a:lstStyle xmlns:a="http://schemas.openxmlformats.org/drawingml/2006/main">
-            <a:defPPr>
-              <a:defRPr sz="1875" b="0">
+          <a:bodyPr rtlCol="0" anchor="t" wrap="square"/>
+          <a:lstStyle/>
+          <a:p>
+            <a:pPr algn="l">
+              <a:spcAft>
+                <a:spcPts val="400"/>
+              </a:spcAft>
+            </a:pPr>
+            <a:r>
+              <a:rPr sz="1200" b="1">
+                <a:solidFill>
+                  <a:srgbClr val="142D4E"/>
+                </a:solidFill>
+                <a:latin typeface="Arial"/>
+              </a:rPr>
+              <a:t>Test set: </a:t>
+            </a:r>
+            <a:r>
+              <a:rPr sz="1200" b="0">
                 <a:solidFill>
                   <a:srgbClr val="233247"/>
                 </a:solidFill>
                 <a:latin typeface="Arial"/>
-                <a:ea typeface="Arial"/>
-                <a:cs typeface="Arial"/>
-              </a:defRPr>
-            </a:defPPr>
-          </a:lstStyle>
-          <a:p xmlns:a="http://schemas.openxmlformats.org/drawingml/2006/main">
-            <a:pPr>
-              <a:defRPr sz="1875" b="0">
+              </a:rPr>
+              <a:t>120,487 English reviews from games never seen in training. Caught 10,980 negatives, missed 2,893, 3,607 false alarms, 103,007 correct positives.</a:t>
+            </a:r>
+          </a:p>
+          <a:p>
+            <a:pPr algn="l">
+              <a:spcAft>
+                <a:spcPts val="400"/>
+              </a:spcAft>
+            </a:pPr>
+            <a:r>
+              <a:rPr sz="1200" b="1">
+                <a:solidFill>
+                  <a:srgbClr val="142D4E"/>
+                </a:solidFill>
+                <a:latin typeface="Arial"/>
+              </a:rPr>
+              <a:t>Accuracy </a:t>
+            </a:r>
+            <a:r>
+              <a:rPr sz="1200" b="0">
                 <a:solidFill>
                   <a:srgbClr val="233247"/>
                 </a:solidFill>
                 <a:latin typeface="Arial"/>
-                <a:ea typeface="Arial"/>
-                <a:cs typeface="Arial"/>
-              </a:defRPr>
+              </a:rPr>
+              <a:t>94.6% against 88.5% for always guessing positive; balanced accuracy 87.9%; specificity 96.6%; MCC 0.74.</a:t>
+            </a:r>
+          </a:p>
+          <a:p>
+            <a:pPr algn="l">
+              <a:spcAft>
+                <a:spcPts val="400"/>
+              </a:spcAft>
             </a:pPr>
             <a:r>
               <a:rPr sz="1200" b="1">
                 <a:solidFill>
+                  <a:srgbClr val="142D4E"/>
+                </a:solidFill>
+                <a:latin typeface="Arial"/>
+              </a:rPr>
+              <a:t>How to read it: </a:t>
+            </a:r>
+            <a:r>
+              <a:rPr sz="1200" b="0">
+                <a:solidFill>
                   <a:srgbClr val="233247"/>
                 </a:solidFill>
                 <a:latin typeface="Arial"/>
-                <a:ea typeface="Arial"/>
-                <a:cs typeface="Arial"/>
               </a:rPr>
-              <a:t>Evaluation data: </a:t>
+              <a:t>the 90%-plus accuracy is partly the easy positive class, so the honest evidence is ROC-AUC 0.971 (per-game 0.976) and the 0.75 precision and 0.79 recall on negatives.</a:t>
+            </a:r>
+          </a:p>
+          <a:p>
+            <a:pPr algn="l">
+              <a:spcAft>
+                <a:spcPts val="400"/>
+              </a:spcAft>
+            </a:pPr>
+            <a:r>
+              <a:rPr sz="1200" b="1">
+                <a:solidFill>
+                  <a:srgbClr val="142D4E"/>
+                </a:solidFill>
+                <a:latin typeface="Arial"/>
+              </a:rPr>
+              <a:t>Topics: </a:t>
             </a:r>
             <a:r>
               <a:rPr sz="1200" b="0">
@@ -6371,88 +7613,158 @@
                   <a:srgbClr val="233247"/>
                 </a:solidFill>
                 <a:latin typeface="Arial"/>
-                <a:ea typeface="Arial"/>
-                <a:cs typeface="Arial"/>
               </a:rPr>
-              <a:t>120,487 English test reviews from games never seen in training. Confusion matrix of the selected model: 10,980 negatives caught, 2,893 missed, 3,607 false alarms, 103,007 correct positives; accuracy 94.6% against 88.5% for always guessing positive. Topics: NMF diversity 90.0% against 86.25% for LDA, coherence -2.380 against -1.732 (LDA better), stability 0.745.</a:t>
+              <a:t>NMF diversity 90.0% against 86.25% for LDA, coherence -2.380 against -1.732 (LDA better), stability 0.745. A blind check of 200 reviews (AI-labelled) agrees on 35.5%: only Early Access, repetition and crash topics are reliable.</a:t>
             </a:r>
           </a:p>
         </p:txBody>
       </p:sp>
-      <p:sp>
+      <p:sp xmlns:a="http://schemas.openxmlformats.org/drawingml/2006/main">
         <p:nvSpPr>
-          <p:cNvPr id="6" name="">
-            <a:extLst xmlns:a="http://schemas.openxmlformats.org/drawingml/2006/main">
-              <a:ext uri="{FF2B5EF4-FFF2-40B4-BE49-F238E27FC236}">
-                <a16:creationId xmlns:a16="http://schemas.microsoft.com/office/drawing/2014/main" id="{55789FB3-CBB4-4A8A-A567-D7BA9CB667B9}"/>
-              </a:ext>
-            </a:extLst>
-          </p:cNvPr>
-          <p:cNvSpPr>
-            <a:spLocks xmlns:a="http://schemas.openxmlformats.org/drawingml/2006/main" noGrp="1"/>
-          </p:cNvSpPr>
+          <p:cNvPr id="10" name="Rectangle 9"/>
+          <p:cNvSpPr/>
           <p:nvPr/>
         </p:nvSpPr>
         <p:spPr>
-          <a:xfrm xmlns:a="http://schemas.openxmlformats.org/drawingml/2006/main">
-            <a:off x="685800" y="5349240"/>
-            <a:ext cx="10572750" cy="914400"/>
+          <a:xfrm>
+            <a:off x="612648" y="5916168"/>
+            <a:ext cx="10972800" cy="420624"/>
           </a:xfrm>
-          <a:prstGeom xmlns:a="http://schemas.openxmlformats.org/drawingml/2006/main" prst="rect">
+          <a:prstGeom prst="rect">
             <a:avLst/>
           </a:prstGeom>
-          <a:noFill xmlns:a="http://schemas.openxmlformats.org/drawingml/2006/main"/>
-          <a:ln xmlns:a="http://schemas.openxmlformats.org/drawingml/2006/main" w="0">
+          <a:solidFill>
+            <a:srgbClr val="EEF2F7"/>
+          </a:solidFill>
+          <a:ln>
             <a:noFill/>
-            <a:prstDash val="solid"/>
           </a:ln>
+          <a:effectLst/>
         </p:spPr>
+        <p:style>
+          <a:lnRef idx="1">
+            <a:schemeClr val="accent1"/>
+          </a:lnRef>
+          <a:fillRef idx="3">
+            <a:schemeClr val="accent1"/>
+          </a:fillRef>
+          <a:effectRef idx="2">
+            <a:schemeClr val="accent1"/>
+          </a:effectRef>
+          <a:fontRef idx="minor">
+            <a:schemeClr val="lt1"/>
+          </a:fontRef>
+        </p:style>
         <p:txBody>
-          <a:bodyPr xmlns:a="http://schemas.openxmlformats.org/drawingml/2006/main" wrap="square"/>
-          <a:lstStyle xmlns:a="http://schemas.openxmlformats.org/drawingml/2006/main">
-            <a:defPPr>
-              <a:defRPr sz="1875" b="0">
+          <a:bodyPr rtlCol="0" anchor="ctr"/>
+          <a:lstStyle/>
+          <a:p>
+            <a:pPr algn="ctr"/>
+          </a:p>
+        </p:txBody>
+      </p:sp>
+      <p:sp xmlns:a="http://schemas.openxmlformats.org/drawingml/2006/main">
+        <p:nvSpPr>
+          <p:cNvPr id="11" name="Rectangle 10"/>
+          <p:cNvSpPr/>
+          <p:nvPr/>
+        </p:nvSpPr>
+        <p:spPr>
+          <a:xfrm>
+            <a:off x="612648" y="5916168"/>
+            <a:ext cx="64008" cy="420624"/>
+          </a:xfrm>
+          <a:prstGeom prst="rect">
+            <a:avLst/>
+          </a:prstGeom>
+          <a:solidFill>
+            <a:srgbClr val="C44E52"/>
+          </a:solidFill>
+          <a:ln>
+            <a:noFill/>
+          </a:ln>
+          <a:effectLst/>
+        </p:spPr>
+        <p:style>
+          <a:lnRef idx="1">
+            <a:schemeClr val="accent1"/>
+          </a:lnRef>
+          <a:fillRef idx="3">
+            <a:schemeClr val="accent1"/>
+          </a:fillRef>
+          <a:effectRef idx="2">
+            <a:schemeClr val="accent1"/>
+          </a:effectRef>
+          <a:fontRef idx="minor">
+            <a:schemeClr val="lt1"/>
+          </a:fontRef>
+        </p:style>
+        <p:txBody>
+          <a:bodyPr rtlCol="0" anchor="ctr"/>
+          <a:lstStyle/>
+          <a:p>
+            <a:pPr algn="ctr"/>
+          </a:p>
+        </p:txBody>
+      </p:sp>
+      <p:sp xmlns:a="http://schemas.openxmlformats.org/drawingml/2006/main">
+        <p:nvSpPr>
+          <p:cNvPr id="12" name="Rectangle 11"/>
+          <p:cNvSpPr/>
+          <p:nvPr/>
+        </p:nvSpPr>
+        <p:spPr>
+          <a:xfrm>
+            <a:off x="676656" y="5916168"/>
+            <a:ext cx="10908792" cy="420624"/>
+          </a:xfrm>
+          <a:prstGeom prst="rect">
+            <a:avLst/>
+          </a:prstGeom>
+          <a:solidFill>
+            <a:srgbClr val="EEF2F7"/>
+          </a:solidFill>
+          <a:ln>
+            <a:noFill/>
+          </a:ln>
+          <a:effectLst/>
+        </p:spPr>
+        <p:style>
+          <a:lnRef idx="1">
+            <a:schemeClr val="accent1"/>
+          </a:lnRef>
+          <a:fillRef idx="3">
+            <a:schemeClr val="accent1"/>
+          </a:fillRef>
+          <a:effectRef idx="2">
+            <a:schemeClr val="accent1"/>
+          </a:effectRef>
+          <a:fontRef idx="minor">
+            <a:schemeClr val="lt1"/>
+          </a:fontRef>
+        </p:style>
+        <p:txBody>
+          <a:bodyPr rtlCol="0" anchor="ctr" wrap="square" tIns="36576" bIns="36576"/>
+          <a:lstStyle/>
+          <a:p>
+            <a:pPr algn="l"/>
+            <a:r>
+              <a:rPr sz="1200" b="1">
+                <a:solidFill>
+                  <a:srgbClr val="C44E52"/>
+                </a:solidFill>
+                <a:latin typeface="Arial"/>
+              </a:rPr>
+              <a:t>Takeaway   </a:t>
+            </a:r>
+            <a:r>
+              <a:rPr sz="1200" b="0">
                 <a:solidFill>
                   <a:srgbClr val="233247"/>
                 </a:solidFill>
                 <a:latin typeface="Arial"/>
-                <a:ea typeface="Arial"/>
-                <a:cs typeface="Arial"/>
-              </a:defRPr>
-            </a:defPPr>
-          </a:lstStyle>
-          <a:p xmlns:a="http://schemas.openxmlformats.org/drawingml/2006/main">
-            <a:pPr>
-              <a:defRPr sz="1875" b="0">
-                <a:solidFill>
-                  <a:srgbClr val="233247"/>
-                </a:solidFill>
-                <a:latin typeface="Arial"/>
-                <a:ea typeface="Arial"/>
-                <a:cs typeface="Arial"/>
-              </a:defRPr>
-            </a:pPr>
-            <a:r>
-              <a:rPr sz="1200" b="1">
-                <a:solidFill>
-                  <a:srgbClr val="233247"/>
-                </a:solidFill>
-                <a:latin typeface="Arial"/>
-                <a:ea typeface="Arial"/>
-                <a:cs typeface="Arial"/>
               </a:rPr>
-              <a:t>Interpretation: </a:t>
-            </a:r>
-            <a:r>
-              <a:rPr sz="1200" b="0">
-                <a:solidFill>
-                  <a:srgbClr val="233247"/>
-                </a:solidFill>
-                <a:latin typeface="Arial"/>
-                <a:ea typeface="Arial"/>
-                <a:cs typeface="Arial"/>
-              </a:rPr>
-              <a:t>the full text model is selected: it detects a negative review far better than metadata. It detects, it does not forecast. A blind check of 200 reviews (labelled by an AI assistant) agrees with the topics on 35.5%: only the Early Access, repetition and crash topics are reliable.</a:t>
+              <a:t>Reading a review's own text separates negative from positive very well (ROC-AUC 0.97), but it detects a complaint, it does not forecast one.</a:t>
             </a:r>
           </a:p>
         </p:txBody>
@@ -6704,7 +8016,7 @@
         <p:spPr>
           <a:xfrm xmlns:a="http://schemas.openxmlformats.org/drawingml/2006/main">
             <a:off x="685800" y="1783080"/>
-            <a:ext cx="10668000" cy="731520"/>
+            <a:ext cx="10668000" cy="502920"/>
           </a:xfrm>
           <a:prstGeom xmlns:a="http://schemas.openxmlformats.org/drawingml/2006/main" prst="rect">
             <a:avLst/>
@@ -6761,162 +8073,6 @@
                 <a:cs typeface="Arial"/>
               </a:rPr>
               <a:t>Association rule mining with FP-Growth, to find tag, price and Early Access combinations that go with the Strong tier.</a:t>
-            </a:r>
-          </a:p>
-        </p:txBody>
-      </p:sp>
-      <p:sp>
-        <p:nvSpPr>
-          <p:cNvPr id="5" name="">
-            <a:extLst xmlns:a="http://schemas.openxmlformats.org/drawingml/2006/main">
-              <a:ext uri="{FF2B5EF4-FFF2-40B4-BE49-F238E27FC236}">
-                <a16:creationId xmlns:a16="http://schemas.microsoft.com/office/drawing/2014/main" id="{0C0900EB-1B60-44F0-8102-7BBACAA3517F}"/>
-              </a:ext>
-            </a:extLst>
-          </p:cNvPr>
-          <p:cNvSpPr>
-            <a:spLocks xmlns:a="http://schemas.openxmlformats.org/drawingml/2006/main" noGrp="1"/>
-          </p:cNvSpPr>
-          <p:nvPr/>
-        </p:nvSpPr>
-        <p:spPr>
-          <a:xfrm xmlns:a="http://schemas.openxmlformats.org/drawingml/2006/main">
-            <a:off x="685800" y="2606040"/>
-            <a:ext cx="10668000" cy="1005840"/>
-          </a:xfrm>
-          <a:prstGeom xmlns:a="http://schemas.openxmlformats.org/drawingml/2006/main" prst="rect">
-            <a:avLst/>
-          </a:prstGeom>
-          <a:noFill xmlns:a="http://schemas.openxmlformats.org/drawingml/2006/main"/>
-          <a:ln xmlns:a="http://schemas.openxmlformats.org/drawingml/2006/main" w="0">
-            <a:noFill/>
-            <a:prstDash val="solid"/>
-          </a:ln>
-        </p:spPr>
-        <p:txBody>
-          <a:bodyPr xmlns:a="http://schemas.openxmlformats.org/drawingml/2006/main" wrap="square"/>
-          <a:lstStyle xmlns:a="http://schemas.openxmlformats.org/drawingml/2006/main">
-            <a:defPPr>
-              <a:defRPr sz="2025" b="0">
-                <a:solidFill>
-                  <a:srgbClr val="233247"/>
-                </a:solidFill>
-                <a:latin typeface="Arial"/>
-                <a:ea typeface="Arial"/>
-                <a:cs typeface="Arial"/>
-              </a:defRPr>
-            </a:defPPr>
-          </a:lstStyle>
-          <a:p xmlns:a="http://schemas.openxmlformats.org/drawingml/2006/main">
-            <a:pPr>
-              <a:defRPr sz="2025" b="0">
-                <a:solidFill>
-                  <a:srgbClr val="233247"/>
-                </a:solidFill>
-                <a:latin typeface="Arial"/>
-                <a:ea typeface="Arial"/>
-                <a:cs typeface="Arial"/>
-              </a:defRPr>
-            </a:pPr>
-            <a:r>
-              <a:rPr sz="1400" b="1">
-                <a:solidFill>
-                  <a:srgbClr val="233247"/>
-                </a:solidFill>
-                <a:latin typeface="Arial"/>
-                <a:ea typeface="Arial"/>
-                <a:cs typeface="Arial"/>
-              </a:rPr>
-              <a:t>Input and preparation: </a:t>
-            </a:r>
-            <a:r>
-              <a:rPr sz="1400" b="0">
-                <a:solidFill>
-                  <a:srgbClr val="233247"/>
-                </a:solidFill>
-                <a:latin typeface="Arial"/>
-                <a:ea typeface="Arial"/>
-                <a:cs typeface="Arial"/>
-              </a:rPr>
-              <a:t>transactions = the 1,191 training games, each a set of items: user tags (without after-play opinion tags such as Great Soundtrack), price band and Early Access; 137 items; Strong is the tier for 35.3% of training games.</a:t>
-            </a:r>
-          </a:p>
-        </p:txBody>
-      </p:sp>
-      <p:sp>
-        <p:nvSpPr>
-          <p:cNvPr id="6" name="">
-            <a:extLst xmlns:a="http://schemas.openxmlformats.org/drawingml/2006/main">
-              <a:ext uri="{FF2B5EF4-FFF2-40B4-BE49-F238E27FC236}">
-                <a16:creationId xmlns:a16="http://schemas.microsoft.com/office/drawing/2014/main" id="{878C613F-0AE4-461E-A735-039F81AECD9D}"/>
-              </a:ext>
-            </a:extLst>
-          </p:cNvPr>
-          <p:cNvSpPr>
-            <a:spLocks xmlns:a="http://schemas.openxmlformats.org/drawingml/2006/main" noGrp="1"/>
-          </p:cNvSpPr>
-          <p:nvPr/>
-        </p:nvSpPr>
-        <p:spPr>
-          <a:xfrm xmlns:a="http://schemas.openxmlformats.org/drawingml/2006/main">
-            <a:off x="685800" y="3703320"/>
-            <a:ext cx="10668000" cy="1005840"/>
-          </a:xfrm>
-          <a:prstGeom xmlns:a="http://schemas.openxmlformats.org/drawingml/2006/main" prst="rect">
-            <a:avLst/>
-          </a:prstGeom>
-          <a:noFill xmlns:a="http://schemas.openxmlformats.org/drawingml/2006/main"/>
-          <a:ln xmlns:a="http://schemas.openxmlformats.org/drawingml/2006/main" w="0">
-            <a:noFill/>
-            <a:prstDash val="solid"/>
-          </a:ln>
-        </p:spPr>
-        <p:txBody>
-          <a:bodyPr xmlns:a="http://schemas.openxmlformats.org/drawingml/2006/main" wrap="square"/>
-          <a:lstStyle xmlns:a="http://schemas.openxmlformats.org/drawingml/2006/main">
-            <a:defPPr>
-              <a:defRPr sz="2025" b="0">
-                <a:solidFill>
-                  <a:srgbClr val="233247"/>
-                </a:solidFill>
-                <a:latin typeface="Arial"/>
-                <a:ea typeface="Arial"/>
-                <a:cs typeface="Arial"/>
-              </a:defRPr>
-            </a:defPPr>
-          </a:lstStyle>
-          <a:p xmlns:a="http://schemas.openxmlformats.org/drawingml/2006/main">
-            <a:pPr>
-              <a:defRPr sz="2025" b="0">
-                <a:solidFill>
-                  <a:srgbClr val="233247"/>
-                </a:solidFill>
-                <a:latin typeface="Arial"/>
-                <a:ea typeface="Arial"/>
-                <a:cs typeface="Arial"/>
-              </a:defRPr>
-            </a:pPr>
-            <a:r>
-              <a:rPr sz="1400" b="1">
-                <a:solidFill>
-                  <a:srgbClr val="233247"/>
-                </a:solidFill>
-                <a:latin typeface="Arial"/>
-                <a:ea typeface="Arial"/>
-                <a:cs typeface="Arial"/>
-              </a:rPr>
-              <a:t>Implementation: </a:t>
-            </a:r>
-            <a:r>
-              <a:rPr sz="1400" b="0">
-                <a:solidFill>
-                  <a:srgbClr val="233247"/>
-                </a:solidFill>
-                <a:latin typeface="Arial"/>
-                <a:ea typeface="Arial"/>
-                <a:cs typeface="Arial"/>
-              </a:rPr>
-              <a:t>mlxtend FP-Growth, minimum support 25 games, up to 3 items, at least 10 hits, lift at least 1.2, Benjamini-Hochberg q below 0.10; each rule is then checked once on the 299 test games (at least 10 test games to count).</a:t>
             </a:r>
           </a:p>
         </p:txBody>
@@ -6937,8 +8093,8 @@
         </p:nvSpPr>
         <p:spPr>
           <a:xfrm xmlns:a="http://schemas.openxmlformats.org/drawingml/2006/main">
-            <a:off x="685800" y="4800600"/>
-            <a:ext cx="10668000" cy="1005840"/>
+            <a:off x="685800" y="4754880"/>
+            <a:ext cx="10668000" cy="1051560"/>
           </a:xfrm>
           <a:prstGeom xmlns:a="http://schemas.openxmlformats.org/drawingml/2006/main" prst="rect">
             <a:avLst/>
@@ -6995,6 +8151,1056 @@
                 <a:cs typeface="Arial"/>
               </a:rPr>
               <a:t>4,715 candidate rules, 95 Strong rules pass, 0 Struggling rules. Top rule: Pixel Graphics + Retro + Shooter, 25 games, 80% Strong (lift 2.26), 3 of 4 test games Strong.</a:t>
+            </a:r>
+          </a:p>
+        </p:txBody>
+      </p:sp>
+      <p:sp xmlns:a="http://schemas.openxmlformats.org/drawingml/2006/main">
+        <p:nvSpPr>
+          <p:cNvPr id="9" name="Rectangle 8"/>
+          <p:cNvSpPr/>
+          <p:nvPr/>
+        </p:nvSpPr>
+        <p:spPr>
+          <a:xfrm>
+            <a:off x="612648" y="2377440"/>
+            <a:ext cx="2537460" cy="384048"/>
+          </a:xfrm>
+          <a:prstGeom prst="rect">
+            <a:avLst/>
+          </a:prstGeom>
+          <a:solidFill>
+            <a:srgbClr val="142D4E"/>
+          </a:solidFill>
+          <a:ln>
+            <a:noFill/>
+          </a:ln>
+          <a:effectLst/>
+        </p:spPr>
+        <p:style>
+          <a:lnRef idx="1">
+            <a:schemeClr val="accent1"/>
+          </a:lnRef>
+          <a:fillRef idx="3">
+            <a:schemeClr val="accent1"/>
+          </a:fillRef>
+          <a:effectRef idx="2">
+            <a:schemeClr val="accent1"/>
+          </a:effectRef>
+          <a:fontRef idx="minor">
+            <a:schemeClr val="lt1"/>
+          </a:fontRef>
+        </p:style>
+        <p:txBody>
+          <a:bodyPr rtlCol="0" anchor="ctr" wrap="square" tIns="36576" bIns="36576"/>
+          <a:lstStyle/>
+          <a:p>
+            <a:pPr algn="l"/>
+            <a:r>
+              <a:rPr sz="1200" b="1">
+                <a:solidFill>
+                  <a:srgbClr val="FFFFFF"/>
+                </a:solidFill>
+                <a:latin typeface="Arial"/>
+              </a:rPr>
+              <a:t>1  Build transactions</a:t>
+            </a:r>
+          </a:p>
+        </p:txBody>
+      </p:sp>
+      <p:sp xmlns:a="http://schemas.openxmlformats.org/drawingml/2006/main">
+        <p:nvSpPr>
+          <p:cNvPr id="10" name="Rectangle 9"/>
+          <p:cNvSpPr/>
+          <p:nvPr/>
+        </p:nvSpPr>
+        <p:spPr>
+          <a:xfrm>
+            <a:off x="612648" y="2761488"/>
+            <a:ext cx="2537460" cy="1325880"/>
+          </a:xfrm>
+          <a:prstGeom prst="rect">
+            <a:avLst/>
+          </a:prstGeom>
+          <a:solidFill>
+            <a:srgbClr val="FFFFFF"/>
+          </a:solidFill>
+          <a:ln w="9525">
+            <a:solidFill>
+              <a:srgbClr val="C9D6E2"/>
+            </a:solidFill>
+          </a:ln>
+          <a:effectLst/>
+        </p:spPr>
+        <p:style>
+          <a:lnRef idx="1">
+            <a:schemeClr val="accent1"/>
+          </a:lnRef>
+          <a:fillRef idx="3">
+            <a:schemeClr val="accent1"/>
+          </a:fillRef>
+          <a:effectRef idx="2">
+            <a:schemeClr val="accent1"/>
+          </a:effectRef>
+          <a:fontRef idx="minor">
+            <a:schemeClr val="lt1"/>
+          </a:fontRef>
+        </p:style>
+        <p:txBody>
+          <a:bodyPr rtlCol="0" anchor="t" wrap="square" tIns="73152" bIns="73152"/>
+          <a:lstStyle/>
+          <a:p>
+            <a:pPr algn="l">
+              <a:spcAft>
+                <a:spcPts val="300"/>
+              </a:spcAft>
+            </a:pPr>
+            <a:r>
+              <a:rPr sz="1100" b="0">
+                <a:solidFill>
+                  <a:srgbClr val="233247"/>
+                </a:solidFill>
+                <a:latin typeface="Arial"/>
+              </a:rPr>
+              <a:t>• 1,191 training games</a:t>
+            </a:r>
+          </a:p>
+          <a:p>
+            <a:pPr algn="l">
+              <a:spcAft>
+                <a:spcPts val="300"/>
+              </a:spcAft>
+            </a:pPr>
+            <a:r>
+              <a:rPr sz="1100" b="0">
+                <a:solidFill>
+                  <a:srgbClr val="233247"/>
+                </a:solidFill>
+                <a:latin typeface="Arial"/>
+              </a:rPr>
+              <a:t>• User tags (no after-play opinion tags), price band, Early Access</a:t>
+            </a:r>
+          </a:p>
+        </p:txBody>
+      </p:sp>
+      <p:sp xmlns:a="http://schemas.openxmlformats.org/drawingml/2006/main">
+        <p:nvSpPr>
+          <p:cNvPr id="11" name="Rectangle 10"/>
+          <p:cNvSpPr/>
+          <p:nvPr/>
+        </p:nvSpPr>
+        <p:spPr>
+          <a:xfrm>
+            <a:off x="612648" y="4087368"/>
+            <a:ext cx="2537460" cy="502920"/>
+          </a:xfrm>
+          <a:prstGeom prst="rect">
+            <a:avLst/>
+          </a:prstGeom>
+          <a:solidFill>
+            <a:srgbClr val="EEF2F7"/>
+          </a:solidFill>
+          <a:ln w="9525">
+            <a:solidFill>
+              <a:srgbClr val="C9D6E2"/>
+            </a:solidFill>
+          </a:ln>
+          <a:effectLst/>
+        </p:spPr>
+        <p:style>
+          <a:lnRef idx="1">
+            <a:schemeClr val="accent1"/>
+          </a:lnRef>
+          <a:fillRef idx="3">
+            <a:schemeClr val="accent1"/>
+          </a:fillRef>
+          <a:effectRef idx="2">
+            <a:schemeClr val="accent1"/>
+          </a:effectRef>
+          <a:fontRef idx="minor">
+            <a:schemeClr val="lt1"/>
+          </a:fontRef>
+        </p:style>
+        <p:txBody>
+          <a:bodyPr rtlCol="0" anchor="ctr" wrap="square" tIns="36576" bIns="36576"/>
+          <a:lstStyle/>
+          <a:p>
+            <a:pPr algn="l"/>
+            <a:r>
+              <a:rPr sz="1000" b="1">
+                <a:solidFill>
+                  <a:srgbClr val="66758A"/>
+                </a:solidFill>
+                <a:latin typeface="Arial"/>
+              </a:rPr>
+              <a:t>OUTPUT  </a:t>
+            </a:r>
+            <a:r>
+              <a:rPr sz="1000" b="1">
+                <a:solidFill>
+                  <a:srgbClr val="142D4E"/>
+                </a:solidFill>
+                <a:latin typeface="Arial"/>
+              </a:rPr>
+              <a:t>137 items</a:t>
+            </a:r>
+          </a:p>
+        </p:txBody>
+      </p:sp>
+      <p:sp xmlns:a="http://schemas.openxmlformats.org/drawingml/2006/main">
+        <p:nvSpPr>
+          <p:cNvPr id="12" name="Right Arrow 11"/>
+          <p:cNvSpPr/>
+          <p:nvPr/>
+        </p:nvSpPr>
+        <p:spPr>
+          <a:xfrm>
+            <a:off x="3186684" y="2441448"/>
+            <a:ext cx="201167" cy="256032"/>
+          </a:xfrm>
+          <a:prstGeom prst="rightArrow">
+            <a:avLst/>
+          </a:prstGeom>
+          <a:solidFill>
+            <a:srgbClr val="C44E52"/>
+          </a:solidFill>
+          <a:ln>
+            <a:noFill/>
+          </a:ln>
+          <a:effectLst/>
+        </p:spPr>
+        <p:style>
+          <a:lnRef idx="1">
+            <a:schemeClr val="accent1"/>
+          </a:lnRef>
+          <a:fillRef idx="3">
+            <a:schemeClr val="accent1"/>
+          </a:fillRef>
+          <a:effectRef idx="2">
+            <a:schemeClr val="accent1"/>
+          </a:effectRef>
+          <a:fontRef idx="minor">
+            <a:schemeClr val="lt1"/>
+          </a:fontRef>
+        </p:style>
+        <p:txBody>
+          <a:bodyPr rtlCol="0" anchor="ctr"/>
+          <a:lstStyle/>
+          <a:p>
+            <a:pPr algn="ctr"/>
+          </a:p>
+        </p:txBody>
+      </p:sp>
+      <p:sp xmlns:a="http://schemas.openxmlformats.org/drawingml/2006/main">
+        <p:nvSpPr>
+          <p:cNvPr id="13" name="Rectangle 12"/>
+          <p:cNvSpPr/>
+          <p:nvPr/>
+        </p:nvSpPr>
+        <p:spPr>
+          <a:xfrm>
+            <a:off x="3424427" y="2377440"/>
+            <a:ext cx="2537460" cy="384048"/>
+          </a:xfrm>
+          <a:prstGeom prst="rect">
+            <a:avLst/>
+          </a:prstGeom>
+          <a:solidFill>
+            <a:srgbClr val="142D4E"/>
+          </a:solidFill>
+          <a:ln>
+            <a:noFill/>
+          </a:ln>
+          <a:effectLst/>
+        </p:spPr>
+        <p:style>
+          <a:lnRef idx="1">
+            <a:schemeClr val="accent1"/>
+          </a:lnRef>
+          <a:fillRef idx="3">
+            <a:schemeClr val="accent1"/>
+          </a:fillRef>
+          <a:effectRef idx="2">
+            <a:schemeClr val="accent1"/>
+          </a:effectRef>
+          <a:fontRef idx="minor">
+            <a:schemeClr val="lt1"/>
+          </a:fontRef>
+        </p:style>
+        <p:txBody>
+          <a:bodyPr rtlCol="0" anchor="ctr" wrap="square" tIns="36576" bIns="36576"/>
+          <a:lstStyle/>
+          <a:p>
+            <a:pPr algn="l"/>
+            <a:r>
+              <a:rPr sz="1200" b="1">
+                <a:solidFill>
+                  <a:srgbClr val="FFFFFF"/>
+                </a:solidFill>
+                <a:latin typeface="Arial"/>
+              </a:rPr>
+              <a:t>2  Mine itemsets</a:t>
+            </a:r>
+          </a:p>
+        </p:txBody>
+      </p:sp>
+      <p:sp xmlns:a="http://schemas.openxmlformats.org/drawingml/2006/main">
+        <p:nvSpPr>
+          <p:cNvPr id="14" name="Rectangle 13"/>
+          <p:cNvSpPr/>
+          <p:nvPr/>
+        </p:nvSpPr>
+        <p:spPr>
+          <a:xfrm>
+            <a:off x="3424427" y="2761488"/>
+            <a:ext cx="2537460" cy="1325880"/>
+          </a:xfrm>
+          <a:prstGeom prst="rect">
+            <a:avLst/>
+          </a:prstGeom>
+          <a:solidFill>
+            <a:srgbClr val="FFFFFF"/>
+          </a:solidFill>
+          <a:ln w="9525">
+            <a:solidFill>
+              <a:srgbClr val="C9D6E2"/>
+            </a:solidFill>
+          </a:ln>
+          <a:effectLst/>
+        </p:spPr>
+        <p:style>
+          <a:lnRef idx="1">
+            <a:schemeClr val="accent1"/>
+          </a:lnRef>
+          <a:fillRef idx="3">
+            <a:schemeClr val="accent1"/>
+          </a:fillRef>
+          <a:effectRef idx="2">
+            <a:schemeClr val="accent1"/>
+          </a:effectRef>
+          <a:fontRef idx="minor">
+            <a:schemeClr val="lt1"/>
+          </a:fontRef>
+        </p:style>
+        <p:txBody>
+          <a:bodyPr rtlCol="0" anchor="t" wrap="square" tIns="73152" bIns="73152"/>
+          <a:lstStyle/>
+          <a:p>
+            <a:pPr algn="l">
+              <a:spcAft>
+                <a:spcPts val="300"/>
+              </a:spcAft>
+            </a:pPr>
+            <a:r>
+              <a:rPr sz="1100" b="0">
+                <a:solidFill>
+                  <a:srgbClr val="233247"/>
+                </a:solidFill>
+                <a:latin typeface="Arial"/>
+              </a:rPr>
+              <a:t>• FP-Growth (mlxtend)</a:t>
+            </a:r>
+          </a:p>
+          <a:p>
+            <a:pPr algn="l">
+              <a:spcAft>
+                <a:spcPts val="300"/>
+              </a:spcAft>
+            </a:pPr>
+            <a:r>
+              <a:rPr sz="1100" b="0">
+                <a:solidFill>
+                  <a:srgbClr val="233247"/>
+                </a:solidFill>
+                <a:latin typeface="Arial"/>
+              </a:rPr>
+              <a:t>• Support at least 25 games, up to 3 items</a:t>
+            </a:r>
+          </a:p>
+        </p:txBody>
+      </p:sp>
+      <p:sp xmlns:a="http://schemas.openxmlformats.org/drawingml/2006/main">
+        <p:nvSpPr>
+          <p:cNvPr id="15" name="Rectangle 14"/>
+          <p:cNvSpPr/>
+          <p:nvPr/>
+        </p:nvSpPr>
+        <p:spPr>
+          <a:xfrm>
+            <a:off x="3424427" y="4087368"/>
+            <a:ext cx="2537460" cy="502920"/>
+          </a:xfrm>
+          <a:prstGeom prst="rect">
+            <a:avLst/>
+          </a:prstGeom>
+          <a:solidFill>
+            <a:srgbClr val="EEF2F7"/>
+          </a:solidFill>
+          <a:ln w="9525">
+            <a:solidFill>
+              <a:srgbClr val="C9D6E2"/>
+            </a:solidFill>
+          </a:ln>
+          <a:effectLst/>
+        </p:spPr>
+        <p:style>
+          <a:lnRef idx="1">
+            <a:schemeClr val="accent1"/>
+          </a:lnRef>
+          <a:fillRef idx="3">
+            <a:schemeClr val="accent1"/>
+          </a:fillRef>
+          <a:effectRef idx="2">
+            <a:schemeClr val="accent1"/>
+          </a:effectRef>
+          <a:fontRef idx="minor">
+            <a:schemeClr val="lt1"/>
+          </a:fontRef>
+        </p:style>
+        <p:txBody>
+          <a:bodyPr rtlCol="0" anchor="ctr" wrap="square" tIns="36576" bIns="36576"/>
+          <a:lstStyle/>
+          <a:p>
+            <a:pPr algn="l"/>
+            <a:r>
+              <a:rPr sz="1000" b="1">
+                <a:solidFill>
+                  <a:srgbClr val="66758A"/>
+                </a:solidFill>
+                <a:latin typeface="Arial"/>
+              </a:rPr>
+              <a:t>OUTPUT  </a:t>
+            </a:r>
+            <a:r>
+              <a:rPr sz="1000" b="1">
+                <a:solidFill>
+                  <a:srgbClr val="142D4E"/>
+                </a:solidFill>
+                <a:latin typeface="Arial"/>
+              </a:rPr>
+              <a:t>4,715 candidate rules</a:t>
+            </a:r>
+          </a:p>
+        </p:txBody>
+      </p:sp>
+      <p:sp xmlns:a="http://schemas.openxmlformats.org/drawingml/2006/main">
+        <p:nvSpPr>
+          <p:cNvPr id="16" name="Right Arrow 15"/>
+          <p:cNvSpPr/>
+          <p:nvPr/>
+        </p:nvSpPr>
+        <p:spPr>
+          <a:xfrm>
+            <a:off x="5998464" y="2441448"/>
+            <a:ext cx="201167" cy="256032"/>
+          </a:xfrm>
+          <a:prstGeom prst="rightArrow">
+            <a:avLst/>
+          </a:prstGeom>
+          <a:solidFill>
+            <a:srgbClr val="C44E52"/>
+          </a:solidFill>
+          <a:ln>
+            <a:noFill/>
+          </a:ln>
+          <a:effectLst/>
+        </p:spPr>
+        <p:style>
+          <a:lnRef idx="1">
+            <a:schemeClr val="accent1"/>
+          </a:lnRef>
+          <a:fillRef idx="3">
+            <a:schemeClr val="accent1"/>
+          </a:fillRef>
+          <a:effectRef idx="2">
+            <a:schemeClr val="accent1"/>
+          </a:effectRef>
+          <a:fontRef idx="minor">
+            <a:schemeClr val="lt1"/>
+          </a:fontRef>
+        </p:style>
+        <p:txBody>
+          <a:bodyPr rtlCol="0" anchor="ctr"/>
+          <a:lstStyle/>
+          <a:p>
+            <a:pPr algn="ctr"/>
+          </a:p>
+        </p:txBody>
+      </p:sp>
+      <p:sp xmlns:a="http://schemas.openxmlformats.org/drawingml/2006/main">
+        <p:nvSpPr>
+          <p:cNvPr id="17" name="Rectangle 16"/>
+          <p:cNvSpPr/>
+          <p:nvPr/>
+        </p:nvSpPr>
+        <p:spPr>
+          <a:xfrm>
+            <a:off x="6236207" y="2377440"/>
+            <a:ext cx="2537460" cy="384048"/>
+          </a:xfrm>
+          <a:prstGeom prst="rect">
+            <a:avLst/>
+          </a:prstGeom>
+          <a:solidFill>
+            <a:srgbClr val="142D4E"/>
+          </a:solidFill>
+          <a:ln>
+            <a:noFill/>
+          </a:ln>
+          <a:effectLst/>
+        </p:spPr>
+        <p:style>
+          <a:lnRef idx="1">
+            <a:schemeClr val="accent1"/>
+          </a:lnRef>
+          <a:fillRef idx="3">
+            <a:schemeClr val="accent1"/>
+          </a:fillRef>
+          <a:effectRef idx="2">
+            <a:schemeClr val="accent1"/>
+          </a:effectRef>
+          <a:fontRef idx="minor">
+            <a:schemeClr val="lt1"/>
+          </a:fontRef>
+        </p:style>
+        <p:txBody>
+          <a:bodyPr rtlCol="0" anchor="ctr" wrap="square" tIns="36576" bIns="36576"/>
+          <a:lstStyle/>
+          <a:p>
+            <a:pPr algn="l"/>
+            <a:r>
+              <a:rPr sz="1200" b="1">
+                <a:solidFill>
+                  <a:srgbClr val="FFFFFF"/>
+                </a:solidFill>
+                <a:latin typeface="Arial"/>
+              </a:rPr>
+              <a:t>3  Filter</a:t>
+            </a:r>
+          </a:p>
+        </p:txBody>
+      </p:sp>
+      <p:sp xmlns:a="http://schemas.openxmlformats.org/drawingml/2006/main">
+        <p:nvSpPr>
+          <p:cNvPr id="18" name="Rectangle 17"/>
+          <p:cNvSpPr/>
+          <p:nvPr/>
+        </p:nvSpPr>
+        <p:spPr>
+          <a:xfrm>
+            <a:off x="6236207" y="2761488"/>
+            <a:ext cx="2537460" cy="1325880"/>
+          </a:xfrm>
+          <a:prstGeom prst="rect">
+            <a:avLst/>
+          </a:prstGeom>
+          <a:solidFill>
+            <a:srgbClr val="FFFFFF"/>
+          </a:solidFill>
+          <a:ln w="9525">
+            <a:solidFill>
+              <a:srgbClr val="C9D6E2"/>
+            </a:solidFill>
+          </a:ln>
+          <a:effectLst/>
+        </p:spPr>
+        <p:style>
+          <a:lnRef idx="1">
+            <a:schemeClr val="accent1"/>
+          </a:lnRef>
+          <a:fillRef idx="3">
+            <a:schemeClr val="accent1"/>
+          </a:fillRef>
+          <a:effectRef idx="2">
+            <a:schemeClr val="accent1"/>
+          </a:effectRef>
+          <a:fontRef idx="minor">
+            <a:schemeClr val="lt1"/>
+          </a:fontRef>
+        </p:style>
+        <p:txBody>
+          <a:bodyPr rtlCol="0" anchor="t" wrap="square" tIns="73152" bIns="73152"/>
+          <a:lstStyle/>
+          <a:p>
+            <a:pPr algn="l">
+              <a:spcAft>
+                <a:spcPts val="300"/>
+              </a:spcAft>
+            </a:pPr>
+            <a:r>
+              <a:rPr sz="1100" b="0">
+                <a:solidFill>
+                  <a:srgbClr val="233247"/>
+                </a:solidFill>
+                <a:latin typeface="Arial"/>
+              </a:rPr>
+              <a:t>• At least 10 Strong hits, lift at least 1.2</a:t>
+            </a:r>
+          </a:p>
+          <a:p>
+            <a:pPr algn="l">
+              <a:spcAft>
+                <a:spcPts val="300"/>
+              </a:spcAft>
+            </a:pPr>
+            <a:r>
+              <a:rPr sz="1100" b="0">
+                <a:solidFill>
+                  <a:srgbClr val="233247"/>
+                </a:solidFill>
+                <a:latin typeface="Arial"/>
+              </a:rPr>
+              <a:t>• Benjamini-Hochberg q below 0.10</a:t>
+            </a:r>
+          </a:p>
+        </p:txBody>
+      </p:sp>
+      <p:sp xmlns:a="http://schemas.openxmlformats.org/drawingml/2006/main">
+        <p:nvSpPr>
+          <p:cNvPr id="19" name="Rectangle 18"/>
+          <p:cNvSpPr/>
+          <p:nvPr/>
+        </p:nvSpPr>
+        <p:spPr>
+          <a:xfrm>
+            <a:off x="6236207" y="4087368"/>
+            <a:ext cx="2537460" cy="502920"/>
+          </a:xfrm>
+          <a:prstGeom prst="rect">
+            <a:avLst/>
+          </a:prstGeom>
+          <a:solidFill>
+            <a:srgbClr val="EEF2F7"/>
+          </a:solidFill>
+          <a:ln w="9525">
+            <a:solidFill>
+              <a:srgbClr val="C9D6E2"/>
+            </a:solidFill>
+          </a:ln>
+          <a:effectLst/>
+        </p:spPr>
+        <p:style>
+          <a:lnRef idx="1">
+            <a:schemeClr val="accent1"/>
+          </a:lnRef>
+          <a:fillRef idx="3">
+            <a:schemeClr val="accent1"/>
+          </a:fillRef>
+          <a:effectRef idx="2">
+            <a:schemeClr val="accent1"/>
+          </a:effectRef>
+          <a:fontRef idx="minor">
+            <a:schemeClr val="lt1"/>
+          </a:fontRef>
+        </p:style>
+        <p:txBody>
+          <a:bodyPr rtlCol="0" anchor="ctr" wrap="square" tIns="36576" bIns="36576"/>
+          <a:lstStyle/>
+          <a:p>
+            <a:pPr algn="l"/>
+            <a:r>
+              <a:rPr sz="1000" b="1">
+                <a:solidFill>
+                  <a:srgbClr val="66758A"/>
+                </a:solidFill>
+                <a:latin typeface="Arial"/>
+              </a:rPr>
+              <a:t>OUTPUT  </a:t>
+            </a:r>
+            <a:r>
+              <a:rPr sz="1000" b="1">
+                <a:solidFill>
+                  <a:srgbClr val="142D4E"/>
+                </a:solidFill>
+                <a:latin typeface="Arial"/>
+              </a:rPr>
+              <a:t>95 Strong rules</a:t>
+            </a:r>
+          </a:p>
+        </p:txBody>
+      </p:sp>
+      <p:sp xmlns:a="http://schemas.openxmlformats.org/drawingml/2006/main">
+        <p:nvSpPr>
+          <p:cNvPr id="20" name="Right Arrow 19"/>
+          <p:cNvSpPr/>
+          <p:nvPr/>
+        </p:nvSpPr>
+        <p:spPr>
+          <a:xfrm>
+            <a:off x="8810243" y="2441448"/>
+            <a:ext cx="201167" cy="256032"/>
+          </a:xfrm>
+          <a:prstGeom prst="rightArrow">
+            <a:avLst/>
+          </a:prstGeom>
+          <a:solidFill>
+            <a:srgbClr val="C44E52"/>
+          </a:solidFill>
+          <a:ln>
+            <a:noFill/>
+          </a:ln>
+          <a:effectLst/>
+        </p:spPr>
+        <p:style>
+          <a:lnRef idx="1">
+            <a:schemeClr val="accent1"/>
+          </a:lnRef>
+          <a:fillRef idx="3">
+            <a:schemeClr val="accent1"/>
+          </a:fillRef>
+          <a:effectRef idx="2">
+            <a:schemeClr val="accent1"/>
+          </a:effectRef>
+          <a:fontRef idx="minor">
+            <a:schemeClr val="lt1"/>
+          </a:fontRef>
+        </p:style>
+        <p:txBody>
+          <a:bodyPr rtlCol="0" anchor="ctr"/>
+          <a:lstStyle/>
+          <a:p>
+            <a:pPr algn="ctr"/>
+          </a:p>
+        </p:txBody>
+      </p:sp>
+      <p:sp xmlns:a="http://schemas.openxmlformats.org/drawingml/2006/main">
+        <p:nvSpPr>
+          <p:cNvPr id="21" name="Rectangle 20"/>
+          <p:cNvSpPr/>
+          <p:nvPr/>
+        </p:nvSpPr>
+        <p:spPr>
+          <a:xfrm>
+            <a:off x="9047988" y="2377440"/>
+            <a:ext cx="2537460" cy="384048"/>
+          </a:xfrm>
+          <a:prstGeom prst="rect">
+            <a:avLst/>
+          </a:prstGeom>
+          <a:solidFill>
+            <a:srgbClr val="C44E52"/>
+          </a:solidFill>
+          <a:ln>
+            <a:noFill/>
+          </a:ln>
+          <a:effectLst/>
+        </p:spPr>
+        <p:style>
+          <a:lnRef idx="1">
+            <a:schemeClr val="accent1"/>
+          </a:lnRef>
+          <a:fillRef idx="3">
+            <a:schemeClr val="accent1"/>
+          </a:fillRef>
+          <a:effectRef idx="2">
+            <a:schemeClr val="accent1"/>
+          </a:effectRef>
+          <a:fontRef idx="minor">
+            <a:schemeClr val="lt1"/>
+          </a:fontRef>
+        </p:style>
+        <p:txBody>
+          <a:bodyPr rtlCol="0" anchor="ctr" wrap="square" tIns="36576" bIns="36576"/>
+          <a:lstStyle/>
+          <a:p>
+            <a:pPr algn="l"/>
+            <a:r>
+              <a:rPr sz="1200" b="1">
+                <a:solidFill>
+                  <a:srgbClr val="FFFFFF"/>
+                </a:solidFill>
+                <a:latin typeface="Arial"/>
+              </a:rPr>
+              <a:t>4  Check on unseen games</a:t>
+            </a:r>
+          </a:p>
+        </p:txBody>
+      </p:sp>
+      <p:sp xmlns:a="http://schemas.openxmlformats.org/drawingml/2006/main">
+        <p:nvSpPr>
+          <p:cNvPr id="22" name="Rectangle 21"/>
+          <p:cNvSpPr/>
+          <p:nvPr/>
+        </p:nvSpPr>
+        <p:spPr>
+          <a:xfrm>
+            <a:off x="9047988" y="2761488"/>
+            <a:ext cx="2537460" cy="1325880"/>
+          </a:xfrm>
+          <a:prstGeom prst="rect">
+            <a:avLst/>
+          </a:prstGeom>
+          <a:solidFill>
+            <a:srgbClr val="FFFFFF"/>
+          </a:solidFill>
+          <a:ln w="9525">
+            <a:solidFill>
+              <a:srgbClr val="C9D6E2"/>
+            </a:solidFill>
+          </a:ln>
+          <a:effectLst/>
+        </p:spPr>
+        <p:style>
+          <a:lnRef idx="1">
+            <a:schemeClr val="accent1"/>
+          </a:lnRef>
+          <a:fillRef idx="3">
+            <a:schemeClr val="accent1"/>
+          </a:fillRef>
+          <a:effectRef idx="2">
+            <a:schemeClr val="accent1"/>
+          </a:effectRef>
+          <a:fontRef idx="minor">
+            <a:schemeClr val="lt1"/>
+          </a:fontRef>
+        </p:style>
+        <p:txBody>
+          <a:bodyPr rtlCol="0" anchor="t" wrap="square" tIns="73152" bIns="73152"/>
+          <a:lstStyle/>
+          <a:p>
+            <a:pPr algn="l">
+              <a:spcAft>
+                <a:spcPts val="300"/>
+              </a:spcAft>
+            </a:pPr>
+            <a:r>
+              <a:rPr sz="1100" b="0">
+                <a:solidFill>
+                  <a:srgbClr val="233247"/>
+                </a:solidFill>
+                <a:latin typeface="Arial"/>
+              </a:rPr>
+              <a:t>• 299 test games, scored once</a:t>
+            </a:r>
+          </a:p>
+          <a:p>
+            <a:pPr algn="l">
+              <a:spcAft>
+                <a:spcPts val="300"/>
+              </a:spcAft>
+            </a:pPr>
+            <a:r>
+              <a:rPr sz="1100" b="0">
+                <a:solidFill>
+                  <a:srgbClr val="233247"/>
+                </a:solidFill>
+                <a:latin typeface="Arial"/>
+              </a:rPr>
+              <a:t>• A rule counts if 10 or more test games match</a:t>
+            </a:r>
+          </a:p>
+        </p:txBody>
+      </p:sp>
+      <p:sp xmlns:a="http://schemas.openxmlformats.org/drawingml/2006/main">
+        <p:nvSpPr>
+          <p:cNvPr id="23" name="Rectangle 22"/>
+          <p:cNvSpPr/>
+          <p:nvPr/>
+        </p:nvSpPr>
+        <p:spPr>
+          <a:xfrm>
+            <a:off x="9047988" y="4087368"/>
+            <a:ext cx="2537460" cy="502920"/>
+          </a:xfrm>
+          <a:prstGeom prst="rect">
+            <a:avLst/>
+          </a:prstGeom>
+          <a:solidFill>
+            <a:srgbClr val="EEF2F7"/>
+          </a:solidFill>
+          <a:ln w="9525">
+            <a:solidFill>
+              <a:srgbClr val="C9D6E2"/>
+            </a:solidFill>
+          </a:ln>
+          <a:effectLst/>
+        </p:spPr>
+        <p:style>
+          <a:lnRef idx="1">
+            <a:schemeClr val="accent1"/>
+          </a:lnRef>
+          <a:fillRef idx="3">
+            <a:schemeClr val="accent1"/>
+          </a:fillRef>
+          <a:effectRef idx="2">
+            <a:schemeClr val="accent1"/>
+          </a:effectRef>
+          <a:fontRef idx="minor">
+            <a:schemeClr val="lt1"/>
+          </a:fontRef>
+        </p:style>
+        <p:txBody>
+          <a:bodyPr rtlCol="0" anchor="ctr" wrap="square" tIns="36576" bIns="36576"/>
+          <a:lstStyle/>
+          <a:p>
+            <a:pPr algn="l"/>
+            <a:r>
+              <a:rPr sz="1000" b="1">
+                <a:solidFill>
+                  <a:srgbClr val="66758A"/>
+                </a:solidFill>
+                <a:latin typeface="Arial"/>
+              </a:rPr>
+              <a:t>OUTPUT  </a:t>
+            </a:r>
+            <a:r>
+              <a:rPr sz="1000" b="1">
+                <a:solidFill>
+                  <a:srgbClr val="142D4E"/>
+                </a:solidFill>
+                <a:latin typeface="Arial"/>
+              </a:rPr>
+              <a:t>68% of 66 hold</a:t>
+            </a:r>
+          </a:p>
+        </p:txBody>
+      </p:sp>
+      <p:sp xmlns:a="http://schemas.openxmlformats.org/drawingml/2006/main">
+        <p:nvSpPr>
+          <p:cNvPr id="24" name="Rectangle 23"/>
+          <p:cNvSpPr/>
+          <p:nvPr/>
+        </p:nvSpPr>
+        <p:spPr>
+          <a:xfrm>
+            <a:off x="612648" y="5916168"/>
+            <a:ext cx="10972800" cy="420624"/>
+          </a:xfrm>
+          <a:prstGeom prst="rect">
+            <a:avLst/>
+          </a:prstGeom>
+          <a:solidFill>
+            <a:srgbClr val="EEF2F7"/>
+          </a:solidFill>
+          <a:ln>
+            <a:noFill/>
+          </a:ln>
+          <a:effectLst/>
+        </p:spPr>
+        <p:style>
+          <a:lnRef idx="1">
+            <a:schemeClr val="accent1"/>
+          </a:lnRef>
+          <a:fillRef idx="3">
+            <a:schemeClr val="accent1"/>
+          </a:fillRef>
+          <a:effectRef idx="2">
+            <a:schemeClr val="accent1"/>
+          </a:effectRef>
+          <a:fontRef idx="minor">
+            <a:schemeClr val="lt1"/>
+          </a:fontRef>
+        </p:style>
+        <p:txBody>
+          <a:bodyPr rtlCol="0" anchor="ctr"/>
+          <a:lstStyle/>
+          <a:p>
+            <a:pPr algn="ctr"/>
+          </a:p>
+        </p:txBody>
+      </p:sp>
+      <p:sp xmlns:a="http://schemas.openxmlformats.org/drawingml/2006/main">
+        <p:nvSpPr>
+          <p:cNvPr id="25" name="Rectangle 24"/>
+          <p:cNvSpPr/>
+          <p:nvPr/>
+        </p:nvSpPr>
+        <p:spPr>
+          <a:xfrm>
+            <a:off x="612648" y="5916168"/>
+            <a:ext cx="64008" cy="420624"/>
+          </a:xfrm>
+          <a:prstGeom prst="rect">
+            <a:avLst/>
+          </a:prstGeom>
+          <a:solidFill>
+            <a:srgbClr val="C44E52"/>
+          </a:solidFill>
+          <a:ln>
+            <a:noFill/>
+          </a:ln>
+          <a:effectLst/>
+        </p:spPr>
+        <p:style>
+          <a:lnRef idx="1">
+            <a:schemeClr val="accent1"/>
+          </a:lnRef>
+          <a:fillRef idx="3">
+            <a:schemeClr val="accent1"/>
+          </a:fillRef>
+          <a:effectRef idx="2">
+            <a:schemeClr val="accent1"/>
+          </a:effectRef>
+          <a:fontRef idx="minor">
+            <a:schemeClr val="lt1"/>
+          </a:fontRef>
+        </p:style>
+        <p:txBody>
+          <a:bodyPr rtlCol="0" anchor="ctr"/>
+          <a:lstStyle/>
+          <a:p>
+            <a:pPr algn="ctr"/>
+          </a:p>
+        </p:txBody>
+      </p:sp>
+      <p:sp xmlns:a="http://schemas.openxmlformats.org/drawingml/2006/main">
+        <p:nvSpPr>
+          <p:cNvPr id="26" name="Rectangle 25"/>
+          <p:cNvSpPr/>
+          <p:nvPr/>
+        </p:nvSpPr>
+        <p:spPr>
+          <a:xfrm>
+            <a:off x="676656" y="5916168"/>
+            <a:ext cx="10908792" cy="420624"/>
+          </a:xfrm>
+          <a:prstGeom prst="rect">
+            <a:avLst/>
+          </a:prstGeom>
+          <a:solidFill>
+            <a:srgbClr val="EEF2F7"/>
+          </a:solidFill>
+          <a:ln>
+            <a:noFill/>
+          </a:ln>
+          <a:effectLst/>
+        </p:spPr>
+        <p:style>
+          <a:lnRef idx="1">
+            <a:schemeClr val="accent1"/>
+          </a:lnRef>
+          <a:fillRef idx="3">
+            <a:schemeClr val="accent1"/>
+          </a:fillRef>
+          <a:effectRef idx="2">
+            <a:schemeClr val="accent1"/>
+          </a:effectRef>
+          <a:fontRef idx="minor">
+            <a:schemeClr val="lt1"/>
+          </a:fontRef>
+        </p:style>
+        <p:txBody>
+          <a:bodyPr rtlCol="0" anchor="ctr" wrap="square" tIns="36576" bIns="36576"/>
+          <a:lstStyle/>
+          <a:p>
+            <a:pPr algn="l"/>
+            <a:r>
+              <a:rPr sz="1200" b="1">
+                <a:solidFill>
+                  <a:srgbClr val="C44E52"/>
+                </a:solidFill>
+                <a:latin typeface="Arial"/>
+              </a:rPr>
+              <a:t>Takeaway   </a:t>
+            </a:r>
+            <a:r>
+              <a:rPr sz="1200" b="0">
+                <a:solidFill>
+                  <a:srgbClr val="233247"/>
+                </a:solidFill>
+                <a:latin typeface="Arial"/>
+              </a:rPr>
+              <a:t>Rules are mined on training games only, corrected for multiple testing, then checked once on held-out games.</a:t>
             </a:r>
           </a:p>
         </p:txBody>
@@ -8363,8 +10569,8 @@
         </p:nvSpPr>
         <p:spPr>
           <a:xfrm xmlns:a="http://schemas.openxmlformats.org/drawingml/2006/main">
-            <a:off x="685800" y="4389120"/>
-            <a:ext cx="10572750" cy="731520"/>
+            <a:off x="685800" y="4434840"/>
+            <a:ext cx="6035040" cy="640080"/>
           </a:xfrm>
           <a:prstGeom xmlns:a="http://schemas.openxmlformats.org/drawingml/2006/main" prst="rect">
             <a:avLst/>
@@ -8401,7 +10607,7 @@
               </a:defRPr>
             </a:pPr>
             <a:r>
-              <a:rPr sz="1200" b="1">
+              <a:rPr sz="1100" b="1">
                 <a:solidFill>
                   <a:srgbClr val="233247"/>
                 </a:solidFill>
@@ -8412,7 +10618,7 @@
               <a:t>Evaluation data: </a:t>
             </a:r>
             <a:r>
-              <a:rPr sz="1200" b="0">
+              <a:rPr sz="1100" b="0">
                 <a:solidFill>
                   <a:srgbClr val="233247"/>
                 </a:solidFill>
@@ -8441,8 +10647,8 @@
         </p:nvSpPr>
         <p:spPr>
           <a:xfrm xmlns:a="http://schemas.openxmlformats.org/drawingml/2006/main">
-            <a:off x="685800" y="5074920"/>
-            <a:ext cx="10572750" cy="1188720"/>
+            <a:off x="685800" y="5029200"/>
+            <a:ext cx="6035040" cy="868680"/>
           </a:xfrm>
           <a:prstGeom xmlns:a="http://schemas.openxmlformats.org/drawingml/2006/main" prst="rect">
             <a:avLst/>
@@ -8479,7 +10685,7 @@
               </a:defRPr>
             </a:pPr>
             <a:r>
-              <a:rPr sz="1200" b="1">
+              <a:rPr sz="1100" b="1">
                 <a:solidFill>
                   <a:srgbClr val="233247"/>
                 </a:solidFill>
@@ -8490,7 +10696,7 @@
               <a:t>Interpretation: </a:t>
             </a:r>
             <a:r>
-              <a:rPr sz="1200" b="0">
+              <a:rPr sz="1100" b="0">
                 <a:solidFill>
                   <a:srgbClr val="233247"/>
                 </a:solidFill>
@@ -8499,6 +10705,174 @@
                 <a:cs typeface="Arial"/>
               </a:rPr>
               <a:t>FP-Growth and Apriori return the same 95 rules. Lower support finds more rules with higher lift that hold less often on test games; keeping after-play tags adds circular rules. No configuration finds a Struggling rule. Supports are small (30 to 60 games): hypotheses, not recipes.</a:t>
+            </a:r>
+          </a:p>
+        </p:txBody>
+      </p:sp>
+      <p:graphicFrame xmlns:a="http://schemas.openxmlformats.org/drawingml/2006/main">
+        <p:nvGraphicFramePr>
+          <p:cNvPr id="8" name="Chart 7"/>
+          <p:cNvGraphicFramePr>
+            <a:graphicFrameLocks noGrp="1"/>
+          </p:cNvGraphicFramePr>
+          <p:nvPr/>
+        </p:nvGraphicFramePr>
+        <p:xfrm>
+          <a:off x="6766560" y="4343400"/>
+          <a:ext cx="4846320" cy="1554480"/>
+        </p:xfrm>
+        <a:graphic>
+          <a:graphicData uri="http://schemas.openxmlformats.org/drawingml/2006/chart">
+            <c:chart xmlns:c="http://schemas.openxmlformats.org/drawingml/2006/chart" xmlns:r="http://schemas.openxmlformats.org/officeDocument/2006/relationships" r:id="rId3"/>
+          </a:graphicData>
+        </a:graphic>
+      </p:graphicFrame>
+      <p:sp xmlns:a="http://schemas.openxmlformats.org/drawingml/2006/main">
+        <p:nvSpPr>
+          <p:cNvPr id="9" name="Rectangle 8"/>
+          <p:cNvSpPr/>
+          <p:nvPr/>
+        </p:nvSpPr>
+        <p:spPr>
+          <a:xfrm>
+            <a:off x="612648" y="5943600"/>
+            <a:ext cx="10972800" cy="420624"/>
+          </a:xfrm>
+          <a:prstGeom prst="rect">
+            <a:avLst/>
+          </a:prstGeom>
+          <a:solidFill>
+            <a:srgbClr val="EEF2F7"/>
+          </a:solidFill>
+          <a:ln>
+            <a:noFill/>
+          </a:ln>
+          <a:effectLst/>
+        </p:spPr>
+        <p:style>
+          <a:lnRef idx="1">
+            <a:schemeClr val="accent1"/>
+          </a:lnRef>
+          <a:fillRef idx="3">
+            <a:schemeClr val="accent1"/>
+          </a:fillRef>
+          <a:effectRef idx="2">
+            <a:schemeClr val="accent1"/>
+          </a:effectRef>
+          <a:fontRef idx="minor">
+            <a:schemeClr val="lt1"/>
+          </a:fontRef>
+        </p:style>
+        <p:txBody>
+          <a:bodyPr rtlCol="0" anchor="ctr"/>
+          <a:lstStyle/>
+          <a:p>
+            <a:pPr algn="ctr"/>
+          </a:p>
+        </p:txBody>
+      </p:sp>
+      <p:sp xmlns:a="http://schemas.openxmlformats.org/drawingml/2006/main">
+        <p:nvSpPr>
+          <p:cNvPr id="10" name="Rectangle 9"/>
+          <p:cNvSpPr/>
+          <p:nvPr/>
+        </p:nvSpPr>
+        <p:spPr>
+          <a:xfrm>
+            <a:off x="612648" y="5943600"/>
+            <a:ext cx="64008" cy="420624"/>
+          </a:xfrm>
+          <a:prstGeom prst="rect">
+            <a:avLst/>
+          </a:prstGeom>
+          <a:solidFill>
+            <a:srgbClr val="C44E52"/>
+          </a:solidFill>
+          <a:ln>
+            <a:noFill/>
+          </a:ln>
+          <a:effectLst/>
+        </p:spPr>
+        <p:style>
+          <a:lnRef idx="1">
+            <a:schemeClr val="accent1"/>
+          </a:lnRef>
+          <a:fillRef idx="3">
+            <a:schemeClr val="accent1"/>
+          </a:fillRef>
+          <a:effectRef idx="2">
+            <a:schemeClr val="accent1"/>
+          </a:effectRef>
+          <a:fontRef idx="minor">
+            <a:schemeClr val="lt1"/>
+          </a:fontRef>
+        </p:style>
+        <p:txBody>
+          <a:bodyPr rtlCol="0" anchor="ctr"/>
+          <a:lstStyle/>
+          <a:p>
+            <a:pPr algn="ctr"/>
+          </a:p>
+        </p:txBody>
+      </p:sp>
+      <p:sp xmlns:a="http://schemas.openxmlformats.org/drawingml/2006/main">
+        <p:nvSpPr>
+          <p:cNvPr id="11" name="Rectangle 10"/>
+          <p:cNvSpPr/>
+          <p:nvPr/>
+        </p:nvSpPr>
+        <p:spPr>
+          <a:xfrm>
+            <a:off x="676656" y="5943600"/>
+            <a:ext cx="10908792" cy="420624"/>
+          </a:xfrm>
+          <a:prstGeom prst="rect">
+            <a:avLst/>
+          </a:prstGeom>
+          <a:solidFill>
+            <a:srgbClr val="EEF2F7"/>
+          </a:solidFill>
+          <a:ln>
+            <a:noFill/>
+          </a:ln>
+          <a:effectLst/>
+        </p:spPr>
+        <p:style>
+          <a:lnRef idx="1">
+            <a:schemeClr val="accent1"/>
+          </a:lnRef>
+          <a:fillRef idx="3">
+            <a:schemeClr val="accent1"/>
+          </a:fillRef>
+          <a:effectRef idx="2">
+            <a:schemeClr val="accent1"/>
+          </a:effectRef>
+          <a:fontRef idx="minor">
+            <a:schemeClr val="lt1"/>
+          </a:fontRef>
+        </p:style>
+        <p:txBody>
+          <a:bodyPr rtlCol="0" anchor="ctr" wrap="square" tIns="36576" bIns="36576"/>
+          <a:lstStyle/>
+          <a:p>
+            <a:pPr algn="l"/>
+            <a:r>
+              <a:rPr sz="1200" b="1">
+                <a:solidFill>
+                  <a:srgbClr val="C44E52"/>
+                </a:solidFill>
+                <a:latin typeface="Arial"/>
+              </a:rPr>
+              <a:t>Takeaway   </a:t>
+            </a:r>
+            <a:r>
+              <a:rPr sz="1200" b="0">
+                <a:solidFill>
+                  <a:srgbClr val="233247"/>
+                </a:solidFill>
+                <a:latin typeface="Arial"/>
+              </a:rPr>
+              <a:t>Rules hold on unseen games about two-thirds of the time, so they are hypotheses to test, not recipes.</a:t>
             </a:r>
           </a:p>
         </p:txBody>
@@ -9244,80 +11618,152 @@
           </a:graphicData>
         </a:graphic>
       </p:graphicFrame>
-      <p:sp>
+      <p:sp xmlns:a="http://schemas.openxmlformats.org/drawingml/2006/main">
         <p:nvSpPr>
-          <p:cNvPr id="5" name="">
-            <a:extLst xmlns:a="http://schemas.openxmlformats.org/drawingml/2006/main">
-              <a:ext uri="{FF2B5EF4-FFF2-40B4-BE49-F238E27FC236}">
-                <a16:creationId xmlns:a16="http://schemas.microsoft.com/office/drawing/2014/main" id="{7427B3EC-740C-4640-BB6D-A6F13A67A394}"/>
-              </a:ext>
-            </a:extLst>
-          </p:cNvPr>
-          <p:cNvSpPr>
-            <a:spLocks xmlns:a="http://schemas.openxmlformats.org/drawingml/2006/main" noGrp="1"/>
-          </p:cNvSpPr>
+          <p:cNvPr id="7" name="Rectangle 6"/>
+          <p:cNvSpPr/>
           <p:nvPr/>
         </p:nvSpPr>
         <p:spPr>
-          <a:xfrm xmlns:a="http://schemas.openxmlformats.org/drawingml/2006/main">
-            <a:off x="685800" y="5532120"/>
-            <a:ext cx="10572750" cy="640080"/>
+          <a:xfrm>
+            <a:off x="612648" y="5669280"/>
+            <a:ext cx="10972800" cy="420624"/>
           </a:xfrm>
-          <a:prstGeom xmlns:a="http://schemas.openxmlformats.org/drawingml/2006/main" prst="rect">
+          <a:prstGeom prst="rect">
             <a:avLst/>
           </a:prstGeom>
-          <a:noFill xmlns:a="http://schemas.openxmlformats.org/drawingml/2006/main"/>
-          <a:ln xmlns:a="http://schemas.openxmlformats.org/drawingml/2006/main" w="0">
+          <a:solidFill>
+            <a:srgbClr val="EEF2F7"/>
+          </a:solidFill>
+          <a:ln>
             <a:noFill/>
-            <a:prstDash val="solid"/>
           </a:ln>
+          <a:effectLst/>
         </p:spPr>
+        <p:style>
+          <a:lnRef idx="1">
+            <a:schemeClr val="accent1"/>
+          </a:lnRef>
+          <a:fillRef idx="3">
+            <a:schemeClr val="accent1"/>
+          </a:fillRef>
+          <a:effectRef idx="2">
+            <a:schemeClr val="accent1"/>
+          </a:effectRef>
+          <a:fontRef idx="minor">
+            <a:schemeClr val="lt1"/>
+          </a:fontRef>
+        </p:style>
         <p:txBody>
-          <a:bodyPr xmlns:a="http://schemas.openxmlformats.org/drawingml/2006/main" wrap="square"/>
-          <a:lstStyle xmlns:a="http://schemas.openxmlformats.org/drawingml/2006/main">
-            <a:defPPr>
-              <a:defRPr sz="1950" b="0">
+          <a:bodyPr rtlCol="0" anchor="ctr"/>
+          <a:lstStyle/>
+          <a:p>
+            <a:pPr algn="ctr"/>
+          </a:p>
+        </p:txBody>
+      </p:sp>
+      <p:sp xmlns:a="http://schemas.openxmlformats.org/drawingml/2006/main">
+        <p:nvSpPr>
+          <p:cNvPr id="8" name="Rectangle 7"/>
+          <p:cNvSpPr/>
+          <p:nvPr/>
+        </p:nvSpPr>
+        <p:spPr>
+          <a:xfrm>
+            <a:off x="612648" y="5669280"/>
+            <a:ext cx="64008" cy="420624"/>
+          </a:xfrm>
+          <a:prstGeom prst="rect">
+            <a:avLst/>
+          </a:prstGeom>
+          <a:solidFill>
+            <a:srgbClr val="C44E52"/>
+          </a:solidFill>
+          <a:ln>
+            <a:noFill/>
+          </a:ln>
+          <a:effectLst/>
+        </p:spPr>
+        <p:style>
+          <a:lnRef idx="1">
+            <a:schemeClr val="accent1"/>
+          </a:lnRef>
+          <a:fillRef idx="3">
+            <a:schemeClr val="accent1"/>
+          </a:fillRef>
+          <a:effectRef idx="2">
+            <a:schemeClr val="accent1"/>
+          </a:effectRef>
+          <a:fontRef idx="minor">
+            <a:schemeClr val="lt1"/>
+          </a:fontRef>
+        </p:style>
+        <p:txBody>
+          <a:bodyPr rtlCol="0" anchor="ctr"/>
+          <a:lstStyle/>
+          <a:p>
+            <a:pPr algn="ctr"/>
+          </a:p>
+        </p:txBody>
+      </p:sp>
+      <p:sp xmlns:a="http://schemas.openxmlformats.org/drawingml/2006/main">
+        <p:nvSpPr>
+          <p:cNvPr id="9" name="Rectangle 8"/>
+          <p:cNvSpPr/>
+          <p:nvPr/>
+        </p:nvSpPr>
+        <p:spPr>
+          <a:xfrm>
+            <a:off x="676656" y="5669280"/>
+            <a:ext cx="10908792" cy="420624"/>
+          </a:xfrm>
+          <a:prstGeom prst="rect">
+            <a:avLst/>
+          </a:prstGeom>
+          <a:solidFill>
+            <a:srgbClr val="EEF2F7"/>
+          </a:solidFill>
+          <a:ln>
+            <a:noFill/>
+          </a:ln>
+          <a:effectLst/>
+        </p:spPr>
+        <p:style>
+          <a:lnRef idx="1">
+            <a:schemeClr val="accent1"/>
+          </a:lnRef>
+          <a:fillRef idx="3">
+            <a:schemeClr val="accent1"/>
+          </a:fillRef>
+          <a:effectRef idx="2">
+            <a:schemeClr val="accent1"/>
+          </a:effectRef>
+          <a:fontRef idx="minor">
+            <a:schemeClr val="lt1"/>
+          </a:fontRef>
+        </p:style>
+        <p:txBody>
+          <a:bodyPr rtlCol="0" anchor="ctr" wrap="square" tIns="36576" bIns="36576"/>
+          <a:lstStyle/>
+          <a:p>
+            <a:pPr algn="l"/>
+            <a:r>
+              <a:rPr sz="1200" b="1">
+                <a:solidFill>
+                  <a:srgbClr val="C44E52"/>
+                </a:solidFill>
+                <a:latin typeface="Arial"/>
+              </a:rPr>
+              <a:t>Takeaway   </a:t>
+            </a:r>
+            <a:r>
+              <a:rPr sz="1200" b="0">
                 <a:solidFill>
                   <a:srgbClr val="233247"/>
                 </a:solidFill>
                 <a:latin typeface="Arial"/>
-                <a:ea typeface="Arial"/>
-                <a:cs typeface="Arial"/>
-              </a:defRPr>
-            </a:defPPr>
-          </a:lstStyle>
-          <a:p xmlns:a="http://schemas.openxmlformats.org/drawingml/2006/main">
-            <a:pPr>
-              <a:defRPr sz="1950" b="0">
-                <a:solidFill>
-                  <a:srgbClr val="233247"/>
-                </a:solidFill>
-                <a:latin typeface="Arial"/>
-                <a:ea typeface="Arial"/>
-                <a:cs typeface="Arial"/>
-              </a:defRPr>
-            </a:pPr>
-            <a:r>
-              <a:rPr sz="1400" b="1">
-                <a:solidFill>
-                  <a:srgbClr val="233247"/>
-                </a:solidFill>
-                <a:latin typeface="Arial"/>
-                <a:ea typeface="Arial"/>
-                <a:cs typeface="Arial"/>
               </a:rPr>
-              <a:t>Business objective addressed: </a:t>
-            </a:r>
-            <a:r>
-              <a:rPr sz="1400" b="0">
-                <a:solidFill>
-                  <a:srgbClr val="233247"/>
-                </a:solidFill>
-                <a:latin typeface="Arial"/>
-                <a:ea typeface="Arial"/>
-                <a:cs typeface="Arial"/>
-              </a:rPr>
-              <a:t>evidence for what to fix before the refund window closes, which combinations and price to back, and when to patch.</a:t>
+              <a:t>Business objective addressed: evidence for what to fix before the refund window closes, which combinations and price to back, and when to patch.</a:t>
             </a:r>
           </a:p>
         </p:txBody>
@@ -12620,8 +15066,8 @@
         </p:nvSpPr>
         <p:spPr>
           <a:xfrm xmlns:a="http://schemas.openxmlformats.org/drawingml/2006/main">
-            <a:off x="685800" y="5120640"/>
-            <a:ext cx="10572750" cy="731520"/>
+            <a:off x="685800" y="5257800"/>
+            <a:ext cx="10572750" cy="594360"/>
           </a:xfrm>
           <a:prstGeom xmlns:a="http://schemas.openxmlformats.org/drawingml/2006/main" prst="rect">
             <a:avLst/>
@@ -12678,6 +15124,156 @@
                 <a:cs typeface="Arial"/>
               </a:rPr>
               <a:t>Units 1 to 3, evaluation, report and dashboard are implemented and integrated; the dashboard is deployed at indieguard.streamlit.app.</a:t>
+            </a:r>
+          </a:p>
+        </p:txBody>
+      </p:sp>
+      <p:sp xmlns:a="http://schemas.openxmlformats.org/drawingml/2006/main">
+        <p:nvSpPr>
+          <p:cNvPr id="7" name="Rectangle 6"/>
+          <p:cNvSpPr/>
+          <p:nvPr/>
+        </p:nvSpPr>
+        <p:spPr>
+          <a:xfrm>
+            <a:off x="612648" y="5916168"/>
+            <a:ext cx="10972800" cy="420624"/>
+          </a:xfrm>
+          <a:prstGeom prst="rect">
+            <a:avLst/>
+          </a:prstGeom>
+          <a:solidFill>
+            <a:srgbClr val="EEF2F7"/>
+          </a:solidFill>
+          <a:ln>
+            <a:noFill/>
+          </a:ln>
+          <a:effectLst/>
+        </p:spPr>
+        <p:style>
+          <a:lnRef idx="1">
+            <a:schemeClr val="accent1"/>
+          </a:lnRef>
+          <a:fillRef idx="3">
+            <a:schemeClr val="accent1"/>
+          </a:fillRef>
+          <a:effectRef idx="2">
+            <a:schemeClr val="accent1"/>
+          </a:effectRef>
+          <a:fontRef idx="minor">
+            <a:schemeClr val="lt1"/>
+          </a:fontRef>
+        </p:style>
+        <p:txBody>
+          <a:bodyPr rtlCol="0" anchor="ctr"/>
+          <a:lstStyle/>
+          <a:p>
+            <a:pPr algn="ctr"/>
+          </a:p>
+        </p:txBody>
+      </p:sp>
+      <p:sp xmlns:a="http://schemas.openxmlformats.org/drawingml/2006/main">
+        <p:nvSpPr>
+          <p:cNvPr id="8" name="Rectangle 7"/>
+          <p:cNvSpPr/>
+          <p:nvPr/>
+        </p:nvSpPr>
+        <p:spPr>
+          <a:xfrm>
+            <a:off x="612648" y="5916168"/>
+            <a:ext cx="64008" cy="420624"/>
+          </a:xfrm>
+          <a:prstGeom prst="rect">
+            <a:avLst/>
+          </a:prstGeom>
+          <a:solidFill>
+            <a:srgbClr val="C44E52"/>
+          </a:solidFill>
+          <a:ln>
+            <a:noFill/>
+          </a:ln>
+          <a:effectLst/>
+        </p:spPr>
+        <p:style>
+          <a:lnRef idx="1">
+            <a:schemeClr val="accent1"/>
+          </a:lnRef>
+          <a:fillRef idx="3">
+            <a:schemeClr val="accent1"/>
+          </a:fillRef>
+          <a:effectRef idx="2">
+            <a:schemeClr val="accent1"/>
+          </a:effectRef>
+          <a:fontRef idx="minor">
+            <a:schemeClr val="lt1"/>
+          </a:fontRef>
+        </p:style>
+        <p:txBody>
+          <a:bodyPr rtlCol="0" anchor="ctr"/>
+          <a:lstStyle/>
+          <a:p>
+            <a:pPr algn="ctr"/>
+          </a:p>
+        </p:txBody>
+      </p:sp>
+      <p:sp xmlns:a="http://schemas.openxmlformats.org/drawingml/2006/main">
+        <p:nvSpPr>
+          <p:cNvPr id="9" name="Rectangle 8"/>
+          <p:cNvSpPr/>
+          <p:nvPr/>
+        </p:nvSpPr>
+        <p:spPr>
+          <a:xfrm>
+            <a:off x="676656" y="5916168"/>
+            <a:ext cx="10908792" cy="420624"/>
+          </a:xfrm>
+          <a:prstGeom prst="rect">
+            <a:avLst/>
+          </a:prstGeom>
+          <a:solidFill>
+            <a:srgbClr val="EEF2F7"/>
+          </a:solidFill>
+          <a:ln>
+            <a:noFill/>
+          </a:ln>
+          <a:effectLst/>
+        </p:spPr>
+        <p:style>
+          <a:lnRef idx="1">
+            <a:schemeClr val="accent1"/>
+          </a:lnRef>
+          <a:fillRef idx="3">
+            <a:schemeClr val="accent1"/>
+          </a:fillRef>
+          <a:effectRef idx="2">
+            <a:schemeClr val="accent1"/>
+          </a:effectRef>
+          <a:fontRef idx="minor">
+            <a:schemeClr val="lt1"/>
+          </a:fontRef>
+        </p:style>
+        <p:txBody>
+          <a:bodyPr rtlCol="0" anchor="ctr" wrap="square" tIns="36576" bIns="36576"/>
+          <a:lstStyle/>
+          <a:p>
+            <a:pPr algn="l"/>
+            <a:r>
+              <a:rPr sz="1200" b="1">
+                <a:solidFill>
+                  <a:srgbClr val="C44E52"/>
+                </a:solidFill>
+                <a:latin typeface="Arial"/>
+              </a:rPr>
+              <a:t>Takeaway   </a:t>
+            </a:r>
+            <a:r>
+              <a:rPr sz="1200" b="0">
+                <a:solidFill>
+                  <a:srgbClr val="233247"/>
+                </a:solidFill>
+                <a:latin typeface="Arial"/>
+              </a:rPr>
+              <a:t>Every unit is implemented end to end and linked: one dataset, one split by game, one dashboard.</a:t>
             </a:r>
           </a:p>
         </p:txBody>
@@ -13163,7 +15759,7 @@
         <p:spPr>
           <a:xfrm xmlns:a="http://schemas.openxmlformats.org/drawingml/2006/main">
             <a:off x="685800" y="4617720"/>
-            <a:ext cx="10668000" cy="1188720"/>
+            <a:ext cx="10668000" cy="1097280"/>
           </a:xfrm>
           <a:prstGeom xmlns:a="http://schemas.openxmlformats.org/drawingml/2006/main" prst="rect">
             <a:avLst/>
@@ -13220,6 +15816,156 @@
                 <a:cs typeface="Arial"/>
               </a:rPr>
               <a:t>Unit 2: 1,573,436 reviews with features and 1,490 games with a success tier. Unit 3: 557,202 English reviews (text); 1,490 games with 137 tag, price and Early Access items (rules); 29,918 events (patch impact).</a:t>
+            </a:r>
+          </a:p>
+        </p:txBody>
+      </p:sp>
+      <p:sp xmlns:a="http://schemas.openxmlformats.org/drawingml/2006/main">
+        <p:nvSpPr>
+          <p:cNvPr id="9" name="Rectangle 8"/>
+          <p:cNvSpPr/>
+          <p:nvPr/>
+        </p:nvSpPr>
+        <p:spPr>
+          <a:xfrm>
+            <a:off x="612648" y="5916168"/>
+            <a:ext cx="10972800" cy="420624"/>
+          </a:xfrm>
+          <a:prstGeom prst="rect">
+            <a:avLst/>
+          </a:prstGeom>
+          <a:solidFill>
+            <a:srgbClr val="EEF2F7"/>
+          </a:solidFill>
+          <a:ln>
+            <a:noFill/>
+          </a:ln>
+          <a:effectLst/>
+        </p:spPr>
+        <p:style>
+          <a:lnRef idx="1">
+            <a:schemeClr val="accent1"/>
+          </a:lnRef>
+          <a:fillRef idx="3">
+            <a:schemeClr val="accent1"/>
+          </a:fillRef>
+          <a:effectRef idx="2">
+            <a:schemeClr val="accent1"/>
+          </a:effectRef>
+          <a:fontRef idx="minor">
+            <a:schemeClr val="lt1"/>
+          </a:fontRef>
+        </p:style>
+        <p:txBody>
+          <a:bodyPr rtlCol="0" anchor="ctr"/>
+          <a:lstStyle/>
+          <a:p>
+            <a:pPr algn="ctr"/>
+          </a:p>
+        </p:txBody>
+      </p:sp>
+      <p:sp xmlns:a="http://schemas.openxmlformats.org/drawingml/2006/main">
+        <p:nvSpPr>
+          <p:cNvPr id="10" name="Rectangle 9"/>
+          <p:cNvSpPr/>
+          <p:nvPr/>
+        </p:nvSpPr>
+        <p:spPr>
+          <a:xfrm>
+            <a:off x="612648" y="5916168"/>
+            <a:ext cx="64008" cy="420624"/>
+          </a:xfrm>
+          <a:prstGeom prst="rect">
+            <a:avLst/>
+          </a:prstGeom>
+          <a:solidFill>
+            <a:srgbClr val="C44E52"/>
+          </a:solidFill>
+          <a:ln>
+            <a:noFill/>
+          </a:ln>
+          <a:effectLst/>
+        </p:spPr>
+        <p:style>
+          <a:lnRef idx="1">
+            <a:schemeClr val="accent1"/>
+          </a:lnRef>
+          <a:fillRef idx="3">
+            <a:schemeClr val="accent1"/>
+          </a:fillRef>
+          <a:effectRef idx="2">
+            <a:schemeClr val="accent1"/>
+          </a:effectRef>
+          <a:fontRef idx="minor">
+            <a:schemeClr val="lt1"/>
+          </a:fontRef>
+        </p:style>
+        <p:txBody>
+          <a:bodyPr rtlCol="0" anchor="ctr"/>
+          <a:lstStyle/>
+          <a:p>
+            <a:pPr algn="ctr"/>
+          </a:p>
+        </p:txBody>
+      </p:sp>
+      <p:sp xmlns:a="http://schemas.openxmlformats.org/drawingml/2006/main">
+        <p:nvSpPr>
+          <p:cNvPr id="11" name="Rectangle 10"/>
+          <p:cNvSpPr/>
+          <p:nvPr/>
+        </p:nvSpPr>
+        <p:spPr>
+          <a:xfrm>
+            <a:off x="676656" y="5916168"/>
+            <a:ext cx="10908792" cy="420624"/>
+          </a:xfrm>
+          <a:prstGeom prst="rect">
+            <a:avLst/>
+          </a:prstGeom>
+          <a:solidFill>
+            <a:srgbClr val="EEF2F7"/>
+          </a:solidFill>
+          <a:ln>
+            <a:noFill/>
+          </a:ln>
+          <a:effectLst/>
+        </p:spPr>
+        <p:style>
+          <a:lnRef idx="1">
+            <a:schemeClr val="accent1"/>
+          </a:lnRef>
+          <a:fillRef idx="3">
+            <a:schemeClr val="accent1"/>
+          </a:fillRef>
+          <a:effectRef idx="2">
+            <a:schemeClr val="accent1"/>
+          </a:effectRef>
+          <a:fontRef idx="minor">
+            <a:schemeClr val="lt1"/>
+          </a:fontRef>
+        </p:style>
+        <p:txBody>
+          <a:bodyPr rtlCol="0" anchor="ctr" wrap="square" tIns="36576" bIns="36576"/>
+          <a:lstStyle/>
+          <a:p>
+            <a:pPr algn="l"/>
+            <a:r>
+              <a:rPr sz="1200" b="1">
+                <a:solidFill>
+                  <a:srgbClr val="C44E52"/>
+                </a:solidFill>
+                <a:latin typeface="Arial"/>
+              </a:rPr>
+              <a:t>Takeaway   </a:t>
+            </a:r>
+            <a:r>
+              <a:rPr sz="1200" b="0">
+                <a:solidFill>
+                  <a:srgbClr val="233247"/>
+                </a:solidFill>
+                <a:latin typeface="Arial"/>
+              </a:rPr>
+              <a:t>Our own, documented, frozen dataset: 1,861 games and 1.65M reviews, ready for all three units.</a:t>
             </a:r>
           </a:p>
         </p:txBody>
@@ -14132,8 +16878,8 @@
         </p:nvSpPr>
         <p:spPr>
           <a:xfrm xmlns:a="http://schemas.openxmlformats.org/drawingml/2006/main">
-            <a:off x="685800" y="5486400"/>
-            <a:ext cx="10477500" cy="502920"/>
+            <a:off x="685800" y="5440680"/>
+            <a:ext cx="10477500" cy="457200"/>
           </a:xfrm>
           <a:prstGeom xmlns:a="http://schemas.openxmlformats.org/drawingml/2006/main" prst="rect">
             <a:avLst/>
@@ -14190,73 +16936,6 @@
                 <a:cs typeface="Arial"/>
               </a:rPr>
               <a:t>voted_up (target: negative review), playtime at review (hours), language, review text; per game: price (USD), launch year, DLC, achievements, tags (text), review totals, success tier.</a:t>
-            </a:r>
-          </a:p>
-        </p:txBody>
-      </p:sp>
-      <p:sp>
-        <p:nvSpPr>
-          <p:cNvPr id="6" name="">
-            <a:extLst xmlns:a="http://schemas.openxmlformats.org/drawingml/2006/main">
-              <a:ext uri="{FF2B5EF4-FFF2-40B4-BE49-F238E27FC236}">
-                <a16:creationId xmlns:a16="http://schemas.microsoft.com/office/drawing/2014/main" id="{AF628CDC-22BC-40DC-8AC3-B989D8B9467C}"/>
-              </a:ext>
-            </a:extLst>
-          </p:cNvPr>
-          <p:cNvSpPr>
-            <a:spLocks xmlns:a="http://schemas.openxmlformats.org/drawingml/2006/main" noGrp="1"/>
-          </p:cNvSpPr>
-          <p:nvPr/>
-        </p:nvSpPr>
-        <p:spPr>
-          <a:xfrm xmlns:a="http://schemas.openxmlformats.org/drawingml/2006/main">
-            <a:off x="685800" y="5989320"/>
-            <a:ext cx="10477500" cy="476250"/>
-          </a:xfrm>
-          <a:prstGeom xmlns:a="http://schemas.openxmlformats.org/drawingml/2006/main" prst="rect">
-            <a:avLst/>
-          </a:prstGeom>
-          <a:noFill xmlns:a="http://schemas.openxmlformats.org/drawingml/2006/main"/>
-          <a:ln xmlns:a="http://schemas.openxmlformats.org/drawingml/2006/main" w="0">
-            <a:noFill/>
-            <a:prstDash val="solid"/>
-          </a:ln>
-        </p:spPr>
-        <p:txBody>
-          <a:bodyPr xmlns:a="http://schemas.openxmlformats.org/drawingml/2006/main"/>
-          <a:lstStyle xmlns:a="http://schemas.openxmlformats.org/drawingml/2006/main">
-            <a:defPPr>
-              <a:defRPr sz="1725" b="0">
-                <a:solidFill>
-                  <a:srgbClr val="233247"/>
-                </a:solidFill>
-                <a:latin typeface="Arial"/>
-                <a:ea typeface="Arial"/>
-                <a:cs typeface="Arial"/>
-              </a:defRPr>
-            </a:defPPr>
-          </a:lstStyle>
-          <a:p xmlns:a="http://schemas.openxmlformats.org/drawingml/2006/main">
-            <a:pPr>
-              <a:defRPr sz="1725" b="0">
-                <a:solidFill>
-                  <a:srgbClr val="233247"/>
-                </a:solidFill>
-                <a:latin typeface="Arial"/>
-                <a:ea typeface="Arial"/>
-                <a:cs typeface="Arial"/>
-              </a:defRPr>
-            </a:pPr>
-            <a:r>
-              <a:rPr sz="1300" b="0">
-                <a:solidFill>
-                  <a:srgbClr val="233247"/>
-                </a:solidFill>
-                <a:latin typeface="Arial"/>
-                <a:ea typeface="Arial"/>
-                <a:cs typeface="Arial"/>
-              </a:rPr>
-              <a:t>Linked data: reviews join games on appid; the success tier uses games with at least 20 reviews. Full samples: data/sample/.</a:t>
             </a:r>
           </a:p>
         </p:txBody>
@@ -14923,6 +17602,156 @@
           </a:graphicData>
         </a:graphic>
       </p:graphicFrame>
+      <p:sp xmlns:a="http://schemas.openxmlformats.org/drawingml/2006/main">
+        <p:nvSpPr>
+          <p:cNvPr id="901" name="Rectangle 900"/>
+          <p:cNvSpPr/>
+          <p:nvPr/>
+        </p:nvSpPr>
+        <p:spPr>
+          <a:xfrm>
+            <a:off x="612648" y="5989320"/>
+            <a:ext cx="10972800" cy="420624"/>
+          </a:xfrm>
+          <a:prstGeom prst="rect">
+            <a:avLst/>
+          </a:prstGeom>
+          <a:solidFill>
+            <a:srgbClr val="EEF2F7"/>
+          </a:solidFill>
+          <a:ln>
+            <a:noFill/>
+          </a:ln>
+          <a:effectLst/>
+        </p:spPr>
+        <p:style>
+          <a:lnRef idx="1">
+            <a:schemeClr val="accent1"/>
+          </a:lnRef>
+          <a:fillRef idx="3">
+            <a:schemeClr val="accent1"/>
+          </a:fillRef>
+          <a:effectRef idx="2">
+            <a:schemeClr val="accent1"/>
+          </a:effectRef>
+          <a:fontRef idx="minor">
+            <a:schemeClr val="lt1"/>
+          </a:fontRef>
+        </p:style>
+        <p:txBody>
+          <a:bodyPr rtlCol="0" anchor="ctr"/>
+          <a:lstStyle/>
+          <a:p>
+            <a:pPr algn="ctr"/>
+          </a:p>
+        </p:txBody>
+      </p:sp>
+      <p:sp xmlns:a="http://schemas.openxmlformats.org/drawingml/2006/main">
+        <p:nvSpPr>
+          <p:cNvPr id="902" name="Rectangle 901"/>
+          <p:cNvSpPr/>
+          <p:nvPr/>
+        </p:nvSpPr>
+        <p:spPr>
+          <a:xfrm>
+            <a:off x="612648" y="5989320"/>
+            <a:ext cx="64008" cy="420624"/>
+          </a:xfrm>
+          <a:prstGeom prst="rect">
+            <a:avLst/>
+          </a:prstGeom>
+          <a:solidFill>
+            <a:srgbClr val="C44E52"/>
+          </a:solidFill>
+          <a:ln>
+            <a:noFill/>
+          </a:ln>
+          <a:effectLst/>
+        </p:spPr>
+        <p:style>
+          <a:lnRef idx="1">
+            <a:schemeClr val="accent1"/>
+          </a:lnRef>
+          <a:fillRef idx="3">
+            <a:schemeClr val="accent1"/>
+          </a:fillRef>
+          <a:effectRef idx="2">
+            <a:schemeClr val="accent1"/>
+          </a:effectRef>
+          <a:fontRef idx="minor">
+            <a:schemeClr val="lt1"/>
+          </a:fontRef>
+        </p:style>
+        <p:txBody>
+          <a:bodyPr rtlCol="0" anchor="ctr"/>
+          <a:lstStyle/>
+          <a:p>
+            <a:pPr algn="ctr"/>
+          </a:p>
+        </p:txBody>
+      </p:sp>
+      <p:sp xmlns:a="http://schemas.openxmlformats.org/drawingml/2006/main">
+        <p:nvSpPr>
+          <p:cNvPr id="903" name="Rectangle 902"/>
+          <p:cNvSpPr/>
+          <p:nvPr/>
+        </p:nvSpPr>
+        <p:spPr>
+          <a:xfrm>
+            <a:off x="676656" y="5989320"/>
+            <a:ext cx="10908792" cy="420624"/>
+          </a:xfrm>
+          <a:prstGeom prst="rect">
+            <a:avLst/>
+          </a:prstGeom>
+          <a:solidFill>
+            <a:srgbClr val="EEF2F7"/>
+          </a:solidFill>
+          <a:ln>
+            <a:noFill/>
+          </a:ln>
+          <a:effectLst/>
+        </p:spPr>
+        <p:style>
+          <a:lnRef idx="1">
+            <a:schemeClr val="accent1"/>
+          </a:lnRef>
+          <a:fillRef idx="3">
+            <a:schemeClr val="accent1"/>
+          </a:fillRef>
+          <a:effectRef idx="2">
+            <a:schemeClr val="accent1"/>
+          </a:effectRef>
+          <a:fontRef idx="minor">
+            <a:schemeClr val="lt1"/>
+          </a:fontRef>
+        </p:style>
+        <p:txBody>
+          <a:bodyPr rtlCol="0" anchor="ctr" wrap="square" tIns="36576" bIns="36576"/>
+          <a:lstStyle/>
+          <a:p>
+            <a:pPr algn="l"/>
+            <a:r>
+              <a:rPr sz="1200" b="1">
+                <a:solidFill>
+                  <a:srgbClr val="C44E52"/>
+                </a:solidFill>
+                <a:latin typeface="Arial"/>
+              </a:rPr>
+              <a:t>Takeaway   </a:t>
+            </a:r>
+            <a:r>
+              <a:rPr sz="1200" b="0">
+                <a:solidFill>
+                  <a:srgbClr val="233247"/>
+                </a:solidFill>
+                <a:latin typeface="Arial"/>
+              </a:rPr>
+              <a:t>Reviews join games on appid; the success tier uses games with at least 20 reviews. Full samples: data/sample/.</a:t>
+            </a:r>
+          </a:p>
+        </p:txBody>
+      </p:sp>
     </p:spTree>
     <p:extLst>
       <p:ext uri="{BB962C8B-B14F-4D97-AF65-F5344CB8AC3E}">
@@ -15780,80 +18609,152 @@
           </a:graphicData>
         </a:graphic>
       </p:graphicFrame>
-      <p:sp>
+      <p:sp xmlns:a="http://schemas.openxmlformats.org/drawingml/2006/main">
         <p:nvSpPr>
-          <p:cNvPr id="5" name="">
-            <a:extLst xmlns:a="http://schemas.openxmlformats.org/drawingml/2006/main">
-              <a:ext uri="{FF2B5EF4-FFF2-40B4-BE49-F238E27FC236}">
-                <a16:creationId xmlns:a16="http://schemas.microsoft.com/office/drawing/2014/main" id="{DA3E419D-441D-4E1D-AEDE-31B45199FD91}"/>
-              </a:ext>
-            </a:extLst>
-          </p:cNvPr>
-          <p:cNvSpPr>
-            <a:spLocks xmlns:a="http://schemas.openxmlformats.org/drawingml/2006/main" noGrp="1"/>
-          </p:cNvSpPr>
+          <p:cNvPr id="7" name="Rectangle 6"/>
+          <p:cNvSpPr/>
           <p:nvPr/>
         </p:nvSpPr>
         <p:spPr>
-          <a:xfrm xmlns:a="http://schemas.openxmlformats.org/drawingml/2006/main">
-            <a:off x="685800" y="5669280"/>
-            <a:ext cx="10572750" cy="548640"/>
+          <a:xfrm>
+            <a:off x="612648" y="5852160"/>
+            <a:ext cx="10972800" cy="420624"/>
           </a:xfrm>
-          <a:prstGeom xmlns:a="http://schemas.openxmlformats.org/drawingml/2006/main" prst="rect">
+          <a:prstGeom prst="rect">
             <a:avLst/>
           </a:prstGeom>
-          <a:noFill xmlns:a="http://schemas.openxmlformats.org/drawingml/2006/main"/>
-          <a:ln xmlns:a="http://schemas.openxmlformats.org/drawingml/2006/main" w="0">
+          <a:solidFill>
+            <a:srgbClr val="EEF2F7"/>
+          </a:solidFill>
+          <a:ln>
             <a:noFill/>
-            <a:prstDash val="solid"/>
           </a:ln>
+          <a:effectLst/>
         </p:spPr>
+        <p:style>
+          <a:lnRef idx="1">
+            <a:schemeClr val="accent1"/>
+          </a:lnRef>
+          <a:fillRef idx="3">
+            <a:schemeClr val="accent1"/>
+          </a:fillRef>
+          <a:effectRef idx="2">
+            <a:schemeClr val="accent1"/>
+          </a:effectRef>
+          <a:fontRef idx="minor">
+            <a:schemeClr val="lt1"/>
+          </a:fontRef>
+        </p:style>
         <p:txBody>
-          <a:bodyPr xmlns:a="http://schemas.openxmlformats.org/drawingml/2006/main" wrap="square"/>
-          <a:lstStyle xmlns:a="http://schemas.openxmlformats.org/drawingml/2006/main">
-            <a:defPPr>
-              <a:defRPr sz="1875" b="1">
-                <a:solidFill>
-                  <a:srgbClr val="157A80"/>
-                </a:solidFill>
-                <a:latin typeface="Arial"/>
-                <a:ea typeface="Arial"/>
-                <a:cs typeface="Arial"/>
-              </a:defRPr>
-            </a:defPPr>
-          </a:lstStyle>
-          <a:p xmlns:a="http://schemas.openxmlformats.org/drawingml/2006/main">
-            <a:pPr>
-              <a:defRPr sz="1875" b="1">
-                <a:solidFill>
-                  <a:srgbClr val="157A80"/>
-                </a:solidFill>
-                <a:latin typeface="Arial"/>
-                <a:ea typeface="Arial"/>
-                <a:cs typeface="Arial"/>
-              </a:defRPr>
-            </a:pPr>
-            <a:r>
-              <a:rPr sz="1500" b="1">
-                <a:solidFill>
-                  <a:srgbClr val="157A80"/>
-                </a:solidFill>
-                <a:latin typeface="Arial"/>
-                <a:ea typeface="Arial"/>
-                <a:cs typeface="Arial"/>
+          <a:bodyPr rtlCol="0" anchor="ctr"/>
+          <a:lstStyle/>
+          <a:p>
+            <a:pPr algn="ctr"/>
+          </a:p>
+        </p:txBody>
+      </p:sp>
+      <p:sp xmlns:a="http://schemas.openxmlformats.org/drawingml/2006/main">
+        <p:nvSpPr>
+          <p:cNvPr id="8" name="Rectangle 7"/>
+          <p:cNvSpPr/>
+          <p:nvPr/>
+        </p:nvSpPr>
+        <p:spPr>
+          <a:xfrm>
+            <a:off x="612648" y="5852160"/>
+            <a:ext cx="64008" cy="420624"/>
+          </a:xfrm>
+          <a:prstGeom prst="rect">
+            <a:avLst/>
+          </a:prstGeom>
+          <a:solidFill>
+            <a:srgbClr val="C44E52"/>
+          </a:solidFill>
+          <a:ln>
+            <a:noFill/>
+          </a:ln>
+          <a:effectLst/>
+        </p:spPr>
+        <p:style>
+          <a:lnRef idx="1">
+            <a:schemeClr val="accent1"/>
+          </a:lnRef>
+          <a:fillRef idx="3">
+            <a:schemeClr val="accent1"/>
+          </a:fillRef>
+          <a:effectRef idx="2">
+            <a:schemeClr val="accent1"/>
+          </a:effectRef>
+          <a:fontRef idx="minor">
+            <a:schemeClr val="lt1"/>
+          </a:fontRef>
+        </p:style>
+        <p:txBody>
+          <a:bodyPr rtlCol="0" anchor="ctr"/>
+          <a:lstStyle/>
+          <a:p>
+            <a:pPr algn="ctr"/>
+          </a:p>
+        </p:txBody>
+      </p:sp>
+      <p:sp xmlns:a="http://schemas.openxmlformats.org/drawingml/2006/main">
+        <p:nvSpPr>
+          <p:cNvPr id="9" name="Rectangle 8"/>
+          <p:cNvSpPr/>
+          <p:nvPr/>
+        </p:nvSpPr>
+        <p:spPr>
+          <a:xfrm>
+            <a:off x="676656" y="5852160"/>
+            <a:ext cx="10908792" cy="420624"/>
+          </a:xfrm>
+          <a:prstGeom prst="rect">
+            <a:avLst/>
+          </a:prstGeom>
+          <a:solidFill>
+            <a:srgbClr val="EEF2F7"/>
+          </a:solidFill>
+          <a:ln>
+            <a:noFill/>
+          </a:ln>
+          <a:effectLst/>
+        </p:spPr>
+        <p:style>
+          <a:lnRef idx="1">
+            <a:schemeClr val="accent1"/>
+          </a:lnRef>
+          <a:fillRef idx="3">
+            <a:schemeClr val="accent1"/>
+          </a:fillRef>
+          <a:effectRef idx="2">
+            <a:schemeClr val="accent1"/>
+          </a:effectRef>
+          <a:fontRef idx="minor">
+            <a:schemeClr val="lt1"/>
+          </a:fontRef>
+        </p:style>
+        <p:txBody>
+          <a:bodyPr rtlCol="0" anchor="ctr" wrap="square" tIns="36576" bIns="36576"/>
+          <a:lstStyle/>
+          <a:p>
+            <a:pPr algn="l"/>
+            <a:r>
+              <a:rPr sz="1200" b="1">
+                <a:solidFill>
+                  <a:srgbClr val="C44E52"/>
+                </a:solidFill>
+                <a:latin typeface="Arial"/>
               </a:rPr>
-              <a:t>Final validated dataset: </a:t>
-            </a:r>
-            <a:r>
-              <a:rPr sz="1500" b="0">
-                <a:solidFill>
-                  <a:srgbClr val="157A80"/>
-                </a:solidFill>
-                <a:latin typeface="Arial"/>
-                <a:ea typeface="Arial"/>
-                <a:cs typeface="Arial"/>
+              <a:t>Takeaway   </a:t>
+            </a:r>
+            <a:r>
+              <a:rPr sz="1200" b="0">
+                <a:solidFill>
+                  <a:srgbClr val="233247"/>
+                </a:solidFill>
+                <a:latin typeface="Arial"/>
               </a:rPr>
-              <a:t>1,861 games and 1,648,387 reviews (data/processed/games_clean.parquet, reviews_clean/).</a:t>
+              <a:t>Final validated dataset: 1,861 games and 1,648,387 reviews (data/processed/games_clean.parquet, reviews_clean/).</a:t>
             </a:r>
           </a:p>
         </p:txBody>
@@ -16182,8 +19083,8 @@
         </p:nvSpPr>
         <p:spPr>
           <a:xfrm xmlns:a="http://schemas.openxmlformats.org/drawingml/2006/main">
-            <a:off x="685800" y="5074920"/>
-            <a:ext cx="10668000" cy="822960"/>
+            <a:off x="685800" y="5029200"/>
+            <a:ext cx="10668000" cy="777240"/>
           </a:xfrm>
           <a:prstGeom xmlns:a="http://schemas.openxmlformats.org/drawingml/2006/main" prst="rect">
             <a:avLst/>
@@ -16280,6 +19181,156 @@
           </a:graphicData>
         </a:graphic>
       </p:graphicFrame>
+      <p:sp xmlns:a="http://schemas.openxmlformats.org/drawingml/2006/main">
+        <p:nvSpPr>
+          <p:cNvPr id="10" name="Rectangle 9"/>
+          <p:cNvSpPr/>
+          <p:nvPr/>
+        </p:nvSpPr>
+        <p:spPr>
+          <a:xfrm>
+            <a:off x="612648" y="5943600"/>
+            <a:ext cx="10972800" cy="420624"/>
+          </a:xfrm>
+          <a:prstGeom prst="rect">
+            <a:avLst/>
+          </a:prstGeom>
+          <a:solidFill>
+            <a:srgbClr val="EEF2F7"/>
+          </a:solidFill>
+          <a:ln>
+            <a:noFill/>
+          </a:ln>
+          <a:effectLst/>
+        </p:spPr>
+        <p:style>
+          <a:lnRef idx="1">
+            <a:schemeClr val="accent1"/>
+          </a:lnRef>
+          <a:fillRef idx="3">
+            <a:schemeClr val="accent1"/>
+          </a:fillRef>
+          <a:effectRef idx="2">
+            <a:schemeClr val="accent1"/>
+          </a:effectRef>
+          <a:fontRef idx="minor">
+            <a:schemeClr val="lt1"/>
+          </a:fontRef>
+        </p:style>
+        <p:txBody>
+          <a:bodyPr rtlCol="0" anchor="ctr"/>
+          <a:lstStyle/>
+          <a:p>
+            <a:pPr algn="ctr"/>
+          </a:p>
+        </p:txBody>
+      </p:sp>
+      <p:sp xmlns:a="http://schemas.openxmlformats.org/drawingml/2006/main">
+        <p:nvSpPr>
+          <p:cNvPr id="11" name="Rectangle 10"/>
+          <p:cNvSpPr/>
+          <p:nvPr/>
+        </p:nvSpPr>
+        <p:spPr>
+          <a:xfrm>
+            <a:off x="612648" y="5943600"/>
+            <a:ext cx="64008" cy="420624"/>
+          </a:xfrm>
+          <a:prstGeom prst="rect">
+            <a:avLst/>
+          </a:prstGeom>
+          <a:solidFill>
+            <a:srgbClr val="C44E52"/>
+          </a:solidFill>
+          <a:ln>
+            <a:noFill/>
+          </a:ln>
+          <a:effectLst/>
+        </p:spPr>
+        <p:style>
+          <a:lnRef idx="1">
+            <a:schemeClr val="accent1"/>
+          </a:lnRef>
+          <a:fillRef idx="3">
+            <a:schemeClr val="accent1"/>
+          </a:fillRef>
+          <a:effectRef idx="2">
+            <a:schemeClr val="accent1"/>
+          </a:effectRef>
+          <a:fontRef idx="minor">
+            <a:schemeClr val="lt1"/>
+          </a:fontRef>
+        </p:style>
+        <p:txBody>
+          <a:bodyPr rtlCol="0" anchor="ctr"/>
+          <a:lstStyle/>
+          <a:p>
+            <a:pPr algn="ctr"/>
+          </a:p>
+        </p:txBody>
+      </p:sp>
+      <p:sp xmlns:a="http://schemas.openxmlformats.org/drawingml/2006/main">
+        <p:nvSpPr>
+          <p:cNvPr id="12" name="Rectangle 11"/>
+          <p:cNvSpPr/>
+          <p:nvPr/>
+        </p:nvSpPr>
+        <p:spPr>
+          <a:xfrm>
+            <a:off x="676656" y="5943600"/>
+            <a:ext cx="10908792" cy="420624"/>
+          </a:xfrm>
+          <a:prstGeom prst="rect">
+            <a:avLst/>
+          </a:prstGeom>
+          <a:solidFill>
+            <a:srgbClr val="EEF2F7"/>
+          </a:solidFill>
+          <a:ln>
+            <a:noFill/>
+          </a:ln>
+          <a:effectLst/>
+        </p:spPr>
+        <p:style>
+          <a:lnRef idx="1">
+            <a:schemeClr val="accent1"/>
+          </a:lnRef>
+          <a:fillRef idx="3">
+            <a:schemeClr val="accent1"/>
+          </a:fillRef>
+          <a:effectRef idx="2">
+            <a:schemeClr val="accent1"/>
+          </a:effectRef>
+          <a:fontRef idx="minor">
+            <a:schemeClr val="lt1"/>
+          </a:fontRef>
+        </p:style>
+        <p:txBody>
+          <a:bodyPr rtlCol="0" anchor="ctr" wrap="square" tIns="36576" bIns="36576"/>
+          <a:lstStyle/>
+          <a:p>
+            <a:pPr algn="l"/>
+            <a:r>
+              <a:rPr sz="1200" b="1">
+                <a:solidFill>
+                  <a:srgbClr val="C44E52"/>
+                </a:solidFill>
+                <a:latin typeface="Arial"/>
+              </a:rPr>
+              <a:t>Takeaway   </a:t>
+            </a:r>
+            <a:r>
+              <a:rPr sz="1200" b="0">
+                <a:solidFill>
+                  <a:srgbClr val="233247"/>
+                </a:solidFill>
+                <a:latin typeface="Arial"/>
+              </a:rPr>
+              <a:t>The first two hours and the price inside them show where to act before the refund window closes.</a:t>
+            </a:r>
+          </a:p>
+        </p:txBody>
+      </p:sp>
     </p:spTree>
     <p:extLst>
       <p:ext uri="{BB962C8B-B14F-4D97-AF65-F5344CB8AC3E}">
@@ -17492,8 +20543,8 @@
         </p:nvSpPr>
         <p:spPr>
           <a:xfrm xmlns:a="http://schemas.openxmlformats.org/drawingml/2006/main">
-            <a:off x="685800" y="4343400"/>
-            <a:ext cx="10572750" cy="914400"/>
+            <a:off x="685800" y="4206240"/>
+            <a:ext cx="10572750" cy="822960"/>
           </a:xfrm>
           <a:prstGeom xmlns:a="http://schemas.openxmlformats.org/drawingml/2006/main" prst="rect">
             <a:avLst/>
@@ -17530,7 +20581,7 @@
               </a:defRPr>
             </a:pPr>
             <a:r>
-              <a:rPr sz="1300" b="1">
+              <a:rPr sz="1200" b="1">
                 <a:solidFill>
                   <a:srgbClr val="233247"/>
                 </a:solidFill>
@@ -17541,7 +20592,7 @@
               <a:t>Evaluation setup: </a:t>
             </a:r>
             <a:r>
-              <a:rPr sz="1300" b="0">
+              <a:rPr sz="1200" b="0">
                 <a:solidFill>
                   <a:srgbClr val="233247"/>
                 </a:solidFill>
@@ -17570,8 +20621,8 @@
         </p:nvSpPr>
         <p:spPr>
           <a:xfrm xmlns:a="http://schemas.openxmlformats.org/drawingml/2006/main">
-            <a:off x="685800" y="5257800"/>
-            <a:ext cx="10572750" cy="1005840"/>
+            <a:off x="685800" y="4983480"/>
+            <a:ext cx="10572750" cy="868680"/>
           </a:xfrm>
           <a:prstGeom xmlns:a="http://schemas.openxmlformats.org/drawingml/2006/main" prst="rect">
             <a:avLst/>
@@ -17608,7 +20659,7 @@
               </a:defRPr>
             </a:pPr>
             <a:r>
-              <a:rPr sz="1300" b="1">
+              <a:rPr sz="1200" b="1">
                 <a:solidFill>
                   <a:srgbClr val="233247"/>
                 </a:solidFill>
@@ -17619,7 +20670,7 @@
               <a:t>Selected model and interpretation: </a:t>
             </a:r>
             <a:r>
-              <a:rPr sz="1300" b="0">
+              <a:rPr sz="1200" b="0">
                 <a:solidFill>
                   <a:srgbClr val="233247"/>
                 </a:solidFill>
@@ -17628,6 +20679,156 @@
                 <a:cs typeface="Arial"/>
               </a:rPr>
               <a:t>the three tree models tie at review level (PR-AUC about 0.28 against 0.11 for guessing) and at game level tuned XGBoost (0.44) and Logistic Regression (0.42) lead, while Random Forest and LightGBM fall to 0.37 on test after tuning (intervals overlap, no winner); store metadata says little about how good a game is.</a:t>
+            </a:r>
+          </a:p>
+        </p:txBody>
+      </p:sp>
+      <p:sp xmlns:a="http://schemas.openxmlformats.org/drawingml/2006/main">
+        <p:nvSpPr>
+          <p:cNvPr id="8" name="Rectangle 7"/>
+          <p:cNvSpPr/>
+          <p:nvPr/>
+        </p:nvSpPr>
+        <p:spPr>
+          <a:xfrm>
+            <a:off x="612648" y="5916168"/>
+            <a:ext cx="10972800" cy="420624"/>
+          </a:xfrm>
+          <a:prstGeom prst="rect">
+            <a:avLst/>
+          </a:prstGeom>
+          <a:solidFill>
+            <a:srgbClr val="EEF2F7"/>
+          </a:solidFill>
+          <a:ln>
+            <a:noFill/>
+          </a:ln>
+          <a:effectLst/>
+        </p:spPr>
+        <p:style>
+          <a:lnRef idx="1">
+            <a:schemeClr val="accent1"/>
+          </a:lnRef>
+          <a:fillRef idx="3">
+            <a:schemeClr val="accent1"/>
+          </a:fillRef>
+          <a:effectRef idx="2">
+            <a:schemeClr val="accent1"/>
+          </a:effectRef>
+          <a:fontRef idx="minor">
+            <a:schemeClr val="lt1"/>
+          </a:fontRef>
+        </p:style>
+        <p:txBody>
+          <a:bodyPr rtlCol="0" anchor="ctr"/>
+          <a:lstStyle/>
+          <a:p>
+            <a:pPr algn="ctr"/>
+          </a:p>
+        </p:txBody>
+      </p:sp>
+      <p:sp xmlns:a="http://schemas.openxmlformats.org/drawingml/2006/main">
+        <p:nvSpPr>
+          <p:cNvPr id="9" name="Rectangle 8"/>
+          <p:cNvSpPr/>
+          <p:nvPr/>
+        </p:nvSpPr>
+        <p:spPr>
+          <a:xfrm>
+            <a:off x="612648" y="5916168"/>
+            <a:ext cx="64008" cy="420624"/>
+          </a:xfrm>
+          <a:prstGeom prst="rect">
+            <a:avLst/>
+          </a:prstGeom>
+          <a:solidFill>
+            <a:srgbClr val="C44E52"/>
+          </a:solidFill>
+          <a:ln>
+            <a:noFill/>
+          </a:ln>
+          <a:effectLst/>
+        </p:spPr>
+        <p:style>
+          <a:lnRef idx="1">
+            <a:schemeClr val="accent1"/>
+          </a:lnRef>
+          <a:fillRef idx="3">
+            <a:schemeClr val="accent1"/>
+          </a:fillRef>
+          <a:effectRef idx="2">
+            <a:schemeClr val="accent1"/>
+          </a:effectRef>
+          <a:fontRef idx="minor">
+            <a:schemeClr val="lt1"/>
+          </a:fontRef>
+        </p:style>
+        <p:txBody>
+          <a:bodyPr rtlCol="0" anchor="ctr"/>
+          <a:lstStyle/>
+          <a:p>
+            <a:pPr algn="ctr"/>
+          </a:p>
+        </p:txBody>
+      </p:sp>
+      <p:sp xmlns:a="http://schemas.openxmlformats.org/drawingml/2006/main">
+        <p:nvSpPr>
+          <p:cNvPr id="10" name="Rectangle 9"/>
+          <p:cNvSpPr/>
+          <p:nvPr/>
+        </p:nvSpPr>
+        <p:spPr>
+          <a:xfrm>
+            <a:off x="676656" y="5916168"/>
+            <a:ext cx="10908792" cy="420624"/>
+          </a:xfrm>
+          <a:prstGeom prst="rect">
+            <a:avLst/>
+          </a:prstGeom>
+          <a:solidFill>
+            <a:srgbClr val="EEF2F7"/>
+          </a:solidFill>
+          <a:ln>
+            <a:noFill/>
+          </a:ln>
+          <a:effectLst/>
+        </p:spPr>
+        <p:style>
+          <a:lnRef idx="1">
+            <a:schemeClr val="accent1"/>
+          </a:lnRef>
+          <a:fillRef idx="3">
+            <a:schemeClr val="accent1"/>
+          </a:fillRef>
+          <a:effectRef idx="2">
+            <a:schemeClr val="accent1"/>
+          </a:effectRef>
+          <a:fontRef idx="minor">
+            <a:schemeClr val="lt1"/>
+          </a:fontRef>
+        </p:style>
+        <p:txBody>
+          <a:bodyPr rtlCol="0" anchor="ctr" wrap="square" tIns="36576" bIns="36576"/>
+          <a:lstStyle/>
+          <a:p>
+            <a:pPr algn="l"/>
+            <a:r>
+              <a:rPr sz="1200" b="1">
+                <a:solidFill>
+                  <a:srgbClr val="C44E52"/>
+                </a:solidFill>
+                <a:latin typeface="Arial"/>
+              </a:rPr>
+              <a:t>Takeaway   </a:t>
+            </a:r>
+            <a:r>
+              <a:rPr sz="1200" b="0">
+                <a:solidFill>
+                  <a:srgbClr val="233247"/>
+                </a:solidFill>
+                <a:latin typeface="Arial"/>
+              </a:rPr>
+              <a:t>Metadata alone says little about reception; reading the review text is where the large gain is (next slides).</a:t>
             </a:r>
           </a:p>
         </p:txBody>
@@ -18320,6 +21521,156 @@
                 <a:cs typeface="Arial"/>
               </a:rPr>
               <a:t>Selected: Text Mining and Association Rule Mining. Patch impact and the launch-risk scorer are extra analyses.</a:t>
+            </a:r>
+          </a:p>
+        </p:txBody>
+      </p:sp>
+      <p:sp xmlns:a="http://schemas.openxmlformats.org/drawingml/2006/main">
+        <p:nvSpPr>
+          <p:cNvPr id="7" name="Rectangle 6"/>
+          <p:cNvSpPr/>
+          <p:nvPr/>
+        </p:nvSpPr>
+        <p:spPr>
+          <a:xfrm>
+            <a:off x="612648" y="5916168"/>
+            <a:ext cx="10972800" cy="420624"/>
+          </a:xfrm>
+          <a:prstGeom prst="rect">
+            <a:avLst/>
+          </a:prstGeom>
+          <a:solidFill>
+            <a:srgbClr val="EEF2F7"/>
+          </a:solidFill>
+          <a:ln>
+            <a:noFill/>
+          </a:ln>
+          <a:effectLst/>
+        </p:spPr>
+        <p:style>
+          <a:lnRef idx="1">
+            <a:schemeClr val="accent1"/>
+          </a:lnRef>
+          <a:fillRef idx="3">
+            <a:schemeClr val="accent1"/>
+          </a:fillRef>
+          <a:effectRef idx="2">
+            <a:schemeClr val="accent1"/>
+          </a:effectRef>
+          <a:fontRef idx="minor">
+            <a:schemeClr val="lt1"/>
+          </a:fontRef>
+        </p:style>
+        <p:txBody>
+          <a:bodyPr rtlCol="0" anchor="ctr"/>
+          <a:lstStyle/>
+          <a:p>
+            <a:pPr algn="ctr"/>
+          </a:p>
+        </p:txBody>
+      </p:sp>
+      <p:sp xmlns:a="http://schemas.openxmlformats.org/drawingml/2006/main">
+        <p:nvSpPr>
+          <p:cNvPr id="8" name="Rectangle 7"/>
+          <p:cNvSpPr/>
+          <p:nvPr/>
+        </p:nvSpPr>
+        <p:spPr>
+          <a:xfrm>
+            <a:off x="612648" y="5916168"/>
+            <a:ext cx="64008" cy="420624"/>
+          </a:xfrm>
+          <a:prstGeom prst="rect">
+            <a:avLst/>
+          </a:prstGeom>
+          <a:solidFill>
+            <a:srgbClr val="C44E52"/>
+          </a:solidFill>
+          <a:ln>
+            <a:noFill/>
+          </a:ln>
+          <a:effectLst/>
+        </p:spPr>
+        <p:style>
+          <a:lnRef idx="1">
+            <a:schemeClr val="accent1"/>
+          </a:lnRef>
+          <a:fillRef idx="3">
+            <a:schemeClr val="accent1"/>
+          </a:fillRef>
+          <a:effectRef idx="2">
+            <a:schemeClr val="accent1"/>
+          </a:effectRef>
+          <a:fontRef idx="minor">
+            <a:schemeClr val="lt1"/>
+          </a:fontRef>
+        </p:style>
+        <p:txBody>
+          <a:bodyPr rtlCol="0" anchor="ctr"/>
+          <a:lstStyle/>
+          <a:p>
+            <a:pPr algn="ctr"/>
+          </a:p>
+        </p:txBody>
+      </p:sp>
+      <p:sp xmlns:a="http://schemas.openxmlformats.org/drawingml/2006/main">
+        <p:nvSpPr>
+          <p:cNvPr id="9" name="Rectangle 8"/>
+          <p:cNvSpPr/>
+          <p:nvPr/>
+        </p:nvSpPr>
+        <p:spPr>
+          <a:xfrm>
+            <a:off x="676656" y="5916168"/>
+            <a:ext cx="10908792" cy="420624"/>
+          </a:xfrm>
+          <a:prstGeom prst="rect">
+            <a:avLst/>
+          </a:prstGeom>
+          <a:solidFill>
+            <a:srgbClr val="EEF2F7"/>
+          </a:solidFill>
+          <a:ln>
+            <a:noFill/>
+          </a:ln>
+          <a:effectLst/>
+        </p:spPr>
+        <p:style>
+          <a:lnRef idx="1">
+            <a:schemeClr val="accent1"/>
+          </a:lnRef>
+          <a:fillRef idx="3">
+            <a:schemeClr val="accent1"/>
+          </a:fillRef>
+          <a:effectRef idx="2">
+            <a:schemeClr val="accent1"/>
+          </a:effectRef>
+          <a:fontRef idx="minor">
+            <a:schemeClr val="lt1"/>
+          </a:fontRef>
+        </p:style>
+        <p:txBody>
+          <a:bodyPr rtlCol="0" anchor="ctr" wrap="square" tIns="36576" bIns="36576"/>
+          <a:lstStyle/>
+          <a:p>
+            <a:pPr algn="l"/>
+            <a:r>
+              <a:rPr sz="1200" b="1">
+                <a:solidFill>
+                  <a:srgbClr val="C44E52"/>
+                </a:solidFill>
+                <a:latin typeface="Arial"/>
+              </a:rPr>
+              <a:t>Takeaway   </a:t>
+            </a:r>
+            <a:r>
+              <a:rPr sz="1200" b="0">
+                <a:solidFill>
+                  <a:srgbClr val="233247"/>
+                </a:solidFill>
+                <a:latin typeface="Arial"/>
+              </a:rPr>
+              <a:t>Two Unit 3 methods, each evaluated on held-out games and compared with fair alternatives.</a:t>
             </a:r>
           </a:p>
         </p:txBody>

--- a/slides/review2.pptx
+++ b/slides/review2.pptx
@@ -16,10 +16,13 @@
     <p:sldId xmlns:r="http://schemas.openxmlformats.org/officeDocument/2006/relationships" id="261" r:id="Rcdb49c028e314ea1"/>
     <p:sldId xmlns:r="http://schemas.openxmlformats.org/officeDocument/2006/relationships" id="262" r:id="R14c78c32adbc45b3"/>
     <p:sldId xmlns:r="http://schemas.openxmlformats.org/officeDocument/2006/relationships" id="263" r:id="Rb2ccc4eace8642f4"/>
+    <p:sldId xmlns:ns0="http://schemas.openxmlformats.org/officeDocument/2006/relationships" id="273" ns0:id="rId23"/>
     <p:sldId xmlns:r="http://schemas.openxmlformats.org/officeDocument/2006/relationships" id="264" r:id="R2432138f375d4f6f"/>
     <p:sldId xmlns:r="http://schemas.openxmlformats.org/officeDocument/2006/relationships" id="265" r:id="Rc5e53e3b48fb4bde"/>
+    <p:sldId xmlns:ns0="http://schemas.openxmlformats.org/officeDocument/2006/relationships" id="274" ns0:id="rId24"/>
     <p:sldId xmlns:r="http://schemas.openxmlformats.org/officeDocument/2006/relationships" id="266" r:id="Rda9f68c7d5914242"/>
     <p:sldId xmlns:r="http://schemas.openxmlformats.org/officeDocument/2006/relationships" id="267" r:id="R422860c0b274425a"/>
+    <p:sldId xmlns:ns0="http://schemas.openxmlformats.org/officeDocument/2006/relationships" id="275" ns0:id="rId25"/>
     <p:sldId xmlns:r="http://schemas.openxmlformats.org/officeDocument/2006/relationships" id="268" r:id="R7c0ae61b31f74095"/>
     <p:sldId xmlns:r="http://schemas.openxmlformats.org/officeDocument/2006/relationships" id="269" r:id="Ra78f76bec3d04acf"/>
     <p:sldId xmlns:r="http://schemas.openxmlformats.org/officeDocument/2006/relationships" id="270" r:id="R2e171858890a4a8a"/>
@@ -569,6 +572,1464 @@
       <c:valAx>
         <c:axId val="-2113994440"/>
         <c:scaling>
+          <c:min val="0.0"/>
+        </c:scaling>
+        <c:delete/>
+        <c:axPos val="l"/>
+        <c:majorTickMark val="out"/>
+        <c:minorTickMark val="none"/>
+        <c:tickLblPos val="nextTo"/>
+        <c:crossAx val="-2068027336"/>
+        <c:crosses val="autoZero"/>
+      </c:valAx>
+    </c:plotArea>
+    <c:dispBlanksAs val="gap"/>
+  </c:chart>
+  <c:txPr>
+    <a:bodyPr/>
+    <a:lstStyle/>
+    <a:p>
+      <a:pPr>
+        <a:defRPr sz="900">
+          <a:latin typeface="Arial"/>
+        </a:defRPr>
+      </a:pPr>
+      <a:endParaRPr lang="en-US"/>
+    </a:p>
+  </c:txPr>
+  <c:externalData r:id="rId1">
+    <c:autoUpdate val="0"/>
+  </c:externalData>
+</c:chartSpace>
+</file>
+
+<file path=ppt/charts/chart4.xml><?xml version="1.0" encoding="utf-8"?>
+<c:chartSpace xmlns:c="http://schemas.openxmlformats.org/drawingml/2006/chart" xmlns:a="http://schemas.openxmlformats.org/drawingml/2006/main" xmlns:r="http://schemas.openxmlformats.org/officeDocument/2006/relationships">
+  <c:date1904 val="0"/>
+  <c:chart>
+    <c:title>
+      <c:tx>
+        <c:rich>
+          <a:bodyPr/>
+          <a:lstStyle/>
+          <a:p>
+            <a:r>
+              <a:rPr sz="1200" b="1">
+                <a:solidFill>
+                  <a:srgbClr val="142D4E"/>
+                </a:solidFill>
+                <a:latin typeface="Arial"/>
+              </a:rPr>
+              <a:t>Review level (test): will a review be negative?</a:t>
+            </a:r>
+          </a:p>
+        </c:rich>
+      </c:tx>
+      <c:layout/>
+      <c:overlay val="0"/>
+    </c:title>
+    <c:autoTitleDeleted val="0"/>
+    <c:plotArea>
+      <c:barChart>
+        <c:barDir val="col"/>
+        <c:grouping val="clustered"/>
+        <c:ser>
+          <c:idx val="0"/>
+          <c:order val="0"/>
+          <c:tx>
+            <c:strRef>
+              <c:f>Sheet1!$B$1</c:f>
+              <c:strCache>
+                <c:ptCount val="1"/>
+                <c:pt idx="0">
+                  <c:v>PR-AUC</c:v>
+                </c:pt>
+              </c:strCache>
+            </c:strRef>
+          </c:tx>
+          <c:spPr>
+            <a:solidFill>
+              <a:srgbClr val="142D4E"/>
+            </a:solidFill>
+          </c:spPr>
+          <c:invertIfNegative val="0"/>
+          <c:cat>
+            <c:strRef>
+              <c:f>Sheet1!$A$2:$A$6</c:f>
+              <c:strCache>
+                <c:ptCount val="5"/>
+                <c:pt idx="0">
+                  <c:v>Dummy</c:v>
+                </c:pt>
+                <c:pt idx="1">
+                  <c:v>Logistic Reg.</c:v>
+                </c:pt>
+                <c:pt idx="2">
+                  <c:v>Random Forest</c:v>
+                </c:pt>
+                <c:pt idx="3">
+                  <c:v>LightGBM</c:v>
+                </c:pt>
+                <c:pt idx="4">
+                  <c:v>XGBoost</c:v>
+                </c:pt>
+              </c:strCache>
+            </c:strRef>
+          </c:cat>
+          <c:val>
+            <c:numRef>
+              <c:f>Sheet1!$B$2:$B$6</c:f>
+              <c:numCache>
+                <c:formatCode>General</c:formatCode>
+                <c:ptCount val="5"/>
+                <c:pt idx="0">
+                  <c:v>0.1063</c:v>
+                </c:pt>
+                <c:pt idx="1">
+                  <c:v>0.194</c:v>
+                </c:pt>
+                <c:pt idx="2">
+                  <c:v>0.2798</c:v>
+                </c:pt>
+                <c:pt idx="3">
+                  <c:v>0.2538</c:v>
+                </c:pt>
+                <c:pt idx="4">
+                  <c:v>0.2754</c:v>
+                </c:pt>
+              </c:numCache>
+            </c:numRef>
+          </c:val>
+        </c:ser>
+        <c:ser>
+          <c:idx val="1"/>
+          <c:order val="1"/>
+          <c:tx>
+            <c:strRef>
+              <c:f>Sheet1!$C$1</c:f>
+              <c:strCache>
+                <c:ptCount val="1"/>
+                <c:pt idx="0">
+                  <c:v>ROC-AUC</c:v>
+                </c:pt>
+              </c:strCache>
+            </c:strRef>
+          </c:tx>
+          <c:spPr>
+            <a:solidFill>
+              <a:srgbClr val="157A80"/>
+            </a:solidFill>
+          </c:spPr>
+          <c:invertIfNegative val="0"/>
+          <c:cat>
+            <c:strRef>
+              <c:f>Sheet1!$A$2:$A$6</c:f>
+              <c:strCache>
+                <c:ptCount val="5"/>
+                <c:pt idx="0">
+                  <c:v>Dummy</c:v>
+                </c:pt>
+                <c:pt idx="1">
+                  <c:v>Logistic Reg.</c:v>
+                </c:pt>
+                <c:pt idx="2">
+                  <c:v>Random Forest</c:v>
+                </c:pt>
+                <c:pt idx="3">
+                  <c:v>LightGBM</c:v>
+                </c:pt>
+                <c:pt idx="4">
+                  <c:v>XGBoost</c:v>
+                </c:pt>
+              </c:strCache>
+            </c:strRef>
+          </c:cat>
+          <c:val>
+            <c:numRef>
+              <c:f>Sheet1!$C$2:$C$6</c:f>
+              <c:numCache>
+                <c:formatCode>General</c:formatCode>
+                <c:ptCount val="5"/>
+                <c:pt idx="0">
+                  <c:v>0.5</c:v>
+                </c:pt>
+                <c:pt idx="1">
+                  <c:v>0.663</c:v>
+                </c:pt>
+                <c:pt idx="2">
+                  <c:v>0.726</c:v>
+                </c:pt>
+                <c:pt idx="3">
+                  <c:v>0.724</c:v>
+                </c:pt>
+                <c:pt idx="4">
+                  <c:v>0.729</c:v>
+                </c:pt>
+              </c:numCache>
+            </c:numRef>
+          </c:val>
+        </c:ser>
+        <c:dLbls>
+          <c:numFmt formatCode="0.00" sourceLinked="0"/>
+          <c:txPr>
+            <a:bodyPr/>
+            <a:lstStyle/>
+            <a:p>
+              <a:pPr>
+                <a:defRPr sz="1100"/>
+              </a:pPr>
+            </a:p>
+          </c:txPr>
+          <c:dLblPos val="outEnd"/>
+          <c:showLegendKey val="0"/>
+          <c:showVal val="1"/>
+          <c:showCatName val="0"/>
+          <c:showSerName val="0"/>
+          <c:showPercent val="0"/>
+          <c:showBubbleSize val="0"/>
+          <c:showLeaderLines val="1"/>
+        </c:dLbls>
+        <c:gapWidth val="55"/>
+        <c:axId val="-2068027336"/>
+        <c:axId val="-2113994440"/>
+      </c:barChart>
+      <c:catAx>
+        <c:axId val="-2068027336"/>
+        <c:scaling>
+          <c:orientation val="minMax"/>
+        </c:scaling>
+        <c:delete val="0"/>
+        <c:axPos val="b"/>
+        <c:majorTickMark val="out"/>
+        <c:minorTickMark val="none"/>
+        <c:tickLblPos val="nextTo"/>
+        <c:spPr>
+          <a:ln>
+            <a:solidFill>
+              <a:srgbClr val="C9D6E2"/>
+            </a:solidFill>
+          </a:ln>
+        </c:spPr>
+        <c:txPr>
+          <a:bodyPr/>
+          <a:lstStyle/>
+          <a:p>
+            <a:pPr>
+              <a:defRPr sz="1100"/>
+            </a:pPr>
+          </a:p>
+        </c:txPr>
+        <c:crossAx val="-2113994440"/>
+        <c:crosses val="autoZero"/>
+        <c:auto val="1"/>
+        <c:lblAlgn val="ctr"/>
+        <c:lblOffset val="100"/>
+        <c:noMultiLvlLbl val="0"/>
+      </c:catAx>
+      <c:valAx>
+        <c:axId val="-2113994440"/>
+        <c:scaling>
+          <c:max val="1.0"/>
+          <c:min val="0.0"/>
+        </c:scaling>
+        <c:delete/>
+        <c:axPos val="l"/>
+        <c:majorTickMark val="out"/>
+        <c:minorTickMark val="none"/>
+        <c:tickLblPos val="nextTo"/>
+        <c:crossAx val="-2068027336"/>
+        <c:crosses val="autoZero"/>
+      </c:valAx>
+    </c:plotArea>
+    <c:legend>
+      <c:legendPos val="b"/>
+      <c:overlay val="0"/>
+    </c:legend>
+    <c:dispBlanksAs val="gap"/>
+  </c:chart>
+  <c:txPr>
+    <a:bodyPr/>
+    <a:lstStyle/>
+    <a:p>
+      <a:pPr>
+        <a:defRPr sz="1100">
+          <a:latin typeface="Arial"/>
+        </a:defRPr>
+      </a:pPr>
+      <a:endParaRPr lang="en-US"/>
+    </a:p>
+  </c:txPr>
+  <c:externalData r:id="rId1">
+    <c:autoUpdate val="0"/>
+  </c:externalData>
+</c:chartSpace>
+</file>
+
+<file path=ppt/charts/chart5.xml><?xml version="1.0" encoding="utf-8"?>
+<c:chartSpace xmlns:c="http://schemas.openxmlformats.org/drawingml/2006/chart" xmlns:a="http://schemas.openxmlformats.org/drawingml/2006/main" xmlns:r="http://schemas.openxmlformats.org/officeDocument/2006/relationships">
+  <c:date1904 val="0"/>
+  <c:chart>
+    <c:title>
+      <c:tx>
+        <c:rich>
+          <a:bodyPr/>
+          <a:lstStyle/>
+          <a:p>
+            <a:r>
+              <a:rPr sz="1200" b="1">
+                <a:solidFill>
+                  <a:srgbClr val="142D4E"/>
+                </a:solidFill>
+                <a:latin typeface="Arial"/>
+              </a:rPr>
+              <a:t>Game level (test): success tier</a:t>
+            </a:r>
+          </a:p>
+        </c:rich>
+      </c:tx>
+      <c:layout/>
+      <c:overlay val="0"/>
+    </c:title>
+    <c:autoTitleDeleted val="0"/>
+    <c:plotArea>
+      <c:barChart>
+        <c:barDir val="col"/>
+        <c:grouping val="clustered"/>
+        <c:ser>
+          <c:idx val="0"/>
+          <c:order val="0"/>
+          <c:tx>
+            <c:strRef>
+              <c:f>Sheet1!$B$1</c:f>
+              <c:strCache>
+                <c:ptCount val="1"/>
+                <c:pt idx="0">
+                  <c:v>macro-F1</c:v>
+                </c:pt>
+              </c:strCache>
+            </c:strRef>
+          </c:tx>
+          <c:spPr>
+            <a:solidFill>
+              <a:srgbClr val="C44E52"/>
+            </a:solidFill>
+          </c:spPr>
+          <c:invertIfNegative val="0"/>
+          <c:cat>
+            <c:strRef>
+              <c:f>Sheet1!$A$2:$A$6</c:f>
+              <c:strCache>
+                <c:ptCount val="5"/>
+                <c:pt idx="0">
+                  <c:v>Dummy</c:v>
+                </c:pt>
+                <c:pt idx="1">
+                  <c:v>Logistic Reg.</c:v>
+                </c:pt>
+                <c:pt idx="2">
+                  <c:v>Random Forest</c:v>
+                </c:pt>
+                <c:pt idx="3">
+                  <c:v>LightGBM</c:v>
+                </c:pt>
+                <c:pt idx="4">
+                  <c:v>XGBoost</c:v>
+                </c:pt>
+              </c:strCache>
+            </c:strRef>
+          </c:cat>
+          <c:val>
+            <c:numRef>
+              <c:f>Sheet1!$B$2:$B$6</c:f>
+              <c:numCache>
+                <c:formatCode>General</c:formatCode>
+                <c:ptCount val="5"/>
+                <c:pt idx="0">
+                  <c:v>0.2197</c:v>
+                </c:pt>
+                <c:pt idx="1">
+                  <c:v>0.4233</c:v>
+                </c:pt>
+                <c:pt idx="2">
+                  <c:v>0.3708</c:v>
+                </c:pt>
+                <c:pt idx="3">
+                  <c:v>0.3717</c:v>
+                </c:pt>
+                <c:pt idx="4">
+                  <c:v>0.4374</c:v>
+                </c:pt>
+              </c:numCache>
+            </c:numRef>
+          </c:val>
+        </c:ser>
+        <c:dLbls>
+          <c:numFmt formatCode="0.00" sourceLinked="0"/>
+          <c:txPr>
+            <a:bodyPr/>
+            <a:lstStyle/>
+            <a:p>
+              <a:pPr>
+                <a:defRPr sz="1100"/>
+              </a:pPr>
+            </a:p>
+          </c:txPr>
+          <c:dLblPos val="outEnd"/>
+          <c:showLegendKey val="0"/>
+          <c:showVal val="1"/>
+          <c:showCatName val="0"/>
+          <c:showSerName val="0"/>
+          <c:showPercent val="0"/>
+          <c:showBubbleSize val="0"/>
+          <c:showLeaderLines val="1"/>
+        </c:dLbls>
+        <c:gapWidth val="55"/>
+        <c:axId val="-2068027336"/>
+        <c:axId val="-2113994440"/>
+      </c:barChart>
+      <c:catAx>
+        <c:axId val="-2068027336"/>
+        <c:scaling>
+          <c:orientation val="minMax"/>
+        </c:scaling>
+        <c:delete val="0"/>
+        <c:axPos val="b"/>
+        <c:majorTickMark val="out"/>
+        <c:minorTickMark val="none"/>
+        <c:tickLblPos val="nextTo"/>
+        <c:spPr>
+          <a:ln>
+            <a:solidFill>
+              <a:srgbClr val="C9D6E2"/>
+            </a:solidFill>
+          </a:ln>
+        </c:spPr>
+        <c:txPr>
+          <a:bodyPr/>
+          <a:lstStyle/>
+          <a:p>
+            <a:pPr>
+              <a:defRPr sz="1100"/>
+            </a:pPr>
+          </a:p>
+        </c:txPr>
+        <c:crossAx val="-2113994440"/>
+        <c:crosses val="autoZero"/>
+        <c:auto val="1"/>
+        <c:lblAlgn val="ctr"/>
+        <c:lblOffset val="100"/>
+        <c:noMultiLvlLbl val="0"/>
+      </c:catAx>
+      <c:valAx>
+        <c:axId val="-2113994440"/>
+        <c:scaling>
+          <c:max val="0.6"/>
+          <c:min val="0.0"/>
+        </c:scaling>
+        <c:delete/>
+        <c:axPos val="l"/>
+        <c:majorTickMark val="out"/>
+        <c:minorTickMark val="none"/>
+        <c:tickLblPos val="nextTo"/>
+        <c:crossAx val="-2068027336"/>
+        <c:crosses val="autoZero"/>
+      </c:valAx>
+    </c:plotArea>
+    <c:dispBlanksAs val="gap"/>
+  </c:chart>
+  <c:txPr>
+    <a:bodyPr/>
+    <a:lstStyle/>
+    <a:p>
+      <a:pPr>
+        <a:defRPr sz="1100">
+          <a:latin typeface="Arial"/>
+        </a:defRPr>
+      </a:pPr>
+      <a:endParaRPr lang="en-US"/>
+    </a:p>
+  </c:txPr>
+  <c:externalData r:id="rId1">
+    <c:autoUpdate val="0"/>
+  </c:externalData>
+</c:chartSpace>
+</file>
+
+<file path=ppt/charts/chart6.xml><?xml version="1.0" encoding="utf-8"?>
+<c:chartSpace xmlns:c="http://schemas.openxmlformats.org/drawingml/2006/chart" xmlns:a="http://schemas.openxmlformats.org/drawingml/2006/main" xmlns:r="http://schemas.openxmlformats.org/officeDocument/2006/relationships">
+  <c:date1904 val="0"/>
+  <c:chart>
+    <c:title>
+      <c:tx>
+        <c:rich>
+          <a:bodyPr/>
+          <a:lstStyle/>
+          <a:p>
+            <a:r>
+              <a:rPr sz="1200" b="1">
+                <a:solidFill>
+                  <a:srgbClr val="142D4E"/>
+                </a:solidFill>
+                <a:latin typeface="Arial"/>
+              </a:rPr>
+              <a:t>Does the review text help? (test, English reviews)</a:t>
+            </a:r>
+          </a:p>
+        </c:rich>
+      </c:tx>
+      <c:layout/>
+      <c:overlay val="0"/>
+    </c:title>
+    <c:autoTitleDeleted val="0"/>
+    <c:plotArea>
+      <c:barChart>
+        <c:barDir val="col"/>
+        <c:grouping val="clustered"/>
+        <c:ser>
+          <c:idx val="0"/>
+          <c:order val="0"/>
+          <c:tx>
+            <c:strRef>
+              <c:f>Sheet1!$B$1</c:f>
+              <c:strCache>
+                <c:ptCount val="1"/>
+                <c:pt idx="0">
+                  <c:v>PR-AUC</c:v>
+                </c:pt>
+              </c:strCache>
+            </c:strRef>
+          </c:tx>
+          <c:spPr>
+            <a:solidFill>
+              <a:srgbClr val="142D4E"/>
+            </a:solidFill>
+          </c:spPr>
+          <c:invertIfNegative val="0"/>
+          <c:cat>
+            <c:strRef>
+              <c:f>Sheet1!$A$2:$A$5</c:f>
+              <c:strCache>
+                <c:ptCount val="4"/>
+                <c:pt idx="0">
+                  <c:v>Dummy</c:v>
+                </c:pt>
+                <c:pt idx="1">
+                  <c:v>LightGBM, metadata</c:v>
+                </c:pt>
+                <c:pt idx="2">
+                  <c:v>LightGBM + text components</c:v>
+                </c:pt>
+                <c:pt idx="3">
+                  <c:v>Logistic Reg., full text</c:v>
+                </c:pt>
+              </c:strCache>
+            </c:strRef>
+          </c:cat>
+          <c:val>
+            <c:numRef>
+              <c:f>Sheet1!$B$2:$B$5</c:f>
+              <c:numCache>
+                <c:formatCode>General</c:formatCode>
+                <c:ptCount val="4"/>
+                <c:pt idx="0">
+                  <c:v>0.1151</c:v>
+                </c:pt>
+                <c:pt idx="1">
+                  <c:v>0.3605</c:v>
+                </c:pt>
+                <c:pt idx="2">
+                  <c:v>0.5934</c:v>
+                </c:pt>
+                <c:pt idx="3">
+                  <c:v>0.8378</c:v>
+                </c:pt>
+              </c:numCache>
+            </c:numRef>
+          </c:val>
+        </c:ser>
+        <c:ser>
+          <c:idx val="1"/>
+          <c:order val="1"/>
+          <c:tx>
+            <c:strRef>
+              <c:f>Sheet1!$C$1</c:f>
+              <c:strCache>
+                <c:ptCount val="1"/>
+                <c:pt idx="0">
+                  <c:v>ROC-AUC</c:v>
+                </c:pt>
+              </c:strCache>
+            </c:strRef>
+          </c:tx>
+          <c:spPr>
+            <a:solidFill>
+              <a:srgbClr val="157A80"/>
+            </a:solidFill>
+          </c:spPr>
+          <c:invertIfNegative val="0"/>
+          <c:cat>
+            <c:strRef>
+              <c:f>Sheet1!$A$2:$A$5</c:f>
+              <c:strCache>
+                <c:ptCount val="4"/>
+                <c:pt idx="0">
+                  <c:v>Dummy</c:v>
+                </c:pt>
+                <c:pt idx="1">
+                  <c:v>LightGBM, metadata</c:v>
+                </c:pt>
+                <c:pt idx="2">
+                  <c:v>LightGBM + text components</c:v>
+                </c:pt>
+                <c:pt idx="3">
+                  <c:v>Logistic Reg., full text</c:v>
+                </c:pt>
+              </c:strCache>
+            </c:strRef>
+          </c:cat>
+          <c:val>
+            <c:numRef>
+              <c:f>Sheet1!$C$2:$C$5</c:f>
+              <c:numCache>
+                <c:formatCode>General</c:formatCode>
+                <c:ptCount val="4"/>
+                <c:pt idx="0">
+                  <c:v>0.5</c:v>
+                </c:pt>
+                <c:pt idx="1">
+                  <c:v>0.758</c:v>
+                </c:pt>
+                <c:pt idx="2">
+                  <c:v>0.895</c:v>
+                </c:pt>
+                <c:pt idx="3">
+                  <c:v>0.971</c:v>
+                </c:pt>
+              </c:numCache>
+            </c:numRef>
+          </c:val>
+        </c:ser>
+        <c:dLbls>
+          <c:numFmt formatCode="0.00" sourceLinked="0"/>
+          <c:txPr>
+            <a:bodyPr/>
+            <a:lstStyle/>
+            <a:p>
+              <a:pPr>
+                <a:defRPr sz="1100"/>
+              </a:pPr>
+            </a:p>
+          </c:txPr>
+          <c:dLblPos val="outEnd"/>
+          <c:showLegendKey val="0"/>
+          <c:showVal val="1"/>
+          <c:showCatName val="0"/>
+          <c:showSerName val="0"/>
+          <c:showPercent val="0"/>
+          <c:showBubbleSize val="0"/>
+          <c:showLeaderLines val="1"/>
+        </c:dLbls>
+        <c:gapWidth val="55"/>
+        <c:axId val="-2068027336"/>
+        <c:axId val="-2113994440"/>
+      </c:barChart>
+      <c:catAx>
+        <c:axId val="-2068027336"/>
+        <c:scaling>
+          <c:orientation val="minMax"/>
+        </c:scaling>
+        <c:delete val="0"/>
+        <c:axPos val="b"/>
+        <c:majorTickMark val="out"/>
+        <c:minorTickMark val="none"/>
+        <c:tickLblPos val="nextTo"/>
+        <c:spPr>
+          <a:ln>
+            <a:solidFill>
+              <a:srgbClr val="C9D6E2"/>
+            </a:solidFill>
+          </a:ln>
+        </c:spPr>
+        <c:txPr>
+          <a:bodyPr/>
+          <a:lstStyle/>
+          <a:p>
+            <a:pPr>
+              <a:defRPr sz="1100"/>
+            </a:pPr>
+          </a:p>
+        </c:txPr>
+        <c:crossAx val="-2113994440"/>
+        <c:crosses val="autoZero"/>
+        <c:auto val="1"/>
+        <c:lblAlgn val="ctr"/>
+        <c:lblOffset val="100"/>
+        <c:noMultiLvlLbl val="0"/>
+      </c:catAx>
+      <c:valAx>
+        <c:axId val="-2113994440"/>
+        <c:scaling>
+          <c:max val="1.15"/>
+          <c:min val="0.0"/>
+        </c:scaling>
+        <c:delete/>
+        <c:axPos val="l"/>
+        <c:majorTickMark val="out"/>
+        <c:minorTickMark val="none"/>
+        <c:tickLblPos val="nextTo"/>
+        <c:crossAx val="-2068027336"/>
+        <c:crosses val="autoZero"/>
+      </c:valAx>
+    </c:plotArea>
+    <c:legend>
+      <c:legendPos val="b"/>
+      <c:overlay val="0"/>
+    </c:legend>
+    <c:dispBlanksAs val="gap"/>
+  </c:chart>
+  <c:txPr>
+    <a:bodyPr/>
+    <a:lstStyle/>
+    <a:p>
+      <a:pPr>
+        <a:defRPr sz="1100">
+          <a:latin typeface="Arial"/>
+        </a:defRPr>
+      </a:pPr>
+      <a:endParaRPr lang="en-US"/>
+    </a:p>
+  </c:txPr>
+  <c:externalData r:id="rId1">
+    <c:autoUpdate val="0"/>
+  </c:externalData>
+</c:chartSpace>
+</file>
+
+<file path=ppt/charts/chart7.xml><?xml version="1.0" encoding="utf-8"?>
+<c:chartSpace xmlns:c="http://schemas.openxmlformats.org/drawingml/2006/chart" xmlns:a="http://schemas.openxmlformats.org/drawingml/2006/main" xmlns:r="http://schemas.openxmlformats.org/officeDocument/2006/relationships">
+  <c:date1904 val="0"/>
+  <c:chart>
+    <c:title>
+      <c:tx>
+        <c:rich>
+          <a:bodyPr/>
+          <a:lstStyle/>
+          <a:p>
+            <a:r>
+              <a:rPr sz="1100" b="1">
+                <a:solidFill>
+                  <a:srgbClr val="142D4E"/>
+                </a:solidFill>
+                <a:latin typeface="Arial"/>
+              </a:rPr>
+              <a:t>Main complaint theme of negative reviews (%)</a:t>
+            </a:r>
+          </a:p>
+        </c:rich>
+      </c:tx>
+      <c:layout/>
+      <c:overlay val="0"/>
+    </c:title>
+    <c:autoTitleDeleted val="0"/>
+    <c:plotArea>
+      <c:barChart>
+        <c:barDir val="col"/>
+        <c:grouping val="clustered"/>
+        <c:ser>
+          <c:idx val="0"/>
+          <c:order val="0"/>
+          <c:tx>
+            <c:strRef>
+              <c:f>Sheet1!$B$1</c:f>
+              <c:strCache>
+                <c:ptCount val="1"/>
+                <c:pt idx="0">
+                  <c:v>under 2 h</c:v>
+                </c:pt>
+              </c:strCache>
+            </c:strRef>
+          </c:tx>
+          <c:spPr>
+            <a:solidFill>
+              <a:srgbClr val="C44E52"/>
+            </a:solidFill>
+          </c:spPr>
+          <c:invertIfNegative val="0"/>
+          <c:cat>
+            <c:strRef>
+              <c:f>Sheet1!$A$2:$A$6</c:f>
+              <c:strCache>
+                <c:ptCount val="5"/>
+                <c:pt idx="0">
+                  <c:v>Multiplayer, crashes</c:v>
+                </c:pt>
+                <c:pt idx="1">
+                  <c:v>Boss and difficulty</c:v>
+                </c:pt>
+                <c:pt idx="2">
+                  <c:v>Art vs gameplay loop</c:v>
+                </c:pt>
+                <c:pt idx="3">
+                  <c:v>Replayability, co-op</c:v>
+                </c:pt>
+                <c:pt idx="4">
+                  <c:v>Repetitive, grind</c:v>
+                </c:pt>
+              </c:strCache>
+            </c:strRef>
+          </c:cat>
+          <c:val>
+            <c:numRef>
+              <c:f>Sheet1!$B$2:$B$6</c:f>
+              <c:numCache>
+                <c:formatCode>General</c:formatCode>
+                <c:ptCount val="5"/>
+                <c:pt idx="0">
+                  <c:v>28.668791909420687</c:v>
+                </c:pt>
+                <c:pt idx="1">
+                  <c:v>25.14015609541607</c:v>
+                </c:pt>
+                <c:pt idx="2">
+                  <c:v>22.2381004726833</c:v>
+                </c:pt>
+                <c:pt idx="3">
+                  <c:v>7.35407277124326</c:v>
+                </c:pt>
+                <c:pt idx="4">
+                  <c:v>5.67219962625041</c:v>
+                </c:pt>
+              </c:numCache>
+            </c:numRef>
+          </c:val>
+        </c:ser>
+        <c:ser>
+          <c:idx val="1"/>
+          <c:order val="1"/>
+          <c:tx>
+            <c:strRef>
+              <c:f>Sheet1!$C$1</c:f>
+              <c:strCache>
+                <c:ptCount val="1"/>
+                <c:pt idx="0">
+                  <c:v>2 h or more</c:v>
+                </c:pt>
+              </c:strCache>
+            </c:strRef>
+          </c:tx>
+          <c:spPr>
+            <a:solidFill>
+              <a:srgbClr val="8C99A6"/>
+            </a:solidFill>
+          </c:spPr>
+          <c:invertIfNegative val="0"/>
+          <c:cat>
+            <c:strRef>
+              <c:f>Sheet1!$A$2:$A$6</c:f>
+              <c:strCache>
+                <c:ptCount val="5"/>
+                <c:pt idx="0">
+                  <c:v>Multiplayer, crashes</c:v>
+                </c:pt>
+                <c:pt idx="1">
+                  <c:v>Boss and difficulty</c:v>
+                </c:pt>
+                <c:pt idx="2">
+                  <c:v>Art vs gameplay loop</c:v>
+                </c:pt>
+                <c:pt idx="3">
+                  <c:v>Replayability, co-op</c:v>
+                </c:pt>
+                <c:pt idx="4">
+                  <c:v>Repetitive, grind</c:v>
+                </c:pt>
+              </c:strCache>
+            </c:strRef>
+          </c:cat>
+          <c:val>
+            <c:numRef>
+              <c:f>Sheet1!$C$2:$C$6</c:f>
+              <c:numCache>
+                <c:formatCode>General</c:formatCode>
+                <c:ptCount val="5"/>
+                <c:pt idx="0">
+                  <c:v>23.52386342199585</c:v>
+                </c:pt>
+                <c:pt idx="1">
+                  <c:v>34.12563667232597</c:v>
+                </c:pt>
+                <c:pt idx="2">
+                  <c:v>17.688486449097653</c:v>
+                </c:pt>
+                <c:pt idx="3">
+                  <c:v>10.46972269383135</c:v>
+                </c:pt>
+                <c:pt idx="4">
+                  <c:v>4.04955039929573</c:v>
+                </c:pt>
+              </c:numCache>
+            </c:numRef>
+          </c:val>
+        </c:ser>
+        <c:dLbls>
+          <c:numFmt formatCode="0&quot;%&quot;" sourceLinked="0"/>
+          <c:txPr>
+            <a:bodyPr/>
+            <a:lstStyle/>
+            <a:p>
+              <a:pPr>
+                <a:defRPr sz="1000"/>
+              </a:pPr>
+            </a:p>
+          </c:txPr>
+          <c:dLblPos val="outEnd"/>
+          <c:showLegendKey val="0"/>
+          <c:showVal val="1"/>
+          <c:showCatName val="0"/>
+          <c:showSerName val="0"/>
+          <c:showPercent val="0"/>
+          <c:showBubbleSize val="0"/>
+          <c:showLeaderLines val="1"/>
+        </c:dLbls>
+        <c:gapWidth val="55"/>
+        <c:axId val="-2068027336"/>
+        <c:axId val="-2113994440"/>
+      </c:barChart>
+      <c:catAx>
+        <c:axId val="-2068027336"/>
+        <c:scaling>
+          <c:orientation val="minMax"/>
+        </c:scaling>
+        <c:delete val="0"/>
+        <c:axPos val="b"/>
+        <c:majorTickMark val="out"/>
+        <c:minorTickMark val="none"/>
+        <c:tickLblPos val="nextTo"/>
+        <c:spPr>
+          <a:ln>
+            <a:solidFill>
+              <a:srgbClr val="C9D6E2"/>
+            </a:solidFill>
+          </a:ln>
+        </c:spPr>
+        <c:txPr>
+          <a:bodyPr/>
+          <a:lstStyle/>
+          <a:p>
+            <a:pPr>
+              <a:defRPr sz="1000"/>
+            </a:pPr>
+          </a:p>
+        </c:txPr>
+        <c:crossAx val="-2113994440"/>
+        <c:crosses val="autoZero"/>
+        <c:auto val="1"/>
+        <c:lblAlgn val="ctr"/>
+        <c:lblOffset val="100"/>
+        <c:noMultiLvlLbl val="0"/>
+      </c:catAx>
+      <c:valAx>
+        <c:axId val="-2113994440"/>
+        <c:scaling>
+          <c:max val="45.0"/>
+          <c:min val="0.0"/>
+        </c:scaling>
+        <c:delete/>
+        <c:axPos val="l"/>
+        <c:majorTickMark val="out"/>
+        <c:minorTickMark val="none"/>
+        <c:tickLblPos val="nextTo"/>
+        <c:crossAx val="-2068027336"/>
+        <c:crosses val="autoZero"/>
+      </c:valAx>
+    </c:plotArea>
+    <c:legend>
+      <c:legendPos val="b"/>
+      <c:overlay val="0"/>
+    </c:legend>
+    <c:dispBlanksAs val="gap"/>
+  </c:chart>
+  <c:txPr>
+    <a:bodyPr/>
+    <a:lstStyle/>
+    <a:p>
+      <a:pPr>
+        <a:defRPr sz="1000">
+          <a:latin typeface="Arial"/>
+        </a:defRPr>
+      </a:pPr>
+      <a:endParaRPr lang="en-US"/>
+    </a:p>
+  </c:txPr>
+  <c:externalData r:id="rId1">
+    <c:autoUpdate val="0"/>
+  </c:externalData>
+</c:chartSpace>
+</file>
+
+<file path=ppt/charts/chart8.xml><?xml version="1.0" encoding="utf-8"?>
+<c:chartSpace xmlns:c="http://schemas.openxmlformats.org/drawingml/2006/chart" xmlns:a="http://schemas.openxmlformats.org/drawingml/2006/main" xmlns:r="http://schemas.openxmlformats.org/officeDocument/2006/relationships">
+  <c:date1904 val="0"/>
+  <c:chart>
+    <c:title>
+      <c:tx>
+        <c:rich>
+          <a:bodyPr/>
+          <a:lstStyle/>
+          <a:p>
+            <a:r>
+              <a:rPr sz="1000" b="1">
+                <a:solidFill>
+                  <a:srgbClr val="142D4E"/>
+                </a:solidFill>
+                <a:latin typeface="Arial"/>
+              </a:rPr>
+              <a:t>Top 8 Strong rules by lift: share of games in the Strong tier (%)</a:t>
+            </a:r>
+          </a:p>
+        </c:rich>
+      </c:tx>
+      <c:layout/>
+      <c:overlay val="0"/>
+    </c:title>
+    <c:autoTitleDeleted val="0"/>
+    <c:plotArea>
+      <c:barChart>
+        <c:barDir val="bar"/>
+        <c:grouping val="clustered"/>
+        <c:ser>
+          <c:idx val="0"/>
+          <c:order val="0"/>
+          <c:tx>
+            <c:strRef>
+              <c:f>Sheet1!$B$1</c:f>
+              <c:strCache>
+                <c:ptCount val="1"/>
+                <c:pt idx="0">
+                  <c:v>training games</c:v>
+                </c:pt>
+              </c:strCache>
+            </c:strRef>
+          </c:tx>
+          <c:spPr>
+            <a:solidFill>
+              <a:srgbClr val="142D4E"/>
+            </a:solidFill>
+          </c:spPr>
+          <c:invertIfNegative val="0"/>
+          <c:cat>
+            <c:strRef>
+              <c:f>Sheet1!$A$2:$A$9</c:f>
+              <c:strCache>
+                <c:ptCount val="8"/>
+                <c:pt idx="0">
+                  <c:v>Pixel Graphics + Retro + Shooter</c:v>
+                </c:pt>
+                <c:pt idx="1">
+                  <c:v>Pixel Graphics + Puzzle</c:v>
+                </c:pt>
+                <c:pt idx="2">
+                  <c:v>2D + Bullet Hell + Procedural Generation</c:v>
+                </c:pt>
+                <c:pt idx="3">
+                  <c:v>Retro + Shooter</c:v>
+                </c:pt>
+                <c:pt idx="4">
+                  <c:v>Procedural Generation + Retro</c:v>
+                </c:pt>
+                <c:pt idx="5">
+                  <c:v>Arcade + Retro + Roguelite</c:v>
+                </c:pt>
+                <c:pt idx="6">
+                  <c:v>price &lt;$5 + Retro + Roguelite</c:v>
+                </c:pt>
+                <c:pt idx="7">
+                  <c:v>price &lt;$5 + Action Roguelike + Procedural Generation</c:v>
+                </c:pt>
+              </c:strCache>
+            </c:strRef>
+          </c:cat>
+          <c:val>
+            <c:numRef>
+              <c:f>Sheet1!$B$2:$B$9</c:f>
+              <c:numCache>
+                <c:formatCode>General</c:formatCode>
+                <c:ptCount val="8"/>
+                <c:pt idx="0">
+                  <c:v>80.0</c:v>
+                </c:pt>
+                <c:pt idx="1">
+                  <c:v>76.92307692307693</c:v>
+                </c:pt>
+                <c:pt idx="2">
+                  <c:v>72.41379310344827</c:v>
+                </c:pt>
+                <c:pt idx="3">
+                  <c:v>71.42857142857143</c:v>
+                </c:pt>
+                <c:pt idx="4">
+                  <c:v>67.44186046511628</c:v>
+                </c:pt>
+                <c:pt idx="5">
+                  <c:v>67.3076923076923</c:v>
+                </c:pt>
+                <c:pt idx="6">
+                  <c:v>66.66666666666666</c:v>
+                </c:pt>
+                <c:pt idx="7">
+                  <c:v>66.66666666666666</c:v>
+                </c:pt>
+              </c:numCache>
+            </c:numRef>
+          </c:val>
+        </c:ser>
+        <c:ser>
+          <c:idx val="1"/>
+          <c:order val="1"/>
+          <c:tx>
+            <c:strRef>
+              <c:f>Sheet1!$C$1</c:f>
+              <c:strCache>
+                <c:ptCount val="1"/>
+                <c:pt idx="0">
+                  <c:v>test games</c:v>
+                </c:pt>
+              </c:strCache>
+            </c:strRef>
+          </c:tx>
+          <c:spPr>
+            <a:solidFill>
+              <a:srgbClr val="C44E52"/>
+            </a:solidFill>
+          </c:spPr>
+          <c:invertIfNegative val="0"/>
+          <c:cat>
+            <c:strRef>
+              <c:f>Sheet1!$A$2:$A$9</c:f>
+              <c:strCache>
+                <c:ptCount val="8"/>
+                <c:pt idx="0">
+                  <c:v>Pixel Graphics + Retro + Shooter</c:v>
+                </c:pt>
+                <c:pt idx="1">
+                  <c:v>Pixel Graphics + Puzzle</c:v>
+                </c:pt>
+                <c:pt idx="2">
+                  <c:v>2D + Bullet Hell + Procedural Generation</c:v>
+                </c:pt>
+                <c:pt idx="3">
+                  <c:v>Retro + Shooter</c:v>
+                </c:pt>
+                <c:pt idx="4">
+                  <c:v>Procedural Generation + Retro</c:v>
+                </c:pt>
+                <c:pt idx="5">
+                  <c:v>Arcade + Retro + Roguelite</c:v>
+                </c:pt>
+                <c:pt idx="6">
+                  <c:v>price &lt;$5 + Retro + Roguelite</c:v>
+                </c:pt>
+                <c:pt idx="7">
+                  <c:v>price &lt;$5 + Action Roguelike + Procedural Generation</c:v>
+                </c:pt>
+              </c:strCache>
+            </c:strRef>
+          </c:cat>
+          <c:val>
+            <c:numRef>
+              <c:f>Sheet1!$C$2:$C$9</c:f>
+              <c:numCache>
+                <c:formatCode>General</c:formatCode>
+                <c:ptCount val="8"/>
+                <c:pt idx="0">
+                  <c:v>75.0</c:v>
+                </c:pt>
+                <c:pt idx="1">
+                  <c:v>62.5</c:v>
+                </c:pt>
+                <c:pt idx="2">
+                  <c:v>27.27272727272727</c:v>
+                </c:pt>
+                <c:pt idx="3">
+                  <c:v>50.0</c:v>
+                </c:pt>
+                <c:pt idx="4">
+                  <c:v>57.14285714285714</c:v>
+                </c:pt>
+                <c:pt idx="5">
+                  <c:v>54.54545454545454</c:v>
+                </c:pt>
+                <c:pt idx="6">
+                  <c:v>28.57142857142857</c:v>
+                </c:pt>
+                <c:pt idx="7">
+                  <c:v>36.36363636363636</c:v>
+                </c:pt>
+              </c:numCache>
+            </c:numRef>
+          </c:val>
+        </c:ser>
+        <c:dLbls>
+          <c:numFmt formatCode="0&quot;%&quot;" sourceLinked="0"/>
+          <c:txPr>
+            <a:bodyPr/>
+            <a:lstStyle/>
+            <a:p>
+              <a:pPr>
+                <a:defRPr sz="900"/>
+              </a:pPr>
+            </a:p>
+          </c:txPr>
+          <c:dLblPos val="outEnd"/>
+          <c:showLegendKey val="0"/>
+          <c:showVal val="1"/>
+          <c:showCatName val="0"/>
+          <c:showSerName val="0"/>
+          <c:showPercent val="0"/>
+          <c:showBubbleSize val="0"/>
+          <c:showLeaderLines val="1"/>
+        </c:dLbls>
+        <c:gapWidth val="55"/>
+        <c:axId val="-2068027336"/>
+        <c:axId val="-2113994440"/>
+      </c:barChart>
+      <c:catAx>
+        <c:axId val="-2068027336"/>
+        <c:scaling>
+          <c:orientation val="maxMin"/>
+        </c:scaling>
+        <c:delete val="0"/>
+        <c:axPos val="l"/>
+        <c:majorTickMark val="out"/>
+        <c:minorTickMark val="none"/>
+        <c:tickLblPos val="nextTo"/>
+        <c:spPr>
+          <a:ln>
+            <a:solidFill>
+              <a:srgbClr val="C9D6E2"/>
+            </a:solidFill>
+          </a:ln>
+        </c:spPr>
+        <c:txPr>
+          <a:bodyPr/>
+          <a:lstStyle/>
+          <a:p>
+            <a:pPr>
+              <a:defRPr sz="900"/>
+            </a:pPr>
+          </a:p>
+        </c:txPr>
+        <c:crossAx val="-2113994440"/>
+        <c:crosses val="autoZero"/>
+        <c:auto val="1"/>
+        <c:lblAlgn val="ctr"/>
+        <c:lblOffset val="100"/>
+        <c:noMultiLvlLbl val="0"/>
+      </c:catAx>
+      <c:valAx>
+        <c:axId val="-2113994440"/>
+        <c:scaling>
+          <c:max val="100.0"/>
+          <c:min val="0.0"/>
+        </c:scaling>
+        <c:delete/>
+        <c:axPos val="b"/>
+        <c:majorTickMark val="out"/>
+        <c:minorTickMark val="none"/>
+        <c:tickLblPos val="nextTo"/>
+        <c:crossAx val="-2068027336"/>
+        <c:crosses val="autoZero"/>
+      </c:valAx>
+    </c:plotArea>
+    <c:legend>
+      <c:legendPos val="b"/>
+      <c:overlay val="0"/>
+    </c:legend>
+    <c:dispBlanksAs val="gap"/>
+  </c:chart>
+  <c:txPr>
+    <a:bodyPr/>
+    <a:lstStyle/>
+    <a:p>
+      <a:pPr>
+        <a:defRPr sz="900">
+          <a:latin typeface="Arial"/>
+        </a:defRPr>
+      </a:pPr>
+      <a:endParaRPr lang="en-US"/>
+    </a:p>
+  </c:txPr>
+  <c:externalData r:id="rId1">
+    <c:autoUpdate val="0"/>
+  </c:externalData>
+</c:chartSpace>
+</file>
+
+<file path=ppt/charts/chart9.xml><?xml version="1.0" encoding="utf-8"?>
+<c:chartSpace xmlns:c="http://schemas.openxmlformats.org/drawingml/2006/chart" xmlns:a="http://schemas.openxmlformats.org/drawingml/2006/main" xmlns:r="http://schemas.openxmlformats.org/officeDocument/2006/relationships">
+  <c:date1904 val="0"/>
+  <c:chart>
+    <c:title>
+      <c:tx>
+        <c:rich>
+          <a:bodyPr/>
+          <a:lstStyle/>
+          <a:p>
+            <a:r>
+              <a:rPr sz="1000" b="1">
+                <a:solidFill>
+                  <a:srgbClr val="142D4E"/>
+                </a:solidFill>
+                <a:latin typeface="Arial"/>
+              </a:rPr>
+              <a:t>Rules that still hold on test games (%)</a:t>
+            </a:r>
+          </a:p>
+        </c:rich>
+      </c:tx>
+      <c:layout/>
+      <c:overlay val="0"/>
+    </c:title>
+    <c:autoTitleDeleted val="0"/>
+    <c:plotArea>
+      <c:barChart>
+        <c:barDir val="col"/>
+        <c:grouping val="clustered"/>
+        <c:ser>
+          <c:idx val="0"/>
+          <c:order val="0"/>
+          <c:tx>
+            <c:strRef>
+              <c:f>Sheet1!$B$1</c:f>
+              <c:strCache>
+                <c:ptCount val="1"/>
+                <c:pt idx="0">
+                  <c:v>hold on test</c:v>
+                </c:pt>
+              </c:strCache>
+            </c:strRef>
+          </c:tx>
+          <c:spPr>
+            <a:solidFill>
+              <a:srgbClr val="157A80"/>
+            </a:solidFill>
+          </c:spPr>
+          <c:invertIfNegative val="0"/>
+          <c:cat>
+            <c:strRef>
+              <c:f>Sheet1!$A$2:$A$7</c:f>
+              <c:strCache>
+                <c:ptCount val="6"/>
+                <c:pt idx="0">
+                  <c:v>chosen</c:v>
+                </c:pt>
+                <c:pt idx="1">
+                  <c:v>Apriori</c:v>
+                </c:pt>
+                <c:pt idx="2">
+                  <c:v>support 15</c:v>
+                </c:pt>
+                <c:pt idx="3">
+                  <c:v>support 40</c:v>
+                </c:pt>
+                <c:pt idx="4">
+                  <c:v>pairs only</c:v>
+                </c:pt>
+                <c:pt idx="5">
+                  <c:v>+ after-play</c:v>
+                </c:pt>
+              </c:strCache>
+            </c:strRef>
+          </c:cat>
+          <c:val>
+            <c:numRef>
+              <c:f>Sheet1!$B$2:$B$7</c:f>
+              <c:numCache>
+                <c:formatCode>General</c:formatCode>
+                <c:ptCount val="6"/>
+                <c:pt idx="0">
+                  <c:v>68.18181818181817</c:v>
+                </c:pt>
+                <c:pt idx="1">
+                  <c:v>68.18181818181817</c:v>
+                </c:pt>
+                <c:pt idx="2">
+                  <c:v>66.07142857142857</c:v>
+                </c:pt>
+                <c:pt idx="3">
+                  <c:v>69.49152542372882</c:v>
+                </c:pt>
+                <c:pt idx="4">
+                  <c:v>83.33333333333334</c:v>
+                </c:pt>
+                <c:pt idx="5">
+                  <c:v>69.31818181818183</c:v>
+                </c:pt>
+              </c:numCache>
+            </c:numRef>
+          </c:val>
+        </c:ser>
+        <c:dLbls>
+          <c:numFmt formatCode="0&quot;%&quot;" sourceLinked="0"/>
+          <c:txPr>
+            <a:bodyPr/>
+            <a:lstStyle/>
+            <a:p>
+              <a:pPr>
+                <a:defRPr sz="900"/>
+              </a:pPr>
+            </a:p>
+          </c:txPr>
+          <c:dLblPos val="outEnd"/>
+          <c:showLegendKey val="0"/>
+          <c:showVal val="1"/>
+          <c:showCatName val="0"/>
+          <c:showSerName val="0"/>
+          <c:showPercent val="0"/>
+          <c:showBubbleSize val="0"/>
+          <c:showLeaderLines val="1"/>
+        </c:dLbls>
+        <c:gapWidth val="55"/>
+        <c:axId val="-2068027336"/>
+        <c:axId val="-2113994440"/>
+      </c:barChart>
+      <c:catAx>
+        <c:axId val="-2068027336"/>
+        <c:scaling>
+          <c:orientation val="minMax"/>
+        </c:scaling>
+        <c:delete val="0"/>
+        <c:axPos val="b"/>
+        <c:majorTickMark val="out"/>
+        <c:minorTickMark val="none"/>
+        <c:tickLblPos val="nextTo"/>
+        <c:spPr>
+          <a:ln>
+            <a:solidFill>
+              <a:srgbClr val="C9D6E2"/>
+            </a:solidFill>
+          </a:ln>
+        </c:spPr>
+        <c:txPr>
+          <a:bodyPr/>
+          <a:lstStyle/>
+          <a:p>
+            <a:pPr>
+              <a:defRPr sz="900"/>
+            </a:pPr>
+          </a:p>
+        </c:txPr>
+        <c:crossAx val="-2113994440"/>
+        <c:crosses val="autoZero"/>
+        <c:auto val="1"/>
+        <c:lblAlgn val="ctr"/>
+        <c:lblOffset val="100"/>
+        <c:noMultiLvlLbl val="0"/>
+      </c:catAx>
+      <c:valAx>
+        <c:axId val="-2113994440"/>
+        <c:scaling>
+          <c:max val="100.0"/>
           <c:min val="0.0"/>
         </c:scaling>
         <c:delete/>
@@ -1177,7 +2638,7 @@
           <a:lstStyle xmlns:a="http://schemas.openxmlformats.org/drawingml/2006/main"/>
           <a:p xmlns:a="http://schemas.openxmlformats.org/drawingml/2006/main">
             <a:r>
-              <a:t>Suggested speaker: Tejaswini. 1:05.</a:t>
+              <a:t>Suggested speaker: Tejaswini. 0:55.</a:t>
             </a:r>
           </a:p>
           <a:p xmlns:a="http://schemas.openxmlformats.org/drawingml/2006/main">
@@ -1257,7 +2718,7 @@
           </a:p>
           <a:p xmlns:a="http://schemas.openxmlformats.org/drawingml/2006/main">
             <a:r>
-              <a:t>Transactions, thresholds and the train-then-test protocol. Support, confidence and lift are defined on slide 13's table and in notebooks/review2/association_rules.ipynb.</a:t>
+              <a:t>Transactions, thresholds and the train-then-test protocol. Support, confidence and lift are defined on slide 16's table and in notebooks/review2/association_rules.ipynb.</a:t>
             </a:r>
           </a:p>
         </p:txBody>
@@ -1327,7 +2788,7 @@
           <a:lstStyle xmlns:a="http://schemas.openxmlformats.org/drawingml/2006/main"/>
           <a:p xmlns:a="http://schemas.openxmlformats.org/drawingml/2006/main">
             <a:r>
-              <a:t>Suggested speaker: Pradeep. 1:05.</a:t>
+              <a:t>Suggested speaker: Pradeep. 0:55.</a:t>
             </a:r>
           </a:p>
           <a:p xmlns:a="http://schemas.openxmlformats.org/drawingml/2006/main">
@@ -1662,6 +3123,156 @@
 </p:notes>
 </file>
 
+<file path=ppt/notesSlides/notesSlide18.xml><?xml version="1.0" encoding="utf-8"?>
+<p:notes xmlns:a="http://schemas.openxmlformats.org/drawingml/2006/main" xmlns:p="http://schemas.openxmlformats.org/presentationml/2006/main" xmlns:r="http://schemas.openxmlformats.org/officeDocument/2006/relationships">
+  <p:cSld>
+    <p:spTree>
+      <p:nvGrpSpPr>
+        <p:cNvPr id="1" name=""/>
+        <p:cNvGrpSpPr/>
+        <p:nvPr/>
+      </p:nvGrpSpPr>
+      <p:grpSpPr>
+        <a:xfrm>
+          <a:off x="0" y="0"/>
+          <a:ext cx="0" cy="0"/>
+          <a:chOff x="0" y="0"/>
+          <a:chExt cx="0" cy="0"/>
+        </a:xfrm>
+      </p:grpSpPr>
+      <p:sp>
+        <p:nvSpPr>
+          <p:cNvPr id="2" name="Slide Image Placeholder 1"/>
+          <p:cNvSpPr>
+            <a:spLocks noGrp="1"/>
+          </p:cNvSpPr>
+          <p:nvPr>
+            <p:ph type="sldImg" idx="2"/>
+          </p:nvPr>
+        </p:nvSpPr>
+        <p:spPr/>
+      </p:sp>
+      <p:sp>
+        <p:nvSpPr>
+          <p:cNvPr id="3" name="Notes Placeholder 2"/>
+          <p:cNvSpPr>
+            <a:spLocks noGrp="1"/>
+          </p:cNvSpPr>
+          <p:nvPr>
+            <p:ph type="body" idx="3" sz="quarter"/>
+          </p:nvPr>
+        </p:nvSpPr>
+        <p:spPr/>
+        <p:txBody>
+          <a:bodyPr/>
+          <a:lstStyle/>
+          <a:p>
+            <a:r>
+              <a:t>Suggested speaker: Pradeep. 0:20.</a:t>
+            </a:r>
+          </a:p>
+          <a:p>
+            <a:r>
+              <a:t>Same numbers as the table, drawn as bars. Compare each bar with the guessing baseline, not with 1.0.</a:t>
+            </a:r>
+          </a:p>
+        </p:txBody>
+      </p:sp>
+      <p:sp>
+        <p:nvSpPr>
+          <p:cNvPr id="4" name="Slide Number Placeholder 3"/>
+          <p:cNvSpPr>
+            <a:spLocks noGrp="1"/>
+          </p:cNvSpPr>
+          <p:nvPr>
+            <p:ph type="sldNum" idx="5" sz="quarter"/>
+          </p:nvPr>
+        </p:nvSpPr>
+        <p:spPr/>
+      </p:sp>
+    </p:spTree>
+  </p:cSld>
+  <p:clrMapOvr>
+    <a:masterClrMapping/>
+  </p:clrMapOvr>
+</p:notes>
+</file>
+
+<file path=ppt/notesSlides/notesSlide19.xml><?xml version="1.0" encoding="utf-8"?>
+<p:notes xmlns:a="http://schemas.openxmlformats.org/drawingml/2006/main" xmlns:p="http://schemas.openxmlformats.org/presentationml/2006/main" xmlns:r="http://schemas.openxmlformats.org/officeDocument/2006/relationships">
+  <p:cSld>
+    <p:spTree>
+      <p:nvGrpSpPr>
+        <p:cNvPr id="1" name=""/>
+        <p:cNvGrpSpPr/>
+        <p:nvPr/>
+      </p:nvGrpSpPr>
+      <p:grpSpPr>
+        <a:xfrm>
+          <a:off x="0" y="0"/>
+          <a:ext cx="0" cy="0"/>
+          <a:chOff x="0" y="0"/>
+          <a:chExt cx="0" cy="0"/>
+        </a:xfrm>
+      </p:grpSpPr>
+      <p:sp>
+        <p:nvSpPr>
+          <p:cNvPr id="2" name="Slide Image Placeholder 1"/>
+          <p:cNvSpPr>
+            <a:spLocks noGrp="1"/>
+          </p:cNvSpPr>
+          <p:nvPr>
+            <p:ph type="sldImg" idx="2"/>
+          </p:nvPr>
+        </p:nvSpPr>
+        <p:spPr/>
+      </p:sp>
+      <p:sp>
+        <p:nvSpPr>
+          <p:cNvPr id="3" name="Notes Placeholder 2"/>
+          <p:cNvSpPr>
+            <a:spLocks noGrp="1"/>
+          </p:cNvSpPr>
+          <p:nvPr>
+            <p:ph type="body" idx="3" sz="quarter"/>
+          </p:nvPr>
+        </p:nvSpPr>
+        <p:spPr/>
+        <p:txBody>
+          <a:bodyPr/>
+          <a:lstStyle/>
+          <a:p>
+            <a:r>
+              <a:t>Suggested speaker: Tejaswini. 0:20.</a:t>
+            </a:r>
+          </a:p>
+          <a:p>
+            <a:r>
+              <a:t>Left: same test reviews, four approaches. Right: the topic model's dominant theme among negative reviews, early against later; treat the themes as exploratory.</a:t>
+            </a:r>
+          </a:p>
+        </p:txBody>
+      </p:sp>
+      <p:sp>
+        <p:nvSpPr>
+          <p:cNvPr id="4" name="Slide Number Placeholder 3"/>
+          <p:cNvSpPr>
+            <a:spLocks noGrp="1"/>
+          </p:cNvSpPr>
+          <p:nvPr>
+            <p:ph type="sldNum" idx="5" sz="quarter"/>
+          </p:nvPr>
+        </p:nvSpPr>
+        <p:spPr/>
+      </p:sp>
+    </p:spTree>
+  </p:cSld>
+  <p:clrMapOvr>
+    <a:masterClrMapping/>
+  </p:clrMapOvr>
+</p:notes>
+</file>
+
 <file path=ppt/notesSlides/notesSlide2.xml><?xml version="1.0" encoding="utf-8"?>
 <p:notes xmlns:p="http://schemas.openxmlformats.org/presentationml/2006/main">
   <p:cSld>
@@ -1733,6 +3344,81 @@
   </p:cSld>
   <p:clrMapOvr>
     <a:masterClrMapping xmlns:a="http://schemas.openxmlformats.org/drawingml/2006/main"/>
+  </p:clrMapOvr>
+</p:notes>
+</file>
+
+<file path=ppt/notesSlides/notesSlide20.xml><?xml version="1.0" encoding="utf-8"?>
+<p:notes xmlns:a="http://schemas.openxmlformats.org/drawingml/2006/main" xmlns:p="http://schemas.openxmlformats.org/presentationml/2006/main" xmlns:r="http://schemas.openxmlformats.org/officeDocument/2006/relationships">
+  <p:cSld>
+    <p:spTree>
+      <p:nvGrpSpPr>
+        <p:cNvPr id="1" name=""/>
+        <p:cNvGrpSpPr/>
+        <p:nvPr/>
+      </p:nvGrpSpPr>
+      <p:grpSpPr>
+        <a:xfrm>
+          <a:off x="0" y="0"/>
+          <a:ext cx="0" cy="0"/>
+          <a:chOff x="0" y="0"/>
+          <a:chExt cx="0" cy="0"/>
+        </a:xfrm>
+      </p:grpSpPr>
+      <p:sp>
+        <p:nvSpPr>
+          <p:cNvPr id="2" name="Slide Image Placeholder 1"/>
+          <p:cNvSpPr>
+            <a:spLocks noGrp="1"/>
+          </p:cNvSpPr>
+          <p:nvPr>
+            <p:ph type="sldImg" idx="2"/>
+          </p:nvPr>
+        </p:nvSpPr>
+        <p:spPr/>
+      </p:sp>
+      <p:sp>
+        <p:nvSpPr>
+          <p:cNvPr id="3" name="Notes Placeholder 2"/>
+          <p:cNvSpPr>
+            <a:spLocks noGrp="1"/>
+          </p:cNvSpPr>
+          <p:nvPr>
+            <p:ph type="body" idx="3" sz="quarter"/>
+          </p:nvPr>
+        </p:nvSpPr>
+        <p:spPr/>
+        <p:txBody>
+          <a:bodyPr/>
+          <a:lstStyle/>
+          <a:p>
+            <a:r>
+              <a:t>Suggested speaker: Pradeep. 0:20.</a:t>
+            </a:r>
+          </a:p>
+          <a:p>
+            <a:r>
+              <a:t>Training bars come from the 1,191 training games, test bars from the 299 test games. Lower test bars are expected after picking the best rules on training data.</a:t>
+            </a:r>
+          </a:p>
+        </p:txBody>
+      </p:sp>
+      <p:sp>
+        <p:nvSpPr>
+          <p:cNvPr id="4" name="Slide Number Placeholder 3"/>
+          <p:cNvSpPr>
+            <a:spLocks noGrp="1"/>
+          </p:cNvSpPr>
+          <p:nvPr>
+            <p:ph type="sldNum" idx="5" sz="quarter"/>
+          </p:nvPr>
+        </p:nvSpPr>
+        <p:spPr/>
+      </p:sp>
+    </p:spTree>
+  </p:cSld>
+  <p:clrMapOvr>
+    <a:masterClrMapping/>
   </p:clrMapOvr>
 </p:notes>
 </file>
@@ -2152,7 +3838,7 @@
           <a:lstStyle xmlns:a="http://schemas.openxmlformats.org/drawingml/2006/main"/>
           <a:p xmlns:a="http://schemas.openxmlformats.org/drawingml/2006/main">
             <a:r>
-              <a:t>Suggested speaker: Pradeep. 1:05.</a:t>
+              <a:t>Suggested speaker: Pradeep. 0:50.</a:t>
             </a:r>
           </a:p>
           <a:p xmlns:a="http://schemas.openxmlformats.org/drawingml/2006/main">
@@ -5135,7 +6821,7 @@
                 <a:ea typeface="Arial"/>
                 <a:cs typeface="Arial"/>
               </a:rPr>
-              <a:t>10</a:t>
+              <a:t>11</a:t>
             </a:r>
           </a:p>
         </p:txBody>
@@ -6635,7 +8321,7 @@
                 <a:ea typeface="Arial"/>
                 <a:cs typeface="Arial"/>
               </a:rPr>
-              <a:t>11</a:t>
+              <a:t>13</a:t>
             </a:r>
           </a:p>
         </p:txBody>
@@ -7994,7 +9680,7 @@
                 <a:ea typeface="Arial"/>
                 <a:cs typeface="Arial"/>
               </a:rPr>
-              <a:t>12</a:t>
+              <a:t>14</a:t>
             </a:r>
           </a:p>
         </p:txBody>
@@ -9430,7 +11116,7 @@
                 <a:ea typeface="Arial"/>
                 <a:cs typeface="Arial"/>
               </a:rPr>
-              <a:t>13</a:t>
+              <a:t>16</a:t>
             </a:r>
           </a:p>
         </p:txBody>
@@ -11102,7 +12788,7 @@
                 <a:ea typeface="Arial"/>
                 <a:cs typeface="Arial"/>
               </a:rPr>
-              <a:t>14</a:t>
+              <a:t>17</a:t>
             </a:r>
           </a:p>
         </p:txBody>
@@ -11993,7 +13679,7 @@
                 <a:ea typeface="Arial"/>
                 <a:cs typeface="Arial"/>
               </a:rPr>
-              <a:t>15</a:t>
+              <a:t>18</a:t>
             </a:r>
           </a:p>
         </p:txBody>
@@ -12481,7 +14167,7 @@
                 <a:ea typeface="Arial"/>
                 <a:cs typeface="Arial"/>
               </a:rPr>
-              <a:t>16</a:t>
+              <a:t>19</a:t>
             </a:r>
           </a:p>
         </p:txBody>
@@ -13521,7 +15207,7 @@
                 <a:ea typeface="Arial"/>
                 <a:cs typeface="Arial"/>
               </a:rPr>
-              <a:t>17</a:t>
+              <a:t>20</a:t>
             </a:r>
           </a:p>
         </p:txBody>
@@ -13845,6 +15531,940 @@
       </p:ext>
     </p:extLst>
   </p:cSld>
+</p:sld>
+</file>
+
+<file path=ppt/slides/slide18.xml><?xml version="1.0" encoding="utf-8"?>
+<p:sld xmlns:a="http://schemas.openxmlformats.org/drawingml/2006/main" xmlns:p="http://schemas.openxmlformats.org/presentationml/2006/main" xmlns:r="http://schemas.openxmlformats.org/officeDocument/2006/relationships">
+  <p:cSld>
+    <p:spTree>
+      <p:nvGrpSpPr>
+        <p:cNvPr id="1" name=""/>
+        <p:cNvGrpSpPr/>
+        <p:nvPr/>
+      </p:nvGrpSpPr>
+      <p:grpSpPr/>
+      <p:sp>
+        <p:nvSpPr>
+          <p:cNvPr id="7" name="">
+            <a:extLst>
+              <a:ext uri="{FF2B5EF4-FFF2-40B4-BE49-F238E27FC236}">
+                <a16:creationId xmlns:a16="http://schemas.microsoft.com/office/drawing/2014/main" id="{FFD34040-A608-4A4D-9436-08E9A32AB30D}"/>
+              </a:ext>
+            </a:extLst>
+          </p:cNvPr>
+          <p:cNvSpPr>
+            <a:spLocks noGrp="1"/>
+          </p:cNvSpPr>
+          <p:nvPr/>
+        </p:nvSpPr>
+        <p:spPr>
+          <a:xfrm>
+            <a:off x="609600" y="342900"/>
+            <a:ext cx="10477500" cy="285750"/>
+          </a:xfrm>
+          <a:prstGeom prst="rect">
+            <a:avLst/>
+          </a:prstGeom>
+          <a:noFill/>
+          <a:ln w="0">
+            <a:noFill/>
+            <a:prstDash val="solid"/>
+          </a:ln>
+        </p:spPr>
+        <p:txBody>
+          <a:bodyPr/>
+          <a:lstStyle>
+            <a:defPPr>
+              <a:defRPr sz="1350" b="1">
+                <a:solidFill>
+                  <a:srgbClr val="157A80"/>
+                </a:solidFill>
+                <a:latin typeface="Arial"/>
+                <a:ea typeface="Arial"/>
+                <a:cs typeface="Arial"/>
+              </a:defRPr>
+            </a:defPPr>
+          </a:lstStyle>
+          <a:p>
+            <a:pPr>
+              <a:defRPr sz="1350" b="1">
+                <a:solidFill>
+                  <a:srgbClr val="157A80"/>
+                </a:solidFill>
+                <a:latin typeface="Arial"/>
+                <a:ea typeface="Arial"/>
+                <a:cs typeface="Arial"/>
+              </a:defRPr>
+            </a:pPr>
+            <a:r>
+              <a:rPr sz="1350" b="1">
+                <a:solidFill>
+                  <a:srgbClr val="157A80"/>
+                </a:solidFill>
+                <a:latin typeface="Arial"/>
+                <a:ea typeface="Arial"/>
+                <a:cs typeface="Arial"/>
+              </a:rPr>
+              <a:t>UNIT 2</a:t>
+            </a:r>
+          </a:p>
+        </p:txBody>
+      </p:sp>
+      <p:sp>
+        <p:nvSpPr>
+          <p:cNvPr id="2" name="">
+            <a:extLst>
+              <a:ext uri="{FF2B5EF4-FFF2-40B4-BE49-F238E27FC236}">
+                <a16:creationId xmlns:a16="http://schemas.microsoft.com/office/drawing/2014/main" id="{897D50C3-2951-437D-9286-819C0AD2206D}"/>
+              </a:ext>
+            </a:extLst>
+          </p:cNvPr>
+          <p:cNvSpPr>
+            <a:spLocks noGrp="1"/>
+          </p:cNvSpPr>
+          <p:nvPr/>
+        </p:nvSpPr>
+        <p:spPr>
+          <a:xfrm>
+            <a:off x="609600" y="838200"/>
+            <a:ext cx="10972800" cy="857250"/>
+          </a:xfrm>
+          <a:prstGeom prst="rect">
+            <a:avLst/>
+          </a:prstGeom>
+          <a:noFill/>
+          <a:ln w="0">
+            <a:noFill/>
+            <a:prstDash val="solid"/>
+          </a:ln>
+        </p:spPr>
+        <p:txBody>
+          <a:bodyPr/>
+          <a:lstStyle>
+            <a:defPPr>
+              <a:defRPr sz="3150" b="1">
+                <a:solidFill>
+                  <a:srgbClr val="142D4E"/>
+                </a:solidFill>
+                <a:latin typeface="Arial"/>
+                <a:ea typeface="Arial"/>
+                <a:cs typeface="Arial"/>
+              </a:defRPr>
+            </a:defPPr>
+          </a:lstStyle>
+          <a:p>
+            <a:pPr>
+              <a:defRPr sz="3150" b="1">
+                <a:solidFill>
+                  <a:srgbClr val="142D4E"/>
+                </a:solidFill>
+                <a:latin typeface="Arial"/>
+                <a:ea typeface="Arial"/>
+                <a:cs typeface="Arial"/>
+              </a:defRPr>
+            </a:pPr>
+            <a:r>
+              <a:rPr sz="3150" b="1">
+                <a:solidFill>
+                  <a:srgbClr val="142D4E"/>
+                </a:solidFill>
+                <a:latin typeface="Arial"/>
+                <a:ea typeface="Arial"/>
+                <a:cs typeface="Arial"/>
+              </a:rPr>
+              <a:t>Model comparison at a glance</a:t>
+            </a:r>
+          </a:p>
+        </p:txBody>
+      </p:sp>
+      <p:sp>
+        <p:nvSpPr>
+          <p:cNvPr id="3" name="">
+            <a:extLst>
+              <a:ext uri="{FF2B5EF4-FFF2-40B4-BE49-F238E27FC236}">
+                <a16:creationId xmlns:a16="http://schemas.microsoft.com/office/drawing/2014/main" id="{0D4E2AA2-04B0-4D08-98E4-3A8D9DD5E6B7}"/>
+              </a:ext>
+            </a:extLst>
+          </p:cNvPr>
+          <p:cNvSpPr>
+            <a:spLocks noGrp="1"/>
+          </p:cNvSpPr>
+          <p:nvPr/>
+        </p:nvSpPr>
+        <p:spPr>
+          <a:xfrm>
+            <a:off x="10953750" y="6343650"/>
+            <a:ext cx="619125" cy="238125"/>
+          </a:xfrm>
+          <a:prstGeom prst="rect">
+            <a:avLst/>
+          </a:prstGeom>
+          <a:noFill/>
+          <a:ln w="0">
+            <a:noFill/>
+            <a:prstDash val="solid"/>
+          </a:ln>
+        </p:spPr>
+        <p:txBody>
+          <a:bodyPr/>
+          <a:lstStyle>
+            <a:defPPr>
+              <a:defRPr sz="1200" b="0">
+                <a:solidFill>
+                  <a:srgbClr val="66758A"/>
+                </a:solidFill>
+                <a:latin typeface="Arial"/>
+                <a:ea typeface="Arial"/>
+                <a:cs typeface="Arial"/>
+              </a:defRPr>
+            </a:defPPr>
+          </a:lstStyle>
+          <a:p>
+            <a:pPr>
+              <a:defRPr sz="1200" b="0">
+                <a:solidFill>
+                  <a:srgbClr val="66758A"/>
+                </a:solidFill>
+                <a:latin typeface="Arial"/>
+                <a:ea typeface="Arial"/>
+                <a:cs typeface="Arial"/>
+              </a:defRPr>
+            </a:pPr>
+            <a:r>
+              <a:rPr sz="1200" b="0">
+                <a:solidFill>
+                  <a:srgbClr val="66758A"/>
+                </a:solidFill>
+                <a:latin typeface="Arial"/>
+                <a:ea typeface="Arial"/>
+                <a:cs typeface="Arial"/>
+              </a:rPr>
+              <a:t>09</a:t>
+            </a:r>
+          </a:p>
+        </p:txBody>
+      </p:sp>
+      <p:graphicFrame>
+        <p:nvGraphicFramePr>
+          <p:cNvPr id="8" name="Chart 7"/>
+          <p:cNvGraphicFramePr>
+            <a:graphicFrameLocks noGrp="1"/>
+          </p:cNvGraphicFramePr>
+          <p:nvPr/>
+        </p:nvGraphicFramePr>
+        <p:xfrm>
+          <a:off x="612648" y="1691640"/>
+          <a:ext cx="5852160" cy="3291840"/>
+        </p:xfrm>
+        <a:graphic>
+          <a:graphicData uri="http://schemas.openxmlformats.org/drawingml/2006/chart">
+            <c:chart xmlns:c="http://schemas.openxmlformats.org/drawingml/2006/chart" r:id="rId2"/>
+          </a:graphicData>
+        </a:graphic>
+      </p:graphicFrame>
+      <p:graphicFrame>
+        <p:nvGraphicFramePr>
+          <p:cNvPr id="9" name="Chart 8"/>
+          <p:cNvGraphicFramePr>
+            <a:graphicFrameLocks noGrp="1"/>
+          </p:cNvGraphicFramePr>
+          <p:nvPr/>
+        </p:nvGraphicFramePr>
+        <p:xfrm>
+          <a:off x="6583680" y="1691640"/>
+          <a:ext cx="5029200" cy="3291840"/>
+        </p:xfrm>
+        <a:graphic>
+          <a:graphicData uri="http://schemas.openxmlformats.org/drawingml/2006/chart">
+            <c:chart xmlns:c="http://schemas.openxmlformats.org/drawingml/2006/chart" r:id="rId3"/>
+          </a:graphicData>
+        </a:graphic>
+      </p:graphicFrame>
+      <p:sp>
+        <p:nvSpPr>
+          <p:cNvPr id="10" name="Rectangle 9"/>
+          <p:cNvSpPr/>
+          <p:nvPr/>
+        </p:nvSpPr>
+        <p:spPr>
+          <a:xfrm>
+            <a:off x="612648" y="5029200"/>
+            <a:ext cx="10972800" cy="777240"/>
+          </a:xfrm>
+          <a:prstGeom prst="rect">
+            <a:avLst/>
+          </a:prstGeom>
+          <a:solidFill>
+            <a:srgbClr val="FFFFFF"/>
+          </a:solidFill>
+          <a:ln>
+            <a:noFill/>
+          </a:ln>
+          <a:effectLst/>
+        </p:spPr>
+        <p:style>
+          <a:lnRef idx="1">
+            <a:schemeClr val="accent1"/>
+          </a:lnRef>
+          <a:fillRef idx="3">
+            <a:schemeClr val="accent1"/>
+          </a:fillRef>
+          <a:effectRef idx="2">
+            <a:schemeClr val="accent1"/>
+          </a:effectRef>
+          <a:fontRef idx="minor">
+            <a:schemeClr val="lt1"/>
+          </a:fontRef>
+        </p:style>
+        <p:txBody>
+          <a:bodyPr rtlCol="0" anchor="t" wrap="square" lIns="45720" rIns="45720" tIns="36576" bIns="36576"/>
+          <a:lstStyle/>
+          <a:p>
+            <a:pPr algn="l"/>
+            <a:r>
+              <a:rPr sz="1200" b="1">
+                <a:solidFill>
+                  <a:srgbClr val="142D4E"/>
+                </a:solidFill>
+                <a:latin typeface="Arial"/>
+              </a:rPr>
+              <a:t>How to read it: </a:t>
+            </a:r>
+            <a:r>
+              <a:rPr sz="1200" b="0">
+                <a:solidFill>
+                  <a:srgbClr val="233247"/>
+                </a:solidFill>
+                <a:latin typeface="Arial"/>
+              </a:rPr>
+              <a:t>guessing scores PR-AUC 0.106, ROC-AUC 0.500 and macro-F1 0.220. The three tree models tie at review level; at game level tuned XGBoost and Logistic Regression lead, and the intervals overlap (299 test games). Settings were tuned by grid search; the test set was scored once.</a:t>
+            </a:r>
+          </a:p>
+        </p:txBody>
+      </p:sp>
+      <p:sp>
+        <p:nvSpPr>
+          <p:cNvPr id="11" name="Rectangle 10"/>
+          <p:cNvSpPr/>
+          <p:nvPr/>
+        </p:nvSpPr>
+        <p:spPr>
+          <a:xfrm>
+            <a:off x="612648" y="5916168"/>
+            <a:ext cx="10972800" cy="420624"/>
+          </a:xfrm>
+          <a:prstGeom prst="rect">
+            <a:avLst/>
+          </a:prstGeom>
+          <a:solidFill>
+            <a:srgbClr val="EEF2F7"/>
+          </a:solidFill>
+          <a:ln>
+            <a:noFill/>
+          </a:ln>
+          <a:effectLst/>
+        </p:spPr>
+        <p:style>
+          <a:lnRef idx="1">
+            <a:schemeClr val="accent1"/>
+          </a:lnRef>
+          <a:fillRef idx="3">
+            <a:schemeClr val="accent1"/>
+          </a:fillRef>
+          <a:effectRef idx="2">
+            <a:schemeClr val="accent1"/>
+          </a:effectRef>
+          <a:fontRef idx="minor">
+            <a:schemeClr val="lt1"/>
+          </a:fontRef>
+        </p:style>
+        <p:txBody>
+          <a:bodyPr rtlCol="0" anchor="ctr"/>
+          <a:lstStyle/>
+          <a:p>
+            <a:pPr algn="ctr"/>
+          </a:p>
+        </p:txBody>
+      </p:sp>
+      <p:sp>
+        <p:nvSpPr>
+          <p:cNvPr id="12" name="Rectangle 11"/>
+          <p:cNvSpPr/>
+          <p:nvPr/>
+        </p:nvSpPr>
+        <p:spPr>
+          <a:xfrm>
+            <a:off x="612648" y="5916168"/>
+            <a:ext cx="64008" cy="420624"/>
+          </a:xfrm>
+          <a:prstGeom prst="rect">
+            <a:avLst/>
+          </a:prstGeom>
+          <a:solidFill>
+            <a:srgbClr val="C44E52"/>
+          </a:solidFill>
+          <a:ln>
+            <a:noFill/>
+          </a:ln>
+          <a:effectLst/>
+        </p:spPr>
+        <p:style>
+          <a:lnRef idx="1">
+            <a:schemeClr val="accent1"/>
+          </a:lnRef>
+          <a:fillRef idx="3">
+            <a:schemeClr val="accent1"/>
+          </a:fillRef>
+          <a:effectRef idx="2">
+            <a:schemeClr val="accent1"/>
+          </a:effectRef>
+          <a:fontRef idx="minor">
+            <a:schemeClr val="lt1"/>
+          </a:fontRef>
+        </p:style>
+        <p:txBody>
+          <a:bodyPr rtlCol="0" anchor="ctr"/>
+          <a:lstStyle/>
+          <a:p>
+            <a:pPr algn="ctr"/>
+          </a:p>
+        </p:txBody>
+      </p:sp>
+      <p:sp>
+        <p:nvSpPr>
+          <p:cNvPr id="13" name="Rectangle 12"/>
+          <p:cNvSpPr/>
+          <p:nvPr/>
+        </p:nvSpPr>
+        <p:spPr>
+          <a:xfrm>
+            <a:off x="676656" y="5916168"/>
+            <a:ext cx="10908792" cy="420624"/>
+          </a:xfrm>
+          <a:prstGeom prst="rect">
+            <a:avLst/>
+          </a:prstGeom>
+          <a:solidFill>
+            <a:srgbClr val="EEF2F7"/>
+          </a:solidFill>
+          <a:ln>
+            <a:noFill/>
+          </a:ln>
+          <a:effectLst/>
+        </p:spPr>
+        <p:style>
+          <a:lnRef idx="1">
+            <a:schemeClr val="accent1"/>
+          </a:lnRef>
+          <a:fillRef idx="3">
+            <a:schemeClr val="accent1"/>
+          </a:fillRef>
+          <a:effectRef idx="2">
+            <a:schemeClr val="accent1"/>
+          </a:effectRef>
+          <a:fontRef idx="minor">
+            <a:schemeClr val="lt1"/>
+          </a:fontRef>
+        </p:style>
+        <p:txBody>
+          <a:bodyPr rtlCol="0" anchor="ctr" wrap="square" tIns="36576" bIns="36576"/>
+          <a:lstStyle/>
+          <a:p>
+            <a:pPr algn="l"/>
+            <a:r>
+              <a:rPr sz="1200" b="1">
+                <a:solidFill>
+                  <a:srgbClr val="C44E52"/>
+                </a:solidFill>
+                <a:latin typeface="Arial"/>
+              </a:rPr>
+              <a:t>Takeaway   </a:t>
+            </a:r>
+            <a:r>
+              <a:rPr sz="1200" b="0">
+                <a:solidFill>
+                  <a:srgbClr val="233247"/>
+                </a:solidFill>
+                <a:latin typeface="Arial"/>
+              </a:rPr>
+              <a:t>Every model beats guessing, but store metadata alone reaches only ROC-AUC 0.73 and macro-F1 0.44; the next slides add the review text.</a:t>
+            </a:r>
+          </a:p>
+        </p:txBody>
+      </p:sp>
+    </p:spTree>
+  </p:cSld>
+  <p:clrMapOvr>
+    <a:masterClrMapping/>
+  </p:clrMapOvr>
+</p:sld>
+</file>
+
+<file path=ppt/slides/slide19.xml><?xml version="1.0" encoding="utf-8"?>
+<p:sld xmlns:a="http://schemas.openxmlformats.org/drawingml/2006/main" xmlns:p="http://schemas.openxmlformats.org/presentationml/2006/main" xmlns:r="http://schemas.openxmlformats.org/officeDocument/2006/relationships">
+  <p:cSld>
+    <p:spTree>
+      <p:nvGrpSpPr>
+        <p:cNvPr id="1" name=""/>
+        <p:cNvGrpSpPr/>
+        <p:nvPr/>
+      </p:nvGrpSpPr>
+      <p:grpSpPr/>
+      <p:sp>
+        <p:nvSpPr>
+          <p:cNvPr id="7" name="">
+            <a:extLst>
+              <a:ext uri="{FF2B5EF4-FFF2-40B4-BE49-F238E27FC236}">
+                <a16:creationId xmlns:a16="http://schemas.microsoft.com/office/drawing/2014/main" id="{CBA0D3AE-4AF7-4CC4-8F37-1474DB9B9BA5}"/>
+              </a:ext>
+            </a:extLst>
+          </p:cNvPr>
+          <p:cNvSpPr>
+            <a:spLocks noGrp="1"/>
+          </p:cNvSpPr>
+          <p:nvPr/>
+        </p:nvSpPr>
+        <p:spPr>
+          <a:xfrm>
+            <a:off x="609600" y="342900"/>
+            <a:ext cx="10477500" cy="285750"/>
+          </a:xfrm>
+          <a:prstGeom prst="rect">
+            <a:avLst/>
+          </a:prstGeom>
+          <a:noFill/>
+          <a:ln w="0">
+            <a:noFill/>
+            <a:prstDash val="solid"/>
+          </a:ln>
+        </p:spPr>
+        <p:txBody>
+          <a:bodyPr/>
+          <a:lstStyle>
+            <a:defPPr>
+              <a:defRPr sz="1350" b="1">
+                <a:solidFill>
+                  <a:srgbClr val="157A80"/>
+                </a:solidFill>
+                <a:latin typeface="Arial"/>
+                <a:ea typeface="Arial"/>
+                <a:cs typeface="Arial"/>
+              </a:defRPr>
+            </a:defPPr>
+          </a:lstStyle>
+          <a:p>
+            <a:pPr>
+              <a:defRPr sz="1350" b="1">
+                <a:solidFill>
+                  <a:srgbClr val="157A80"/>
+                </a:solidFill>
+                <a:latin typeface="Arial"/>
+                <a:ea typeface="Arial"/>
+                <a:cs typeface="Arial"/>
+              </a:defRPr>
+            </a:pPr>
+            <a:r>
+              <a:rPr sz="1350" b="1">
+                <a:solidFill>
+                  <a:srgbClr val="157A80"/>
+                </a:solidFill>
+                <a:latin typeface="Arial"/>
+                <a:ea typeface="Arial"/>
+                <a:cs typeface="Arial"/>
+              </a:rPr>
+              <a:t>UNIT 3</a:t>
+            </a:r>
+          </a:p>
+        </p:txBody>
+      </p:sp>
+      <p:sp>
+        <p:nvSpPr>
+          <p:cNvPr id="2" name="">
+            <a:extLst>
+              <a:ext uri="{FF2B5EF4-FFF2-40B4-BE49-F238E27FC236}">
+                <a16:creationId xmlns:a16="http://schemas.microsoft.com/office/drawing/2014/main" id="{78BB2EEA-EA2C-4AF7-AF01-C4956469B876}"/>
+              </a:ext>
+            </a:extLst>
+          </p:cNvPr>
+          <p:cNvSpPr>
+            <a:spLocks noGrp="1"/>
+          </p:cNvSpPr>
+          <p:nvPr/>
+        </p:nvSpPr>
+        <p:spPr>
+          <a:xfrm>
+            <a:off x="609600" y="838200"/>
+            <a:ext cx="10972800" cy="857250"/>
+          </a:xfrm>
+          <a:prstGeom prst="rect">
+            <a:avLst/>
+          </a:prstGeom>
+          <a:noFill/>
+          <a:ln w="0">
+            <a:noFill/>
+            <a:prstDash val="solid"/>
+          </a:ln>
+        </p:spPr>
+        <p:txBody>
+          <a:bodyPr/>
+          <a:lstStyle>
+            <a:defPPr>
+              <a:defRPr sz="3150" b="1">
+                <a:solidFill>
+                  <a:srgbClr val="142D4E"/>
+                </a:solidFill>
+                <a:latin typeface="Arial"/>
+                <a:ea typeface="Arial"/>
+                <a:cs typeface="Arial"/>
+              </a:defRPr>
+            </a:defPPr>
+          </a:lstStyle>
+          <a:p>
+            <a:pPr>
+              <a:defRPr sz="3150" b="1">
+                <a:solidFill>
+                  <a:srgbClr val="142D4E"/>
+                </a:solidFill>
+                <a:latin typeface="Arial"/>
+                <a:ea typeface="Arial"/>
+                <a:cs typeface="Arial"/>
+              </a:defRPr>
+            </a:pPr>
+            <a:r>
+              <a:rPr sz="3150" b="1">
+                <a:solidFill>
+                  <a:srgbClr val="142D4E"/>
+                </a:solidFill>
+                <a:latin typeface="Arial"/>
+                <a:ea typeface="Arial"/>
+                <a:cs typeface="Arial"/>
+              </a:rPr>
+              <a:t>Method 1 results at a glance</a:t>
+            </a:r>
+          </a:p>
+        </p:txBody>
+      </p:sp>
+      <p:sp>
+        <p:nvSpPr>
+          <p:cNvPr id="3" name="">
+            <a:extLst>
+              <a:ext uri="{FF2B5EF4-FFF2-40B4-BE49-F238E27FC236}">
+                <a16:creationId xmlns:a16="http://schemas.microsoft.com/office/drawing/2014/main" id="{8695F8C2-A08E-4AA5-A111-378AE00DBA0C}"/>
+              </a:ext>
+            </a:extLst>
+          </p:cNvPr>
+          <p:cNvSpPr>
+            <a:spLocks noGrp="1"/>
+          </p:cNvSpPr>
+          <p:nvPr/>
+        </p:nvSpPr>
+        <p:spPr>
+          <a:xfrm>
+            <a:off x="10953750" y="6343650"/>
+            <a:ext cx="619125" cy="238125"/>
+          </a:xfrm>
+          <a:prstGeom prst="rect">
+            <a:avLst/>
+          </a:prstGeom>
+          <a:noFill/>
+          <a:ln w="0">
+            <a:noFill/>
+            <a:prstDash val="solid"/>
+          </a:ln>
+        </p:spPr>
+        <p:txBody>
+          <a:bodyPr/>
+          <a:lstStyle>
+            <a:defPPr>
+              <a:defRPr sz="1200" b="0">
+                <a:solidFill>
+                  <a:srgbClr val="66758A"/>
+                </a:solidFill>
+                <a:latin typeface="Arial"/>
+                <a:ea typeface="Arial"/>
+                <a:cs typeface="Arial"/>
+              </a:defRPr>
+            </a:defPPr>
+          </a:lstStyle>
+          <a:p>
+            <a:pPr>
+              <a:defRPr sz="1200" b="0">
+                <a:solidFill>
+                  <a:srgbClr val="66758A"/>
+                </a:solidFill>
+                <a:latin typeface="Arial"/>
+                <a:ea typeface="Arial"/>
+                <a:cs typeface="Arial"/>
+              </a:defRPr>
+            </a:pPr>
+            <a:r>
+              <a:rPr sz="1200" b="0">
+                <a:solidFill>
+                  <a:srgbClr val="66758A"/>
+                </a:solidFill>
+                <a:latin typeface="Arial"/>
+                <a:ea typeface="Arial"/>
+                <a:cs typeface="Arial"/>
+              </a:rPr>
+              <a:t>12</a:t>
+            </a:r>
+          </a:p>
+        </p:txBody>
+      </p:sp>
+      <p:graphicFrame>
+        <p:nvGraphicFramePr>
+          <p:cNvPr id="8" name="Chart 7"/>
+          <p:cNvGraphicFramePr>
+            <a:graphicFrameLocks noGrp="1"/>
+          </p:cNvGraphicFramePr>
+          <p:nvPr/>
+        </p:nvGraphicFramePr>
+        <p:xfrm>
+          <a:off x="612648" y="1691640"/>
+          <a:ext cx="5852160" cy="3291840"/>
+        </p:xfrm>
+        <a:graphic>
+          <a:graphicData uri="http://schemas.openxmlformats.org/drawingml/2006/chart">
+            <c:chart xmlns:c="http://schemas.openxmlformats.org/drawingml/2006/chart" r:id="rId2"/>
+          </a:graphicData>
+        </a:graphic>
+      </p:graphicFrame>
+      <p:graphicFrame>
+        <p:nvGraphicFramePr>
+          <p:cNvPr id="9" name="Chart 8"/>
+          <p:cNvGraphicFramePr>
+            <a:graphicFrameLocks noGrp="1"/>
+          </p:cNvGraphicFramePr>
+          <p:nvPr/>
+        </p:nvGraphicFramePr>
+        <p:xfrm>
+          <a:off x="6583680" y="1691640"/>
+          <a:ext cx="5029200" cy="3291840"/>
+        </p:xfrm>
+        <a:graphic>
+          <a:graphicData uri="http://schemas.openxmlformats.org/drawingml/2006/chart">
+            <c:chart xmlns:c="http://schemas.openxmlformats.org/drawingml/2006/chart" r:id="rId3"/>
+          </a:graphicData>
+        </a:graphic>
+      </p:graphicFrame>
+      <p:sp>
+        <p:nvSpPr>
+          <p:cNvPr id="10" name="Rectangle 9"/>
+          <p:cNvSpPr/>
+          <p:nvPr/>
+        </p:nvSpPr>
+        <p:spPr>
+          <a:xfrm>
+            <a:off x="612648" y="5029200"/>
+            <a:ext cx="10972800" cy="777240"/>
+          </a:xfrm>
+          <a:prstGeom prst="rect">
+            <a:avLst/>
+          </a:prstGeom>
+          <a:solidFill>
+            <a:srgbClr val="FFFFFF"/>
+          </a:solidFill>
+          <a:ln>
+            <a:noFill/>
+          </a:ln>
+          <a:effectLst/>
+        </p:spPr>
+        <p:style>
+          <a:lnRef idx="1">
+            <a:schemeClr val="accent1"/>
+          </a:lnRef>
+          <a:fillRef idx="3">
+            <a:schemeClr val="accent1"/>
+          </a:fillRef>
+          <a:effectRef idx="2">
+            <a:schemeClr val="accent1"/>
+          </a:effectRef>
+          <a:fontRef idx="minor">
+            <a:schemeClr val="lt1"/>
+          </a:fontRef>
+        </p:style>
+        <p:txBody>
+          <a:bodyPr rtlCol="0" anchor="t" wrap="square" lIns="45720" rIns="45720" tIns="36576" bIns="36576"/>
+          <a:lstStyle/>
+          <a:p>
+            <a:pPr algn="l"/>
+            <a:r>
+              <a:rPr sz="1200" b="1">
+                <a:solidFill>
+                  <a:srgbClr val="142D4E"/>
+                </a:solidFill>
+                <a:latin typeface="Arial"/>
+              </a:rPr>
+              <a:t>How to read it: </a:t>
+            </a:r>
+            <a:r>
+              <a:rPr sz="1200" b="0">
+                <a:solidFill>
+                  <a:srgbClr val="233247"/>
+                </a:solidFill>
+                <a:latin typeface="Arial"/>
+              </a:rPr>
+              <a:t>left, adding the text lifts ROC-AUC from 0.76 to 0.97 on the same test reviews. Right, crashes and multiplayer bugs lead early negatives (29% against 24%), boss and balance later (34% against 25%); the themes are exploratory (blind check 35.5%).</a:t>
+            </a:r>
+          </a:p>
+        </p:txBody>
+      </p:sp>
+      <p:sp>
+        <p:nvSpPr>
+          <p:cNvPr id="11" name="Rectangle 10"/>
+          <p:cNvSpPr/>
+          <p:nvPr/>
+        </p:nvSpPr>
+        <p:spPr>
+          <a:xfrm>
+            <a:off x="612648" y="5916168"/>
+            <a:ext cx="10972800" cy="420624"/>
+          </a:xfrm>
+          <a:prstGeom prst="rect">
+            <a:avLst/>
+          </a:prstGeom>
+          <a:solidFill>
+            <a:srgbClr val="EEF2F7"/>
+          </a:solidFill>
+          <a:ln>
+            <a:noFill/>
+          </a:ln>
+          <a:effectLst/>
+        </p:spPr>
+        <p:style>
+          <a:lnRef idx="1">
+            <a:schemeClr val="accent1"/>
+          </a:lnRef>
+          <a:fillRef idx="3">
+            <a:schemeClr val="accent1"/>
+          </a:fillRef>
+          <a:effectRef idx="2">
+            <a:schemeClr val="accent1"/>
+          </a:effectRef>
+          <a:fontRef idx="minor">
+            <a:schemeClr val="lt1"/>
+          </a:fontRef>
+        </p:style>
+        <p:txBody>
+          <a:bodyPr rtlCol="0" anchor="ctr"/>
+          <a:lstStyle/>
+          <a:p>
+            <a:pPr algn="ctr"/>
+          </a:p>
+        </p:txBody>
+      </p:sp>
+      <p:sp>
+        <p:nvSpPr>
+          <p:cNvPr id="12" name="Rectangle 11"/>
+          <p:cNvSpPr/>
+          <p:nvPr/>
+        </p:nvSpPr>
+        <p:spPr>
+          <a:xfrm>
+            <a:off x="612648" y="5916168"/>
+            <a:ext cx="64008" cy="420624"/>
+          </a:xfrm>
+          <a:prstGeom prst="rect">
+            <a:avLst/>
+          </a:prstGeom>
+          <a:solidFill>
+            <a:srgbClr val="C44E52"/>
+          </a:solidFill>
+          <a:ln>
+            <a:noFill/>
+          </a:ln>
+          <a:effectLst/>
+        </p:spPr>
+        <p:style>
+          <a:lnRef idx="1">
+            <a:schemeClr val="accent1"/>
+          </a:lnRef>
+          <a:fillRef idx="3">
+            <a:schemeClr val="accent1"/>
+          </a:fillRef>
+          <a:effectRef idx="2">
+            <a:schemeClr val="accent1"/>
+          </a:effectRef>
+          <a:fontRef idx="minor">
+            <a:schemeClr val="lt1"/>
+          </a:fontRef>
+        </p:style>
+        <p:txBody>
+          <a:bodyPr rtlCol="0" anchor="ctr"/>
+          <a:lstStyle/>
+          <a:p>
+            <a:pPr algn="ctr"/>
+          </a:p>
+        </p:txBody>
+      </p:sp>
+      <p:sp>
+        <p:nvSpPr>
+          <p:cNvPr id="13" name="Rectangle 12"/>
+          <p:cNvSpPr/>
+          <p:nvPr/>
+        </p:nvSpPr>
+        <p:spPr>
+          <a:xfrm>
+            <a:off x="676656" y="5916168"/>
+            <a:ext cx="10908792" cy="420624"/>
+          </a:xfrm>
+          <a:prstGeom prst="rect">
+            <a:avLst/>
+          </a:prstGeom>
+          <a:solidFill>
+            <a:srgbClr val="EEF2F7"/>
+          </a:solidFill>
+          <a:ln>
+            <a:noFill/>
+          </a:ln>
+          <a:effectLst/>
+        </p:spPr>
+        <p:style>
+          <a:lnRef idx="1">
+            <a:schemeClr val="accent1"/>
+          </a:lnRef>
+          <a:fillRef idx="3">
+            <a:schemeClr val="accent1"/>
+          </a:fillRef>
+          <a:effectRef idx="2">
+            <a:schemeClr val="accent1"/>
+          </a:effectRef>
+          <a:fontRef idx="minor">
+            <a:schemeClr val="lt1"/>
+          </a:fontRef>
+        </p:style>
+        <p:txBody>
+          <a:bodyPr rtlCol="0" anchor="ctr" wrap="square" tIns="36576" bIns="36576"/>
+          <a:lstStyle/>
+          <a:p>
+            <a:pPr algn="l"/>
+            <a:r>
+              <a:rPr sz="1200" b="1">
+                <a:solidFill>
+                  <a:srgbClr val="C44E52"/>
+                </a:solidFill>
+                <a:latin typeface="Arial"/>
+              </a:rPr>
+              <a:t>Takeaway   </a:t>
+            </a:r>
+            <a:r>
+              <a:rPr sz="1200" b="0">
+                <a:solidFill>
+                  <a:srgbClr val="233247"/>
+                </a:solidFill>
+                <a:latin typeface="Arial"/>
+              </a:rPr>
+              <a:t>The words of a review carry the signal: a text model flags negative reviews far better than metadata, and the complaints change with playtime.</a:t>
+            </a:r>
+          </a:p>
+        </p:txBody>
+      </p:sp>
+    </p:spTree>
+  </p:cSld>
+  <p:clrMapOvr>
+    <a:masterClrMapping/>
+  </p:clrMapOvr>
 </p:sld>
 </file>
 
@@ -14387,6 +17007,473 @@
       </p:ext>
     </p:extLst>
   </p:cSld>
+</p:sld>
+</file>
+
+<file path=ppt/slides/slide20.xml><?xml version="1.0" encoding="utf-8"?>
+<p:sld xmlns:a="http://schemas.openxmlformats.org/drawingml/2006/main" xmlns:p="http://schemas.openxmlformats.org/presentationml/2006/main" xmlns:r="http://schemas.openxmlformats.org/officeDocument/2006/relationships">
+  <p:cSld>
+    <p:spTree>
+      <p:nvGrpSpPr>
+        <p:cNvPr id="1" name=""/>
+        <p:cNvGrpSpPr/>
+        <p:nvPr/>
+      </p:nvGrpSpPr>
+      <p:grpSpPr/>
+      <p:sp>
+        <p:nvSpPr>
+          <p:cNvPr id="7" name="">
+            <a:extLst>
+              <a:ext uri="{FF2B5EF4-FFF2-40B4-BE49-F238E27FC236}">
+                <a16:creationId xmlns:a16="http://schemas.microsoft.com/office/drawing/2014/main" id="{9F058891-18A5-414B-856B-FE11F25A696B}"/>
+              </a:ext>
+            </a:extLst>
+          </p:cNvPr>
+          <p:cNvSpPr>
+            <a:spLocks noGrp="1"/>
+          </p:cNvSpPr>
+          <p:nvPr/>
+        </p:nvSpPr>
+        <p:spPr>
+          <a:xfrm>
+            <a:off x="609600" y="342900"/>
+            <a:ext cx="10477500" cy="285750"/>
+          </a:xfrm>
+          <a:prstGeom prst="rect">
+            <a:avLst/>
+          </a:prstGeom>
+          <a:noFill/>
+          <a:ln w="0">
+            <a:noFill/>
+            <a:prstDash val="solid"/>
+          </a:ln>
+        </p:spPr>
+        <p:txBody>
+          <a:bodyPr/>
+          <a:lstStyle>
+            <a:defPPr>
+              <a:defRPr sz="1350" b="1">
+                <a:solidFill>
+                  <a:srgbClr val="157A80"/>
+                </a:solidFill>
+                <a:latin typeface="Arial"/>
+                <a:ea typeface="Arial"/>
+                <a:cs typeface="Arial"/>
+              </a:defRPr>
+            </a:defPPr>
+          </a:lstStyle>
+          <a:p>
+            <a:pPr>
+              <a:defRPr sz="1350" b="1">
+                <a:solidFill>
+                  <a:srgbClr val="157A80"/>
+                </a:solidFill>
+                <a:latin typeface="Arial"/>
+                <a:ea typeface="Arial"/>
+                <a:cs typeface="Arial"/>
+              </a:defRPr>
+            </a:pPr>
+            <a:r>
+              <a:rPr sz="1350" b="1">
+                <a:solidFill>
+                  <a:srgbClr val="157A80"/>
+                </a:solidFill>
+                <a:latin typeface="Arial"/>
+                <a:ea typeface="Arial"/>
+                <a:cs typeface="Arial"/>
+              </a:rPr>
+              <a:t>UNIT 3</a:t>
+            </a:r>
+          </a:p>
+        </p:txBody>
+      </p:sp>
+      <p:sp>
+        <p:nvSpPr>
+          <p:cNvPr id="2" name="">
+            <a:extLst>
+              <a:ext uri="{FF2B5EF4-FFF2-40B4-BE49-F238E27FC236}">
+                <a16:creationId xmlns:a16="http://schemas.microsoft.com/office/drawing/2014/main" id="{783AB2B7-C380-4333-8683-F6BBF01123FD}"/>
+              </a:ext>
+            </a:extLst>
+          </p:cNvPr>
+          <p:cNvSpPr>
+            <a:spLocks noGrp="1"/>
+          </p:cNvSpPr>
+          <p:nvPr/>
+        </p:nvSpPr>
+        <p:spPr>
+          <a:xfrm>
+            <a:off x="609600" y="838200"/>
+            <a:ext cx="10972800" cy="857250"/>
+          </a:xfrm>
+          <a:prstGeom prst="rect">
+            <a:avLst/>
+          </a:prstGeom>
+          <a:noFill/>
+          <a:ln w="0">
+            <a:noFill/>
+            <a:prstDash val="solid"/>
+          </a:ln>
+        </p:spPr>
+        <p:txBody>
+          <a:bodyPr/>
+          <a:lstStyle>
+            <a:defPPr>
+              <a:defRPr sz="3150" b="1">
+                <a:solidFill>
+                  <a:srgbClr val="142D4E"/>
+                </a:solidFill>
+                <a:latin typeface="Arial"/>
+                <a:ea typeface="Arial"/>
+                <a:cs typeface="Arial"/>
+              </a:defRPr>
+            </a:defPPr>
+          </a:lstStyle>
+          <a:p>
+            <a:pPr>
+              <a:defRPr sz="3150" b="1">
+                <a:solidFill>
+                  <a:srgbClr val="142D4E"/>
+                </a:solidFill>
+                <a:latin typeface="Arial"/>
+                <a:ea typeface="Arial"/>
+                <a:cs typeface="Arial"/>
+              </a:defRPr>
+            </a:pPr>
+            <a:r>
+              <a:rPr sz="3150" b="1">
+                <a:solidFill>
+                  <a:srgbClr val="142D4E"/>
+                </a:solidFill>
+                <a:latin typeface="Arial"/>
+                <a:ea typeface="Arial"/>
+                <a:cs typeface="Arial"/>
+              </a:rPr>
+              <a:t>Method 2 rules at a glance</a:t>
+            </a:r>
+          </a:p>
+        </p:txBody>
+      </p:sp>
+      <p:sp>
+        <p:nvSpPr>
+          <p:cNvPr id="3" name="">
+            <a:extLst>
+              <a:ext uri="{FF2B5EF4-FFF2-40B4-BE49-F238E27FC236}">
+                <a16:creationId xmlns:a16="http://schemas.microsoft.com/office/drawing/2014/main" id="{5260EA7B-3BBC-4C86-9EB4-FC754B5614C4}"/>
+              </a:ext>
+            </a:extLst>
+          </p:cNvPr>
+          <p:cNvSpPr>
+            <a:spLocks noGrp="1"/>
+          </p:cNvSpPr>
+          <p:nvPr/>
+        </p:nvSpPr>
+        <p:spPr>
+          <a:xfrm>
+            <a:off x="10953750" y="6343650"/>
+            <a:ext cx="619125" cy="238125"/>
+          </a:xfrm>
+          <a:prstGeom prst="rect">
+            <a:avLst/>
+          </a:prstGeom>
+          <a:noFill/>
+          <a:ln w="0">
+            <a:noFill/>
+            <a:prstDash val="solid"/>
+          </a:ln>
+        </p:spPr>
+        <p:txBody>
+          <a:bodyPr/>
+          <a:lstStyle>
+            <a:defPPr>
+              <a:defRPr sz="1200" b="0">
+                <a:solidFill>
+                  <a:srgbClr val="66758A"/>
+                </a:solidFill>
+                <a:latin typeface="Arial"/>
+                <a:ea typeface="Arial"/>
+                <a:cs typeface="Arial"/>
+              </a:defRPr>
+            </a:defPPr>
+          </a:lstStyle>
+          <a:p>
+            <a:pPr>
+              <a:defRPr sz="1200" b="0">
+                <a:solidFill>
+                  <a:srgbClr val="66758A"/>
+                </a:solidFill>
+                <a:latin typeface="Arial"/>
+                <a:ea typeface="Arial"/>
+                <a:cs typeface="Arial"/>
+              </a:defRPr>
+            </a:pPr>
+            <a:r>
+              <a:rPr sz="1200" b="0">
+                <a:solidFill>
+                  <a:srgbClr val="66758A"/>
+                </a:solidFill>
+                <a:latin typeface="Arial"/>
+                <a:ea typeface="Arial"/>
+                <a:cs typeface="Arial"/>
+              </a:rPr>
+              <a:t>15</a:t>
+            </a:r>
+          </a:p>
+        </p:txBody>
+      </p:sp>
+      <p:graphicFrame>
+        <p:nvGraphicFramePr>
+          <p:cNvPr id="8" name="Chart 7"/>
+          <p:cNvGraphicFramePr>
+            <a:graphicFrameLocks noGrp="1"/>
+          </p:cNvGraphicFramePr>
+          <p:nvPr/>
+        </p:nvGraphicFramePr>
+        <p:xfrm>
+          <a:off x="612648" y="1691640"/>
+          <a:ext cx="6949440" cy="3291840"/>
+        </p:xfrm>
+        <a:graphic>
+          <a:graphicData uri="http://schemas.openxmlformats.org/drawingml/2006/chart">
+            <c:chart xmlns:c="http://schemas.openxmlformats.org/drawingml/2006/chart" r:id="rId2"/>
+          </a:graphicData>
+        </a:graphic>
+      </p:graphicFrame>
+      <p:graphicFrame>
+        <p:nvGraphicFramePr>
+          <p:cNvPr id="9" name="Chart 8"/>
+          <p:cNvGraphicFramePr>
+            <a:graphicFrameLocks noGrp="1"/>
+          </p:cNvGraphicFramePr>
+          <p:nvPr/>
+        </p:nvGraphicFramePr>
+        <p:xfrm>
+          <a:off x="7680960" y="1691640"/>
+          <a:ext cx="3931920" cy="3291840"/>
+        </p:xfrm>
+        <a:graphic>
+          <a:graphicData uri="http://schemas.openxmlformats.org/drawingml/2006/chart">
+            <c:chart xmlns:c="http://schemas.openxmlformats.org/drawingml/2006/chart" r:id="rId3"/>
+          </a:graphicData>
+        </a:graphic>
+      </p:graphicFrame>
+      <p:sp>
+        <p:nvSpPr>
+          <p:cNvPr id="10" name="Rectangle 9"/>
+          <p:cNvSpPr/>
+          <p:nvPr/>
+        </p:nvSpPr>
+        <p:spPr>
+          <a:xfrm>
+            <a:off x="612648" y="5029200"/>
+            <a:ext cx="10972800" cy="777240"/>
+          </a:xfrm>
+          <a:prstGeom prst="rect">
+            <a:avLst/>
+          </a:prstGeom>
+          <a:solidFill>
+            <a:srgbClr val="FFFFFF"/>
+          </a:solidFill>
+          <a:ln>
+            <a:noFill/>
+          </a:ln>
+          <a:effectLst/>
+        </p:spPr>
+        <p:style>
+          <a:lnRef idx="1">
+            <a:schemeClr val="accent1"/>
+          </a:lnRef>
+          <a:fillRef idx="3">
+            <a:schemeClr val="accent1"/>
+          </a:fillRef>
+          <a:effectRef idx="2">
+            <a:schemeClr val="accent1"/>
+          </a:effectRef>
+          <a:fontRef idx="minor">
+            <a:schemeClr val="lt1"/>
+          </a:fontRef>
+        </p:style>
+        <p:txBody>
+          <a:bodyPr rtlCol="0" anchor="t" wrap="square" lIns="45720" rIns="45720" tIns="36576" bIns="36576"/>
+          <a:lstStyle/>
+          <a:p>
+            <a:pPr algn="l"/>
+            <a:r>
+              <a:rPr sz="1200" b="1">
+                <a:solidFill>
+                  <a:srgbClr val="142D4E"/>
+                </a:solidFill>
+                <a:latin typeface="Arial"/>
+              </a:rPr>
+              <a:t>How to read it: </a:t>
+            </a:r>
+            <a:r>
+              <a:rPr sz="1200" b="0">
+                <a:solidFill>
+                  <a:srgbClr val="233247"/>
+                </a:solidFill>
+                <a:latin typeface="Arial"/>
+              </a:rPr>
+              <a:t>each pair of bars is one rule: the share of training games with that tag combination that reached the Strong tier, then the same share on unseen test games (4 to 14 games per rule, so noisy). About two-thirds of rules hold in every configuration.</a:t>
+            </a:r>
+          </a:p>
+        </p:txBody>
+      </p:sp>
+      <p:sp>
+        <p:nvSpPr>
+          <p:cNvPr id="11" name="Rectangle 10"/>
+          <p:cNvSpPr/>
+          <p:nvPr/>
+        </p:nvSpPr>
+        <p:spPr>
+          <a:xfrm>
+            <a:off x="612648" y="5916168"/>
+            <a:ext cx="10972800" cy="420624"/>
+          </a:xfrm>
+          <a:prstGeom prst="rect">
+            <a:avLst/>
+          </a:prstGeom>
+          <a:solidFill>
+            <a:srgbClr val="EEF2F7"/>
+          </a:solidFill>
+          <a:ln>
+            <a:noFill/>
+          </a:ln>
+          <a:effectLst/>
+        </p:spPr>
+        <p:style>
+          <a:lnRef idx="1">
+            <a:schemeClr val="accent1"/>
+          </a:lnRef>
+          <a:fillRef idx="3">
+            <a:schemeClr val="accent1"/>
+          </a:fillRef>
+          <a:effectRef idx="2">
+            <a:schemeClr val="accent1"/>
+          </a:effectRef>
+          <a:fontRef idx="minor">
+            <a:schemeClr val="lt1"/>
+          </a:fontRef>
+        </p:style>
+        <p:txBody>
+          <a:bodyPr rtlCol="0" anchor="ctr"/>
+          <a:lstStyle/>
+          <a:p>
+            <a:pPr algn="ctr"/>
+          </a:p>
+        </p:txBody>
+      </p:sp>
+      <p:sp>
+        <p:nvSpPr>
+          <p:cNvPr id="12" name="Rectangle 11"/>
+          <p:cNvSpPr/>
+          <p:nvPr/>
+        </p:nvSpPr>
+        <p:spPr>
+          <a:xfrm>
+            <a:off x="612648" y="5916168"/>
+            <a:ext cx="64008" cy="420624"/>
+          </a:xfrm>
+          <a:prstGeom prst="rect">
+            <a:avLst/>
+          </a:prstGeom>
+          <a:solidFill>
+            <a:srgbClr val="C44E52"/>
+          </a:solidFill>
+          <a:ln>
+            <a:noFill/>
+          </a:ln>
+          <a:effectLst/>
+        </p:spPr>
+        <p:style>
+          <a:lnRef idx="1">
+            <a:schemeClr val="accent1"/>
+          </a:lnRef>
+          <a:fillRef idx="3">
+            <a:schemeClr val="accent1"/>
+          </a:fillRef>
+          <a:effectRef idx="2">
+            <a:schemeClr val="accent1"/>
+          </a:effectRef>
+          <a:fontRef idx="minor">
+            <a:schemeClr val="lt1"/>
+          </a:fontRef>
+        </p:style>
+        <p:txBody>
+          <a:bodyPr rtlCol="0" anchor="ctr"/>
+          <a:lstStyle/>
+          <a:p>
+            <a:pPr algn="ctr"/>
+          </a:p>
+        </p:txBody>
+      </p:sp>
+      <p:sp>
+        <p:nvSpPr>
+          <p:cNvPr id="13" name="Rectangle 12"/>
+          <p:cNvSpPr/>
+          <p:nvPr/>
+        </p:nvSpPr>
+        <p:spPr>
+          <a:xfrm>
+            <a:off x="676656" y="5916168"/>
+            <a:ext cx="10908792" cy="420624"/>
+          </a:xfrm>
+          <a:prstGeom prst="rect">
+            <a:avLst/>
+          </a:prstGeom>
+          <a:solidFill>
+            <a:srgbClr val="EEF2F7"/>
+          </a:solidFill>
+          <a:ln>
+            <a:noFill/>
+          </a:ln>
+          <a:effectLst/>
+        </p:spPr>
+        <p:style>
+          <a:lnRef idx="1">
+            <a:schemeClr val="accent1"/>
+          </a:lnRef>
+          <a:fillRef idx="3">
+            <a:schemeClr val="accent1"/>
+          </a:fillRef>
+          <a:effectRef idx="2">
+            <a:schemeClr val="accent1"/>
+          </a:effectRef>
+          <a:fontRef idx="minor">
+            <a:schemeClr val="lt1"/>
+          </a:fontRef>
+        </p:style>
+        <p:txBody>
+          <a:bodyPr rtlCol="0" anchor="ctr" wrap="square" tIns="36576" bIns="36576"/>
+          <a:lstStyle/>
+          <a:p>
+            <a:pPr algn="l"/>
+            <a:r>
+              <a:rPr sz="1200" b="1">
+                <a:solidFill>
+                  <a:srgbClr val="C44E52"/>
+                </a:solidFill>
+                <a:latin typeface="Arial"/>
+              </a:rPr>
+              <a:t>Takeaway   </a:t>
+            </a:r>
+            <a:r>
+              <a:rPr sz="1200" b="0">
+                <a:solidFill>
+                  <a:srgbClr val="233247"/>
+                </a:solidFill>
+                <a:latin typeface="Arial"/>
+              </a:rPr>
+              <a:t>Strong combinations mostly hold up on unseen games, but test shares are lower than training shares and the groups are small: treat each rule as a hypothesis.</a:t>
+            </a:r>
+          </a:p>
+        </p:txBody>
+      </p:sp>
+    </p:spTree>
+  </p:cSld>
+  <p:clrMapOvr>
+    <a:masterClrMapping/>
+  </p:clrMapOvr>
 </p:sld>
 </file>
 
@@ -21058,7 +24145,7 @@
                 <a:ea typeface="Arial"/>
                 <a:cs typeface="Arial"/>
               </a:rPr>
-              <a:t>09</a:t>
+              <a:t>10</a:t>
             </a:r>
           </a:p>
         </p:txBody>
